--- a/cloudflare-deploy/public/library/agency/agency-kr.pptx
+++ b/cloudflare-deploy/public/library/agency/agency-kr.pptx
@@ -36,6 +36,8 @@
     <p:sldId id="284" r:id="rId35"/>
     <p:sldId id="285" r:id="rId36"/>
     <p:sldId id="286" r:id="rId37"/>
+    <p:sldId id="287" r:id="rId38"/>
+    <p:sldId id="288" r:id="rId39"/>
   </p:sldIdLst>
   <p:sldSz cx="12191695" cy="6858000" type="screen4x3"/>
   <p:notesSz cx="6858000" cy="9144000"/>
@@ -20834,7 +20836,7 @@
                 </a:solidFill>
                 <a:latin typeface="Malgun Gothic"/>
               </a:rPr>
-              <a:t>기능 요약 · 데이터</a:t>
+              <a:t>주요 기능 사용법</a:t>
             </a:r>
           </a:p>
         </p:txBody>
@@ -20847,8 +20849,8 @@
         </p:nvSpPr>
         <p:spPr>
           <a:xfrm>
-            <a:off x="365760" y="841248"/>
-            <a:ext cx="658368" cy="512064"/>
+            <a:off x="365760" y="822960"/>
+            <a:ext cx="868680" cy="868680"/>
           </a:xfrm>
           <a:prstGeom prst="roundRect">
             <a:avLst/>
@@ -20891,9 +20893,2149 @@
         </p:nvSpPr>
         <p:spPr>
           <a:xfrm>
+            <a:off x="365760" y="822960"/>
+            <a:ext cx="868680" cy="868680"/>
+          </a:xfrm>
+          <a:prstGeom prst="rect">
+            <a:avLst/>
+          </a:prstGeom>
+          <a:noFill/>
+        </p:spPr>
+        <p:txBody>
+          <a:bodyPr wrap="square" anchor="ctr">
+            <a:spAutoFit/>
+          </a:bodyPr>
+          <a:lstStyle/>
+          <a:p>
+            <a:pPr algn="ctr">
+              <a:lnSpc>
+                <a:spcPct val="100000"/>
+              </a:lnSpc>
+            </a:pPr>
+            <a:r>
+              <a:rPr sz="2600" b="1">
+                <a:solidFill>
+                  <a:srgbClr val="FFFFFF"/>
+                </a:solidFill>
+                <a:latin typeface="Malgun Gothic"/>
+              </a:rPr>
+              <a:t>23</a:t>
+            </a:r>
+          </a:p>
+        </p:txBody>
+      </p:sp>
+      <p:sp>
+        <p:nvSpPr>
+          <p:cNvPr id="8" name="TextBox 7"/>
+          <p:cNvSpPr txBox="1"/>
+          <p:nvPr/>
+        </p:nvSpPr>
+        <p:spPr>
+          <a:xfrm>
+            <a:off x="1371600" y="822960"/>
+            <a:ext cx="10424160" cy="502920"/>
+          </a:xfrm>
+          <a:prstGeom prst="rect">
+            <a:avLst/>
+          </a:prstGeom>
+          <a:noFill/>
+        </p:spPr>
+        <p:txBody>
+          <a:bodyPr wrap="square" anchor="t">
+            <a:spAutoFit/>
+          </a:bodyPr>
+          <a:lstStyle/>
+          <a:p>
+            <a:pPr algn="l">
+              <a:lnSpc>
+                <a:spcPct val="100000"/>
+              </a:lnSpc>
+            </a:pPr>
+            <a:r>
+              <a:rPr sz="2300" b="1">
+                <a:solidFill>
+                  <a:srgbClr val="1E2340"/>
+                </a:solidFill>
+                <a:latin typeface="Malgun Gothic"/>
+              </a:rPr>
+              <a:t>🗂️ 강사 통합 관리 개편 (명부 필터 · 그룹 · 상세 탭)</a:t>
+            </a:r>
+          </a:p>
+        </p:txBody>
+      </p:sp>
+      <p:sp>
+        <p:nvSpPr>
+          <p:cNvPr id="9" name="TextBox 8"/>
+          <p:cNvSpPr txBox="1"/>
+          <p:nvPr/>
+        </p:nvSpPr>
+        <p:spPr>
+          <a:xfrm>
+            <a:off x="1417320" y="1353312"/>
+            <a:ext cx="10424160" cy="320040"/>
+          </a:xfrm>
+          <a:prstGeom prst="rect">
+            <a:avLst/>
+          </a:prstGeom>
+          <a:noFill/>
+        </p:spPr>
+        <p:txBody>
+          <a:bodyPr wrap="square" anchor="t">
+            <a:spAutoFit/>
+          </a:bodyPr>
+          <a:lstStyle/>
+          <a:p>
+            <a:pPr algn="l">
+              <a:lnSpc>
+                <a:spcPct val="100000"/>
+              </a:lnSpc>
+            </a:pPr>
+            <a:r>
+              <a:rPr sz="1300" b="0">
+                <a:solidFill>
+                  <a:srgbClr val="64748B"/>
+                </a:solidFill>
+                <a:latin typeface="Malgun Gothic"/>
+              </a:rPr>
+              <a:t>찾기 쉬운 명부 · 한눈에 보는 상세</a:t>
+            </a:r>
+          </a:p>
+        </p:txBody>
+      </p:sp>
+      <p:sp>
+        <p:nvSpPr>
+          <p:cNvPr id="10" name="Rounded Rectangle 9"/>
+          <p:cNvSpPr/>
+          <p:nvPr/>
+        </p:nvSpPr>
+        <p:spPr>
+          <a:xfrm>
+            <a:off x="365760" y="1828800"/>
+            <a:ext cx="11430000" cy="777240"/>
+          </a:xfrm>
+          <a:prstGeom prst="roundRect">
+            <a:avLst/>
+          </a:prstGeom>
+          <a:solidFill>
+            <a:srgbClr val="FFF1F2"/>
+          </a:solidFill>
+          <a:ln>
+            <a:noFill/>
+          </a:ln>
+          <a:effectLst/>
+        </p:spPr>
+        <p:style>
+          <a:lnRef idx="1">
+            <a:schemeClr val="accent1"/>
+          </a:lnRef>
+          <a:fillRef idx="3">
+            <a:schemeClr val="accent1"/>
+          </a:fillRef>
+          <a:effectRef idx="2">
+            <a:schemeClr val="accent1"/>
+          </a:effectRef>
+          <a:fontRef idx="minor">
+            <a:schemeClr val="lt1"/>
+          </a:fontRef>
+        </p:style>
+        <p:txBody>
+          <a:bodyPr rtlCol="0" anchor="ctr"/>
+          <a:lstStyle/>
+          <a:p>
+            <a:pPr algn="ctr"/>
+          </a:p>
+        </p:txBody>
+      </p:sp>
+      <p:sp>
+        <p:nvSpPr>
+          <p:cNvPr id="11" name="TextBox 10"/>
+          <p:cNvSpPr txBox="1"/>
+          <p:nvPr/>
+        </p:nvSpPr>
+        <p:spPr>
+          <a:xfrm>
+            <a:off x="548640" y="1901952"/>
+            <a:ext cx="11064240" cy="640080"/>
+          </a:xfrm>
+          <a:prstGeom prst="rect">
+            <a:avLst/>
+          </a:prstGeom>
+          <a:noFill/>
+        </p:spPr>
+        <p:txBody>
+          <a:bodyPr wrap="square" anchor="t">
+            <a:spAutoFit/>
+          </a:bodyPr>
+          <a:lstStyle/>
+          <a:p>
+            <a:pPr algn="l">
+              <a:lnSpc>
+                <a:spcPct val="115000"/>
+              </a:lnSpc>
+            </a:pPr>
+            <a:r>
+              <a:rPr sz="1200" b="0">
+                <a:solidFill>
+                  <a:srgbClr val="334155"/>
+                </a:solidFill>
+                <a:latin typeface="Malgun Gothic"/>
+              </a:rPr>
+              <a:t>강사 관리 화면이 찾기 쉽고 보기 편하게 정리됐어요. 흩어져 있던 메뉴를 네 묶음으로 그룹지어 사이드바에 담았고, 강사 명부 위에는 구분·상태·그룹 드롭다운 필터와 적용된 필터 칩이 생겼어요. 강사를 누르면 프로필·급여·평가 탭으로 나뉜 상세 화면이 열리고, 매니저 배지와 재직 상태(재직·휴직·퇴사) 가 한눈에 표시돼요.</a:t>
+            </a:r>
+          </a:p>
+        </p:txBody>
+      </p:sp>
+      <p:sp>
+        <p:nvSpPr>
+          <p:cNvPr id="12" name="TextBox 11"/>
+          <p:cNvSpPr txBox="1"/>
+          <p:nvPr/>
+        </p:nvSpPr>
+        <p:spPr>
+          <a:xfrm>
+            <a:off x="457200" y="2743200"/>
+            <a:ext cx="5669280" cy="320040"/>
+          </a:xfrm>
+          <a:prstGeom prst="rect">
+            <a:avLst/>
+          </a:prstGeom>
+          <a:noFill/>
+        </p:spPr>
+        <p:txBody>
+          <a:bodyPr wrap="square" anchor="t">
+            <a:spAutoFit/>
+          </a:bodyPr>
+          <a:lstStyle/>
+          <a:p>
+            <a:pPr algn="l">
+              <a:lnSpc>
+                <a:spcPct val="100000"/>
+              </a:lnSpc>
+            </a:pPr>
+            <a:r>
+              <a:rPr sz="1350" b="1">
+                <a:solidFill>
+                  <a:srgbClr val="E11D48"/>
+                </a:solidFill>
+                <a:latin typeface="Malgun Gothic"/>
+              </a:rPr>
+              <a:t>사용 방법</a:t>
+            </a:r>
+          </a:p>
+        </p:txBody>
+      </p:sp>
+      <p:sp>
+        <p:nvSpPr>
+          <p:cNvPr id="13" name="TextBox 12"/>
+          <p:cNvSpPr txBox="1"/>
+          <p:nvPr/>
+        </p:nvSpPr>
+        <p:spPr>
+          <a:xfrm>
+            <a:off x="457200" y="3108960"/>
+            <a:ext cx="5669280" cy="2377440"/>
+          </a:xfrm>
+          <a:prstGeom prst="rect">
+            <a:avLst/>
+          </a:prstGeom>
+          <a:noFill/>
+        </p:spPr>
+        <p:txBody>
+          <a:bodyPr wrap="square">
+            <a:spAutoFit/>
+          </a:bodyPr>
+          <a:lstStyle/>
+          <a:p>
+            <a:pPr>
+              <a:lnSpc>
+                <a:spcPct val="115000"/>
+              </a:lnSpc>
+              <a:spcAft>
+                <a:spcPts val="600"/>
+              </a:spcAft>
+            </a:pPr>
+            <a:r>
+              <a:rPr sz="1050" b="1">
+                <a:solidFill>
+                  <a:srgbClr val="E11D48"/>
+                </a:solidFill>
+                <a:latin typeface="Malgun Gothic"/>
+              </a:rPr>
+              <a:t>● </a:t>
+            </a:r>
+            <a:r>
+              <a:rPr sz="1250">
+                <a:solidFill>
+                  <a:srgbClr val="334155"/>
+                </a:solidFill>
+                <a:latin typeface="Malgun Gothic"/>
+              </a:rPr>
+              <a:t>관리자 메뉴 강사 통합을 열어요(메뉴가 네 묶음으로 정리돼 있어요).</a:t>
+            </a:r>
+          </a:p>
+          <a:p>
+            <a:pPr>
+              <a:lnSpc>
+                <a:spcPct val="115000"/>
+              </a:lnSpc>
+              <a:spcAft>
+                <a:spcPts val="600"/>
+              </a:spcAft>
+            </a:pPr>
+            <a:r>
+              <a:rPr sz="1050" b="1">
+                <a:solidFill>
+                  <a:srgbClr val="E11D48"/>
+                </a:solidFill>
+                <a:latin typeface="Malgun Gothic"/>
+              </a:rPr>
+              <a:t>● </a:t>
+            </a:r>
+            <a:r>
+              <a:rPr sz="1250">
+                <a:solidFill>
+                  <a:srgbClr val="334155"/>
+                </a:solidFill>
+                <a:latin typeface="Malgun Gothic"/>
+              </a:rPr>
+              <a:t>명부 위 상태·그룹 드롭다운으로 원하는 강사만 걸러요.</a:t>
+            </a:r>
+          </a:p>
+          <a:p>
+            <a:pPr>
+              <a:lnSpc>
+                <a:spcPct val="115000"/>
+              </a:lnSpc>
+              <a:spcAft>
+                <a:spcPts val="600"/>
+              </a:spcAft>
+            </a:pPr>
+            <a:r>
+              <a:rPr sz="1050" b="1">
+                <a:solidFill>
+                  <a:srgbClr val="E11D48"/>
+                </a:solidFill>
+                <a:latin typeface="Malgun Gothic"/>
+              </a:rPr>
+              <a:t>● </a:t>
+            </a:r>
+            <a:r>
+              <a:rPr sz="1250">
+                <a:solidFill>
+                  <a:srgbClr val="334155"/>
+                </a:solidFill>
+                <a:latin typeface="Malgun Gothic"/>
+              </a:rPr>
+              <a:t>적용된 필터는 칩으로 표시되고, 칩을 지우면 해제돼요.</a:t>
+            </a:r>
+          </a:p>
+          <a:p>
+            <a:pPr>
+              <a:lnSpc>
+                <a:spcPct val="115000"/>
+              </a:lnSpc>
+              <a:spcAft>
+                <a:spcPts val="600"/>
+              </a:spcAft>
+            </a:pPr>
+            <a:r>
+              <a:rPr sz="1050" b="1">
+                <a:solidFill>
+                  <a:srgbClr val="E11D48"/>
+                </a:solidFill>
+                <a:latin typeface="Malgun Gothic"/>
+              </a:rPr>
+              <a:t>● </a:t>
+            </a:r>
+            <a:r>
+              <a:rPr sz="1250">
+                <a:solidFill>
+                  <a:srgbClr val="334155"/>
+                </a:solidFill>
+                <a:latin typeface="Malgun Gothic"/>
+              </a:rPr>
+              <a:t>강사를 누르면 프로필 / 급여 / 평가 탭 상세가 열려요.</a:t>
+            </a:r>
+          </a:p>
+          <a:p>
+            <a:pPr>
+              <a:lnSpc>
+                <a:spcPct val="115000"/>
+              </a:lnSpc>
+              <a:spcAft>
+                <a:spcPts val="600"/>
+              </a:spcAft>
+            </a:pPr>
+            <a:r>
+              <a:rPr sz="1050" b="1">
+                <a:solidFill>
+                  <a:srgbClr val="E11D48"/>
+                </a:solidFill>
+                <a:latin typeface="Malgun Gothic"/>
+              </a:rPr>
+              <a:t>● </a:t>
+            </a:r>
+            <a:r>
+              <a:rPr sz="1250">
+                <a:solidFill>
+                  <a:srgbClr val="334155"/>
+                </a:solidFill>
+                <a:latin typeface="Malgun Gothic"/>
+              </a:rPr>
+              <a:t>급여·평가 탭의 요약 숫자는 열 때 필요한 만큼만 불러옵니다.</a:t>
+            </a:r>
+          </a:p>
+        </p:txBody>
+      </p:sp>
+      <p:sp>
+        <p:nvSpPr>
+          <p:cNvPr id="14" name="Rounded Rectangle 13"/>
+          <p:cNvSpPr/>
+          <p:nvPr/>
+        </p:nvSpPr>
+        <p:spPr>
+          <a:xfrm>
+            <a:off x="457200" y="5166360"/>
+            <a:ext cx="5669280" cy="1627632"/>
+          </a:xfrm>
+          <a:prstGeom prst="roundRect">
+            <a:avLst/>
+          </a:prstGeom>
+          <a:solidFill>
+            <a:srgbClr val="F4F7FF"/>
+          </a:solidFill>
+          <a:ln w="12700">
+            <a:solidFill>
+              <a:srgbClr val="E11D48"/>
+            </a:solidFill>
+          </a:ln>
+          <a:effectLst/>
+        </p:spPr>
+        <p:style>
+          <a:lnRef idx="1">
+            <a:schemeClr val="accent1"/>
+          </a:lnRef>
+          <a:fillRef idx="3">
+            <a:schemeClr val="accent1"/>
+          </a:fillRef>
+          <a:effectRef idx="2">
+            <a:schemeClr val="accent1"/>
+          </a:effectRef>
+          <a:fontRef idx="minor">
+            <a:schemeClr val="lt1"/>
+          </a:fontRef>
+        </p:style>
+        <p:txBody>
+          <a:bodyPr rtlCol="0" anchor="ctr"/>
+          <a:lstStyle/>
+          <a:p>
+            <a:pPr algn="ctr"/>
+          </a:p>
+        </p:txBody>
+      </p:sp>
+      <p:sp>
+        <p:nvSpPr>
+          <p:cNvPr id="15" name="TextBox 14"/>
+          <p:cNvSpPr txBox="1"/>
+          <p:nvPr/>
+        </p:nvSpPr>
+        <p:spPr>
+          <a:xfrm>
+            <a:off x="594360" y="5221224"/>
+            <a:ext cx="5394960" cy="274320"/>
+          </a:xfrm>
+          <a:prstGeom prst="rect">
+            <a:avLst/>
+          </a:prstGeom>
+          <a:noFill/>
+        </p:spPr>
+        <p:txBody>
+          <a:bodyPr wrap="square" anchor="t">
+            <a:spAutoFit/>
+          </a:bodyPr>
+          <a:lstStyle/>
+          <a:p>
+            <a:pPr algn="l">
+              <a:lnSpc>
+                <a:spcPct val="100000"/>
+              </a:lnSpc>
+            </a:pPr>
+            <a:r>
+              <a:rPr sz="1150" b="1">
+                <a:solidFill>
+                  <a:srgbClr val="E11D48"/>
+                </a:solidFill>
+                <a:latin typeface="Malgun Gothic"/>
+              </a:rPr>
+              <a:t>✅ 핵심 포인트</a:t>
+            </a:r>
+          </a:p>
+        </p:txBody>
+      </p:sp>
+      <p:sp>
+        <p:nvSpPr>
+          <p:cNvPr id="16" name="TextBox 15"/>
+          <p:cNvSpPr txBox="1"/>
+          <p:nvPr/>
+        </p:nvSpPr>
+        <p:spPr>
+          <a:xfrm>
+            <a:off x="594360" y="5495544"/>
+            <a:ext cx="5394960" cy="1261872"/>
+          </a:xfrm>
+          <a:prstGeom prst="rect">
+            <a:avLst/>
+          </a:prstGeom>
+          <a:noFill/>
+        </p:spPr>
+        <p:txBody>
+          <a:bodyPr wrap="square">
+            <a:spAutoFit/>
+          </a:bodyPr>
+          <a:lstStyle/>
+          <a:p>
+            <a:pPr>
+              <a:lnSpc>
+                <a:spcPct val="115000"/>
+              </a:lnSpc>
+              <a:spcAft>
+                <a:spcPts val="200"/>
+              </a:spcAft>
+            </a:pPr>
+            <a:r>
+              <a:rPr sz="900" b="1">
+                <a:solidFill>
+                  <a:srgbClr val="E11D48"/>
+                </a:solidFill>
+                <a:latin typeface="Malgun Gothic"/>
+              </a:rPr>
+              <a:t>● </a:t>
+            </a:r>
+            <a:r>
+              <a:rPr sz="1100">
+                <a:solidFill>
+                  <a:srgbClr val="334155"/>
+                </a:solidFill>
+                <a:latin typeface="Malgun Gothic"/>
+              </a:rPr>
+              <a:t>매니저는 배지로 구분되고, 재직 상태가 재직·휴직·퇴사 3가지로 표시돼요.</a:t>
+            </a:r>
+          </a:p>
+          <a:p>
+            <a:pPr>
+              <a:lnSpc>
+                <a:spcPct val="115000"/>
+              </a:lnSpc>
+              <a:spcAft>
+                <a:spcPts val="200"/>
+              </a:spcAft>
+            </a:pPr>
+            <a:r>
+              <a:rPr sz="900" b="1">
+                <a:solidFill>
+                  <a:srgbClr val="E11D48"/>
+                </a:solidFill>
+                <a:latin typeface="Malgun Gothic"/>
+              </a:rPr>
+              <a:t>● </a:t>
+            </a:r>
+            <a:r>
+              <a:rPr sz="1100">
+                <a:solidFill>
+                  <a:srgbClr val="334155"/>
+                </a:solidFill>
+                <a:latin typeface="Malgun Gothic"/>
+              </a:rPr>
+              <a:t>이름이 비어도 아이디로 대체 표기돼 빈칸이 없어요.</a:t>
+            </a:r>
+          </a:p>
+          <a:p>
+            <a:pPr>
+              <a:lnSpc>
+                <a:spcPct val="115000"/>
+              </a:lnSpc>
+              <a:spcAft>
+                <a:spcPts val="200"/>
+              </a:spcAft>
+            </a:pPr>
+            <a:r>
+              <a:rPr sz="900" b="1">
+                <a:solidFill>
+                  <a:srgbClr val="E11D48"/>
+                </a:solidFill>
+                <a:latin typeface="Malgun Gothic"/>
+              </a:rPr>
+              <a:t>● </a:t>
+            </a:r>
+            <a:r>
+              <a:rPr sz="1100">
+                <a:solidFill>
+                  <a:srgbClr val="334155"/>
+                </a:solidFill>
+                <a:latin typeface="Malgun Gothic"/>
+              </a:rPr>
+              <a:t>상세 탭은 기존 API를 재사용해 빠르게 뜨고, 화면은 한/영 병기예요.</a:t>
+            </a:r>
+          </a:p>
+          <a:p>
+            <a:pPr>
+              <a:lnSpc>
+                <a:spcPct val="115000"/>
+              </a:lnSpc>
+              <a:spcAft>
+                <a:spcPts val="200"/>
+              </a:spcAft>
+            </a:pPr>
+            <a:r>
+              <a:rPr sz="900" b="1">
+                <a:solidFill>
+                  <a:srgbClr val="E11D48"/>
+                </a:solidFill>
+                <a:latin typeface="Malgun Gothic"/>
+              </a:rPr>
+              <a:t>● </a:t>
+            </a:r>
+            <a:r>
+              <a:rPr sz="1100">
+                <a:solidFill>
+                  <a:srgbClr val="334155"/>
+                </a:solidFill>
+                <a:latin typeface="Malgun Gothic"/>
+              </a:rPr>
+              <a:t>중복이던 급여 입구를 정리하고 버그 접수는 별도 시스템으로 옮겼어요.</a:t>
+            </a:r>
+          </a:p>
+        </p:txBody>
+      </p:sp>
+      <p:sp>
+        <p:nvSpPr>
+          <p:cNvPr id="17" name="Rounded Rectangle 16"/>
+          <p:cNvSpPr/>
+          <p:nvPr/>
+        </p:nvSpPr>
+        <p:spPr>
+          <a:xfrm>
+            <a:off x="457200" y="6903720"/>
+            <a:ext cx="5669280" cy="640080"/>
+          </a:xfrm>
+          <a:prstGeom prst="roundRect">
+            <a:avLst/>
+          </a:prstGeom>
+          <a:solidFill>
+            <a:srgbClr val="FFFBEB"/>
+          </a:solidFill>
+          <a:ln w="12700">
+            <a:solidFill>
+              <a:srgbClr val="F59E0B"/>
+            </a:solidFill>
+          </a:ln>
+          <a:effectLst/>
+        </p:spPr>
+        <p:style>
+          <a:lnRef idx="1">
+            <a:schemeClr val="accent1"/>
+          </a:lnRef>
+          <a:fillRef idx="3">
+            <a:schemeClr val="accent1"/>
+          </a:fillRef>
+          <a:effectRef idx="2">
+            <a:schemeClr val="accent1"/>
+          </a:effectRef>
+          <a:fontRef idx="minor">
+            <a:schemeClr val="lt1"/>
+          </a:fontRef>
+        </p:style>
+        <p:txBody>
+          <a:bodyPr rtlCol="0" anchor="ctr"/>
+          <a:lstStyle/>
+          <a:p>
+            <a:pPr algn="ctr"/>
+          </a:p>
+        </p:txBody>
+      </p:sp>
+      <p:sp>
+        <p:nvSpPr>
+          <p:cNvPr id="18" name="TextBox 17"/>
+          <p:cNvSpPr txBox="1"/>
+          <p:nvPr/>
+        </p:nvSpPr>
+        <p:spPr>
+          <a:xfrm>
+            <a:off x="594360" y="6949440"/>
+            <a:ext cx="5394960" cy="548640"/>
+          </a:xfrm>
+          <a:prstGeom prst="rect">
+            <a:avLst/>
+          </a:prstGeom>
+          <a:noFill/>
+        </p:spPr>
+        <p:txBody>
+          <a:bodyPr wrap="square" anchor="t">
+            <a:spAutoFit/>
+          </a:bodyPr>
+          <a:lstStyle/>
+          <a:p>
+            <a:pPr algn="l">
+              <a:lnSpc>
+                <a:spcPct val="105000"/>
+              </a:lnSpc>
+            </a:pPr>
+            <a:r>
+              <a:rPr sz="1050" b="0">
+                <a:solidFill>
+                  <a:srgbClr val="92670A"/>
+                </a:solidFill>
+                <a:latin typeface="Malgun Gothic"/>
+              </a:rPr>
+              <a:t>⚠️ 알아두기 · 필터·상세 정리 작업이에요. 강사 등록·수정·삭제 기능 자체는 그대로예요.</a:t>
+            </a:r>
+          </a:p>
+        </p:txBody>
+      </p:sp>
+      <p:sp>
+        <p:nvSpPr>
+          <p:cNvPr id="19" name="Rounded Rectangle 18"/>
+          <p:cNvSpPr/>
+          <p:nvPr/>
+        </p:nvSpPr>
+        <p:spPr>
+          <a:xfrm>
+            <a:off x="457200" y="7635240"/>
+            <a:ext cx="5669280" cy="658368"/>
+          </a:xfrm>
+          <a:prstGeom prst="roundRect">
+            <a:avLst/>
+          </a:prstGeom>
+          <a:solidFill>
+            <a:srgbClr val="FFF7E6"/>
+          </a:solidFill>
+          <a:ln w="12700">
+            <a:solidFill>
+              <a:srgbClr val="0EA5E9"/>
+            </a:solidFill>
+          </a:ln>
+          <a:effectLst/>
+        </p:spPr>
+        <p:style>
+          <a:lnRef idx="1">
+            <a:schemeClr val="accent1"/>
+          </a:lnRef>
+          <a:fillRef idx="3">
+            <a:schemeClr val="accent1"/>
+          </a:fillRef>
+          <a:effectRef idx="2">
+            <a:schemeClr val="accent1"/>
+          </a:effectRef>
+          <a:fontRef idx="minor">
+            <a:schemeClr val="lt1"/>
+          </a:fontRef>
+        </p:style>
+        <p:txBody>
+          <a:bodyPr rtlCol="0" anchor="ctr"/>
+          <a:lstStyle/>
+          <a:p>
+            <a:pPr algn="ctr"/>
+          </a:p>
+        </p:txBody>
+      </p:sp>
+      <p:sp>
+        <p:nvSpPr>
+          <p:cNvPr id="20" name="TextBox 19"/>
+          <p:cNvSpPr txBox="1"/>
+          <p:nvPr/>
+        </p:nvSpPr>
+        <p:spPr>
+          <a:xfrm>
+            <a:off x="594360" y="7680960"/>
+            <a:ext cx="5394960" cy="566928"/>
+          </a:xfrm>
+          <a:prstGeom prst="rect">
+            <a:avLst/>
+          </a:prstGeom>
+          <a:noFill/>
+        </p:spPr>
+        <p:txBody>
+          <a:bodyPr wrap="square" anchor="t">
+            <a:spAutoFit/>
+          </a:bodyPr>
+          <a:lstStyle/>
+          <a:p>
+            <a:pPr algn="l">
+              <a:lnSpc>
+                <a:spcPct val="105000"/>
+              </a:lnSpc>
+            </a:pPr>
+            <a:r>
+              <a:rPr sz="1050" b="0">
+                <a:solidFill>
+                  <a:srgbClr val="5B4A2A"/>
+                </a:solidFill>
+                <a:latin typeface="Malgun Gothic"/>
+              </a:rPr>
+              <a:t>💡 꿀팁 · 강사가 많을수록 상태·그룹 필터가 큰 힘을 발휘해요. 자주 보는 조건은 필터를 걸어 두고 쓰세요.</a:t>
+            </a:r>
+          </a:p>
+        </p:txBody>
+      </p:sp>
+      <p:sp>
+        <p:nvSpPr>
+          <p:cNvPr id="21" name="Rectangle 20"/>
+          <p:cNvSpPr/>
+          <p:nvPr/>
+        </p:nvSpPr>
+        <p:spPr>
+          <a:xfrm>
+            <a:off x="6300216" y="2345436"/>
+            <a:ext cx="5596128" cy="3538728"/>
+          </a:xfrm>
+          <a:prstGeom prst="rect">
+            <a:avLst/>
+          </a:prstGeom>
+          <a:solidFill>
+            <a:srgbClr val="FFFFFF"/>
+          </a:solidFill>
+          <a:ln w="12700">
+            <a:solidFill>
+              <a:srgbClr val="E2E8F0"/>
+            </a:solidFill>
+          </a:ln>
+          <a:effectLst/>
+        </p:spPr>
+        <p:style>
+          <a:lnRef idx="1">
+            <a:schemeClr val="accent1"/>
+          </a:lnRef>
+          <a:fillRef idx="3">
+            <a:schemeClr val="accent1"/>
+          </a:fillRef>
+          <a:effectRef idx="2">
+            <a:schemeClr val="accent1"/>
+          </a:effectRef>
+          <a:fontRef idx="minor">
+            <a:schemeClr val="lt1"/>
+          </a:fontRef>
+        </p:style>
+        <p:txBody>
+          <a:bodyPr rtlCol="0" anchor="ctr"/>
+          <a:lstStyle/>
+          <a:p>
+            <a:pPr algn="ctr"/>
+          </a:p>
+        </p:txBody>
+      </p:sp>
+      <p:pic>
+        <p:nvPicPr>
+          <p:cNvPr id="22" name="Picture 21" descr="admin_teachers.jpg"/>
+          <p:cNvPicPr>
+            <a:picLocks noChangeAspect="1"/>
+          </p:cNvPicPr>
+          <p:nvPr/>
+        </p:nvPicPr>
+        <p:blipFill>
+          <a:blip r:embed="rId2"/>
+          <a:stretch>
+            <a:fillRect/>
+          </a:stretch>
+        </p:blipFill>
+        <p:spPr>
+          <a:xfrm>
+            <a:off x="6355080" y="2400300"/>
+            <a:ext cx="5486400" cy="3429000"/>
+          </a:xfrm>
+          <a:prstGeom prst="rect">
+            <a:avLst/>
+          </a:prstGeom>
+        </p:spPr>
+      </p:pic>
+    </p:spTree>
+  </p:cSld>
+  <p:clrMapOvr>
+    <a:masterClrMapping/>
+  </p:clrMapOvr>
+</p:sld>
+</file>
+
+<file path=ppt/slides/slide27.xml><?xml version="1.0" encoding="utf-8"?>
+<p:sld xmlns:a="http://schemas.openxmlformats.org/drawingml/2006/main" xmlns:p="http://schemas.openxmlformats.org/presentationml/2006/main" xmlns:r="http://schemas.openxmlformats.org/officeDocument/2006/relationships">
+  <p:cSld>
+    <p:bg>
+      <p:bgPr>
+        <a:solidFill>
+          <a:srgbClr val="FFFFFF"/>
+        </a:solidFill>
+        <a:effectLst/>
+      </p:bgPr>
+    </p:bg>
+    <p:spTree>
+      <p:nvGrpSpPr>
+        <p:cNvPr id="1" name=""/>
+        <p:cNvGrpSpPr/>
+        <p:nvPr/>
+      </p:nvGrpSpPr>
+      <p:grpSpPr/>
+      <p:sp>
+        <p:nvSpPr>
+          <p:cNvPr id="2" name="Rectangle 1"/>
+          <p:cNvSpPr/>
+          <p:nvPr/>
+        </p:nvSpPr>
+        <p:spPr>
+          <a:xfrm>
+            <a:off x="0" y="0"/>
+            <a:ext cx="12191695" cy="566928"/>
+          </a:xfrm>
+          <a:prstGeom prst="rect">
+            <a:avLst/>
+          </a:prstGeom>
+          <a:solidFill>
+            <a:srgbClr val="E11D48"/>
+          </a:solidFill>
+          <a:ln>
+            <a:noFill/>
+          </a:ln>
+          <a:effectLst/>
+        </p:spPr>
+        <p:style>
+          <a:lnRef idx="1">
+            <a:schemeClr val="accent1"/>
+          </a:lnRef>
+          <a:fillRef idx="3">
+            <a:schemeClr val="accent1"/>
+          </a:fillRef>
+          <a:effectRef idx="2">
+            <a:schemeClr val="accent1"/>
+          </a:effectRef>
+          <a:fontRef idx="minor">
+            <a:schemeClr val="lt1"/>
+          </a:fontRef>
+        </p:style>
+        <p:txBody>
+          <a:bodyPr rtlCol="0" anchor="ctr"/>
+          <a:lstStyle/>
+          <a:p>
+            <a:pPr algn="ctr"/>
+          </a:p>
+        </p:txBody>
+      </p:sp>
+      <p:sp>
+        <p:nvSpPr>
+          <p:cNvPr id="3" name="Rectangle 2"/>
+          <p:cNvSpPr/>
+          <p:nvPr/>
+        </p:nvSpPr>
+        <p:spPr>
+          <a:xfrm>
+            <a:off x="0" y="566928"/>
+            <a:ext cx="12191695" cy="54864"/>
+          </a:xfrm>
+          <a:prstGeom prst="rect">
+            <a:avLst/>
+          </a:prstGeom>
+          <a:solidFill>
+            <a:srgbClr val="0EA5E9"/>
+          </a:solidFill>
+          <a:ln>
+            <a:noFill/>
+          </a:ln>
+          <a:effectLst/>
+        </p:spPr>
+        <p:style>
+          <a:lnRef idx="1">
+            <a:schemeClr val="accent1"/>
+          </a:lnRef>
+          <a:fillRef idx="3">
+            <a:schemeClr val="accent1"/>
+          </a:fillRef>
+          <a:effectRef idx="2">
+            <a:schemeClr val="accent1"/>
+          </a:effectRef>
+          <a:fontRef idx="minor">
+            <a:schemeClr val="lt1"/>
+          </a:fontRef>
+        </p:style>
+        <p:txBody>
+          <a:bodyPr rtlCol="0" anchor="ctr"/>
+          <a:lstStyle/>
+          <a:p>
+            <a:pPr algn="ctr"/>
+          </a:p>
+        </p:txBody>
+      </p:sp>
+      <p:sp>
+        <p:nvSpPr>
+          <p:cNvPr id="4" name="TextBox 3"/>
+          <p:cNvSpPr txBox="1"/>
+          <p:nvPr/>
+        </p:nvSpPr>
+        <p:spPr>
+          <a:xfrm>
+            <a:off x="365760" y="27432"/>
+            <a:ext cx="7315200" cy="502920"/>
+          </a:xfrm>
+          <a:prstGeom prst="rect">
+            <a:avLst/>
+          </a:prstGeom>
+          <a:noFill/>
+        </p:spPr>
+        <p:txBody>
+          <a:bodyPr wrap="square" anchor="ctr">
+            <a:spAutoFit/>
+          </a:bodyPr>
+          <a:lstStyle/>
+          <a:p>
+            <a:pPr algn="l">
+              <a:lnSpc>
+                <a:spcPct val="100000"/>
+              </a:lnSpc>
+            </a:pPr>
+            <a:r>
+              <a:rPr sz="1500" b="1">
+                <a:solidFill>
+                  <a:srgbClr val="FFFFFF"/>
+                </a:solidFill>
+                <a:latin typeface="Malgun Gothic"/>
+              </a:rPr>
+              <a:t>🤝 망고아이 대리점용 사용설명서</a:t>
+            </a:r>
+          </a:p>
+        </p:txBody>
+      </p:sp>
+      <p:sp>
+        <p:nvSpPr>
+          <p:cNvPr id="5" name="TextBox 4"/>
+          <p:cNvSpPr txBox="1"/>
+          <p:nvPr/>
+        </p:nvSpPr>
+        <p:spPr>
+          <a:xfrm>
+            <a:off x="8168335" y="27432"/>
+            <a:ext cx="3657600" cy="502920"/>
+          </a:xfrm>
+          <a:prstGeom prst="rect">
+            <a:avLst/>
+          </a:prstGeom>
+          <a:noFill/>
+        </p:spPr>
+        <p:txBody>
+          <a:bodyPr wrap="square" anchor="ctr">
+            <a:spAutoFit/>
+          </a:bodyPr>
+          <a:lstStyle/>
+          <a:p>
+            <a:pPr algn="r">
+              <a:lnSpc>
+                <a:spcPct val="100000"/>
+              </a:lnSpc>
+            </a:pPr>
+            <a:r>
+              <a:rPr sz="1300" b="1">
+                <a:solidFill>
+                  <a:srgbClr val="F1F5F9"/>
+                </a:solidFill>
+                <a:latin typeface="Malgun Gothic"/>
+              </a:rPr>
+              <a:t>주요 기능 사용법</a:t>
+            </a:r>
+          </a:p>
+        </p:txBody>
+      </p:sp>
+      <p:sp>
+        <p:nvSpPr>
+          <p:cNvPr id="6" name="Rounded Rectangle 5"/>
+          <p:cNvSpPr/>
+          <p:nvPr/>
+        </p:nvSpPr>
+        <p:spPr>
+          <a:xfrm>
+            <a:off x="365760" y="822960"/>
+            <a:ext cx="868680" cy="868680"/>
+          </a:xfrm>
+          <a:prstGeom prst="roundRect">
+            <a:avLst/>
+          </a:prstGeom>
+          <a:solidFill>
+            <a:srgbClr val="E11D48"/>
+          </a:solidFill>
+          <a:ln>
+            <a:noFill/>
+          </a:ln>
+          <a:effectLst/>
+        </p:spPr>
+        <p:style>
+          <a:lnRef idx="1">
+            <a:schemeClr val="accent1"/>
+          </a:lnRef>
+          <a:fillRef idx="3">
+            <a:schemeClr val="accent1"/>
+          </a:fillRef>
+          <a:effectRef idx="2">
+            <a:schemeClr val="accent1"/>
+          </a:effectRef>
+          <a:fontRef idx="minor">
+            <a:schemeClr val="lt1"/>
+          </a:fontRef>
+        </p:style>
+        <p:txBody>
+          <a:bodyPr rtlCol="0" anchor="ctr"/>
+          <a:lstStyle/>
+          <a:p>
+            <a:pPr algn="ctr"/>
+          </a:p>
+        </p:txBody>
+      </p:sp>
+      <p:sp>
+        <p:nvSpPr>
+          <p:cNvPr id="7" name="TextBox 6"/>
+          <p:cNvSpPr txBox="1"/>
+          <p:nvPr/>
+        </p:nvSpPr>
+        <p:spPr>
+          <a:xfrm>
+            <a:off x="365760" y="822960"/>
+            <a:ext cx="868680" cy="868680"/>
+          </a:xfrm>
+          <a:prstGeom prst="rect">
+            <a:avLst/>
+          </a:prstGeom>
+          <a:noFill/>
+        </p:spPr>
+        <p:txBody>
+          <a:bodyPr wrap="square" anchor="ctr">
+            <a:spAutoFit/>
+          </a:bodyPr>
+          <a:lstStyle/>
+          <a:p>
+            <a:pPr algn="ctr">
+              <a:lnSpc>
+                <a:spcPct val="100000"/>
+              </a:lnSpc>
+            </a:pPr>
+            <a:r>
+              <a:rPr sz="2600" b="1">
+                <a:solidFill>
+                  <a:srgbClr val="FFFFFF"/>
+                </a:solidFill>
+                <a:latin typeface="Malgun Gothic"/>
+              </a:rPr>
+              <a:t>24</a:t>
+            </a:r>
+          </a:p>
+        </p:txBody>
+      </p:sp>
+      <p:sp>
+        <p:nvSpPr>
+          <p:cNvPr id="8" name="TextBox 7"/>
+          <p:cNvSpPr txBox="1"/>
+          <p:nvPr/>
+        </p:nvSpPr>
+        <p:spPr>
+          <a:xfrm>
+            <a:off x="1371600" y="822960"/>
+            <a:ext cx="10424160" cy="502920"/>
+          </a:xfrm>
+          <a:prstGeom prst="rect">
+            <a:avLst/>
+          </a:prstGeom>
+          <a:noFill/>
+        </p:spPr>
+        <p:txBody>
+          <a:bodyPr wrap="square" anchor="t">
+            <a:spAutoFit/>
+          </a:bodyPr>
+          <a:lstStyle/>
+          <a:p>
+            <a:pPr algn="l">
+              <a:lnSpc>
+                <a:spcPct val="100000"/>
+              </a:lnSpc>
+            </a:pPr>
+            <a:r>
+              <a:rPr sz="2300" b="1">
+                <a:solidFill>
+                  <a:srgbClr val="1E2340"/>
+                </a:solidFill>
+                <a:latin typeface="Malgun Gothic"/>
+              </a:rPr>
+              <a:t>🌟 학부모 월간 성적표 (오각형) 발송</a:t>
+            </a:r>
+          </a:p>
+        </p:txBody>
+      </p:sp>
+      <p:sp>
+        <p:nvSpPr>
+          <p:cNvPr id="9" name="TextBox 8"/>
+          <p:cNvSpPr txBox="1"/>
+          <p:nvPr/>
+        </p:nvSpPr>
+        <p:spPr>
+          <a:xfrm>
+            <a:off x="1417320" y="1353312"/>
+            <a:ext cx="10424160" cy="320040"/>
+          </a:xfrm>
+          <a:prstGeom prst="rect">
+            <a:avLst/>
+          </a:prstGeom>
+          <a:noFill/>
+        </p:spPr>
+        <p:txBody>
+          <a:bodyPr wrap="square" anchor="t">
+            <a:spAutoFit/>
+          </a:bodyPr>
+          <a:lstStyle/>
+          <a:p>
+            <a:pPr algn="l">
+              <a:lnSpc>
+                <a:spcPct val="100000"/>
+              </a:lnSpc>
+            </a:pPr>
+            <a:r>
+              <a:rPr sz="1300" b="0">
+                <a:solidFill>
+                  <a:srgbClr val="64748B"/>
+                </a:solidFill>
+                <a:latin typeface="Malgun Gothic"/>
+              </a:rPr>
+              <a:t>5축 그래프 성적표를 미리보고 링크로</a:t>
+            </a:r>
+          </a:p>
+        </p:txBody>
+      </p:sp>
+      <p:sp>
+        <p:nvSpPr>
+          <p:cNvPr id="10" name="Rounded Rectangle 9"/>
+          <p:cNvSpPr/>
+          <p:nvPr/>
+        </p:nvSpPr>
+        <p:spPr>
+          <a:xfrm>
+            <a:off x="365760" y="1828800"/>
+            <a:ext cx="11430000" cy="777240"/>
+          </a:xfrm>
+          <a:prstGeom prst="roundRect">
+            <a:avLst/>
+          </a:prstGeom>
+          <a:solidFill>
+            <a:srgbClr val="FFF1F2"/>
+          </a:solidFill>
+          <a:ln>
+            <a:noFill/>
+          </a:ln>
+          <a:effectLst/>
+        </p:spPr>
+        <p:style>
+          <a:lnRef idx="1">
+            <a:schemeClr val="accent1"/>
+          </a:lnRef>
+          <a:fillRef idx="3">
+            <a:schemeClr val="accent1"/>
+          </a:fillRef>
+          <a:effectRef idx="2">
+            <a:schemeClr val="accent1"/>
+          </a:effectRef>
+          <a:fontRef idx="minor">
+            <a:schemeClr val="lt1"/>
+          </a:fontRef>
+        </p:style>
+        <p:txBody>
+          <a:bodyPr rtlCol="0" anchor="ctr"/>
+          <a:lstStyle/>
+          <a:p>
+            <a:pPr algn="ctr"/>
+          </a:p>
+        </p:txBody>
+      </p:sp>
+      <p:sp>
+        <p:nvSpPr>
+          <p:cNvPr id="11" name="TextBox 10"/>
+          <p:cNvSpPr txBox="1"/>
+          <p:nvPr/>
+        </p:nvSpPr>
+        <p:spPr>
+          <a:xfrm>
+            <a:off x="548640" y="1901952"/>
+            <a:ext cx="11064240" cy="640080"/>
+          </a:xfrm>
+          <a:prstGeom prst="rect">
+            <a:avLst/>
+          </a:prstGeom>
+          <a:noFill/>
+        </p:spPr>
+        <p:txBody>
+          <a:bodyPr wrap="square" anchor="t">
+            <a:spAutoFit/>
+          </a:bodyPr>
+          <a:lstStyle/>
+          <a:p>
+            <a:pPr algn="l">
+              <a:lnSpc>
+                <a:spcPct val="115000"/>
+              </a:lnSpc>
+            </a:pPr>
+            <a:r>
+              <a:rPr sz="1200" b="0">
+                <a:solidFill>
+                  <a:srgbClr val="334155"/>
+                </a:solidFill>
+                <a:latin typeface="Malgun Gothic"/>
+              </a:rPr>
+              <a:t>학부모에게 보내는 월간 성적표가 오각형 5축 그래프로 새로워졌어요. 발음·유창성 / 어휘 / 문장 구성력 / 수업 태도 / 참여도 를 한눈에 보여 주고, 출결·판단력·담임의 한마디가 함께 담깁니다. 관리자·교사는 학생 ID와 월을 넣어 미리보기한 뒤 카카오톡 링크로 보냅니다.</a:t>
+            </a:r>
+          </a:p>
+        </p:txBody>
+      </p:sp>
+      <p:sp>
+        <p:nvSpPr>
+          <p:cNvPr id="12" name="TextBox 11"/>
+          <p:cNvSpPr txBox="1"/>
+          <p:nvPr/>
+        </p:nvSpPr>
+        <p:spPr>
+          <a:xfrm>
+            <a:off x="457200" y="2743200"/>
+            <a:ext cx="5669280" cy="320040"/>
+          </a:xfrm>
+          <a:prstGeom prst="rect">
+            <a:avLst/>
+          </a:prstGeom>
+          <a:noFill/>
+        </p:spPr>
+        <p:txBody>
+          <a:bodyPr wrap="square" anchor="t">
+            <a:spAutoFit/>
+          </a:bodyPr>
+          <a:lstStyle/>
+          <a:p>
+            <a:pPr algn="l">
+              <a:lnSpc>
+                <a:spcPct val="100000"/>
+              </a:lnSpc>
+            </a:pPr>
+            <a:r>
+              <a:rPr sz="1350" b="1">
+                <a:solidFill>
+                  <a:srgbClr val="E11D48"/>
+                </a:solidFill>
+                <a:latin typeface="Malgun Gothic"/>
+              </a:rPr>
+              <a:t>사용 방법</a:t>
+            </a:r>
+          </a:p>
+        </p:txBody>
+      </p:sp>
+      <p:sp>
+        <p:nvSpPr>
+          <p:cNvPr id="13" name="TextBox 12"/>
+          <p:cNvSpPr txBox="1"/>
+          <p:nvPr/>
+        </p:nvSpPr>
+        <p:spPr>
+          <a:xfrm>
+            <a:off x="457200" y="3108960"/>
+            <a:ext cx="5669280" cy="2377440"/>
+          </a:xfrm>
+          <a:prstGeom prst="rect">
+            <a:avLst/>
+          </a:prstGeom>
+          <a:noFill/>
+        </p:spPr>
+        <p:txBody>
+          <a:bodyPr wrap="square">
+            <a:spAutoFit/>
+          </a:bodyPr>
+          <a:lstStyle/>
+          <a:p>
+            <a:pPr>
+              <a:lnSpc>
+                <a:spcPct val="115000"/>
+              </a:lnSpc>
+              <a:spcAft>
+                <a:spcPts val="600"/>
+              </a:spcAft>
+            </a:pPr>
+            <a:r>
+              <a:rPr sz="1050" b="1">
+                <a:solidFill>
+                  <a:srgbClr val="E11D48"/>
+                </a:solidFill>
+                <a:latin typeface="Malgun Gothic"/>
+              </a:rPr>
+              <a:t>● </a:t>
+            </a:r>
+            <a:r>
+              <a:rPr sz="1250">
+                <a:solidFill>
+                  <a:srgbClr val="334155"/>
+                </a:solidFill>
+                <a:latin typeface="Malgun Gothic"/>
+              </a:rPr>
+              <a:t>월간 리포트 화면을 열어요.</a:t>
+            </a:r>
+          </a:p>
+          <a:p>
+            <a:pPr>
+              <a:lnSpc>
+                <a:spcPct val="115000"/>
+              </a:lnSpc>
+              <a:spcAft>
+                <a:spcPts val="600"/>
+              </a:spcAft>
+            </a:pPr>
+            <a:r>
+              <a:rPr sz="1050" b="1">
+                <a:solidFill>
+                  <a:srgbClr val="E11D48"/>
+                </a:solidFill>
+                <a:latin typeface="Malgun Gothic"/>
+              </a:rPr>
+              <a:t>● </a:t>
+            </a:r>
+            <a:r>
+              <a:rPr sz="1250">
+                <a:solidFill>
+                  <a:srgbClr val="334155"/>
+                </a:solidFill>
+                <a:latin typeface="Malgun Gothic"/>
+              </a:rPr>
+              <a:t>학생 ID와 월을 넣고 레포트 보기를 눌러 미리봐요.</a:t>
+            </a:r>
+          </a:p>
+          <a:p>
+            <a:pPr>
+              <a:lnSpc>
+                <a:spcPct val="115000"/>
+              </a:lnSpc>
+              <a:spcAft>
+                <a:spcPts val="600"/>
+              </a:spcAft>
+            </a:pPr>
+            <a:r>
+              <a:rPr sz="1050" b="1">
+                <a:solidFill>
+                  <a:srgbClr val="E11D48"/>
+                </a:solidFill>
+                <a:latin typeface="Malgun Gothic"/>
+              </a:rPr>
+              <a:t>● </a:t>
+            </a:r>
+            <a:r>
+              <a:rPr sz="1250">
+                <a:solidFill>
+                  <a:srgbClr val="334155"/>
+                </a:solidFill>
+                <a:latin typeface="Malgun Gothic"/>
+              </a:rPr>
+              <a:t>오각형과 담임의 한마디를 확인하고, 필요하면 평가를 보완해요.</a:t>
+            </a:r>
+          </a:p>
+          <a:p>
+            <a:pPr>
+              <a:lnSpc>
+                <a:spcPct val="115000"/>
+              </a:lnSpc>
+              <a:spcAft>
+                <a:spcPts val="600"/>
+              </a:spcAft>
+            </a:pPr>
+            <a:r>
+              <a:rPr sz="1050" b="1">
+                <a:solidFill>
+                  <a:srgbClr val="E11D48"/>
+                </a:solidFill>
+                <a:latin typeface="Malgun Gothic"/>
+              </a:rPr>
+              <a:t>● </a:t>
+            </a:r>
+            <a:r>
+              <a:rPr sz="1250">
+                <a:solidFill>
+                  <a:srgbClr val="334155"/>
+                </a:solidFill>
+                <a:latin typeface="Malgun Gothic"/>
+              </a:rPr>
+              <a:t>주소에 ?uid=학생ID&amp;period=YYYY-MM 를 붙여 카카오톡 링크로 보냅니다.</a:t>
+            </a:r>
+          </a:p>
+        </p:txBody>
+      </p:sp>
+      <p:sp>
+        <p:nvSpPr>
+          <p:cNvPr id="14" name="Rounded Rectangle 13"/>
+          <p:cNvSpPr/>
+          <p:nvPr/>
+        </p:nvSpPr>
+        <p:spPr>
+          <a:xfrm>
+            <a:off x="457200" y="4782312"/>
+            <a:ext cx="5669280" cy="1316736"/>
+          </a:xfrm>
+          <a:prstGeom prst="roundRect">
+            <a:avLst/>
+          </a:prstGeom>
+          <a:solidFill>
+            <a:srgbClr val="F4F7FF"/>
+          </a:solidFill>
+          <a:ln w="12700">
+            <a:solidFill>
+              <a:srgbClr val="E11D48"/>
+            </a:solidFill>
+          </a:ln>
+          <a:effectLst/>
+        </p:spPr>
+        <p:style>
+          <a:lnRef idx="1">
+            <a:schemeClr val="accent1"/>
+          </a:lnRef>
+          <a:fillRef idx="3">
+            <a:schemeClr val="accent1"/>
+          </a:fillRef>
+          <a:effectRef idx="2">
+            <a:schemeClr val="accent1"/>
+          </a:effectRef>
+          <a:fontRef idx="minor">
+            <a:schemeClr val="lt1"/>
+          </a:fontRef>
+        </p:style>
+        <p:txBody>
+          <a:bodyPr rtlCol="0" anchor="ctr"/>
+          <a:lstStyle/>
+          <a:p>
+            <a:pPr algn="ctr"/>
+          </a:p>
+        </p:txBody>
+      </p:sp>
+      <p:sp>
+        <p:nvSpPr>
+          <p:cNvPr id="15" name="TextBox 14"/>
+          <p:cNvSpPr txBox="1"/>
+          <p:nvPr/>
+        </p:nvSpPr>
+        <p:spPr>
+          <a:xfrm>
+            <a:off x="594360" y="4837175"/>
+            <a:ext cx="5394960" cy="274320"/>
+          </a:xfrm>
+          <a:prstGeom prst="rect">
+            <a:avLst/>
+          </a:prstGeom>
+          <a:noFill/>
+        </p:spPr>
+        <p:txBody>
+          <a:bodyPr wrap="square" anchor="t">
+            <a:spAutoFit/>
+          </a:bodyPr>
+          <a:lstStyle/>
+          <a:p>
+            <a:pPr algn="l">
+              <a:lnSpc>
+                <a:spcPct val="100000"/>
+              </a:lnSpc>
+            </a:pPr>
+            <a:r>
+              <a:rPr sz="1150" b="1">
+                <a:solidFill>
+                  <a:srgbClr val="E11D48"/>
+                </a:solidFill>
+                <a:latin typeface="Malgun Gothic"/>
+              </a:rPr>
+              <a:t>✅ 핵심 포인트</a:t>
+            </a:r>
+          </a:p>
+        </p:txBody>
+      </p:sp>
+      <p:sp>
+        <p:nvSpPr>
+          <p:cNvPr id="16" name="TextBox 15"/>
+          <p:cNvSpPr txBox="1"/>
+          <p:nvPr/>
+        </p:nvSpPr>
+        <p:spPr>
+          <a:xfrm>
+            <a:off x="594360" y="5111496"/>
+            <a:ext cx="5394960" cy="950976"/>
+          </a:xfrm>
+          <a:prstGeom prst="rect">
+            <a:avLst/>
+          </a:prstGeom>
+          <a:noFill/>
+        </p:spPr>
+        <p:txBody>
+          <a:bodyPr wrap="square">
+            <a:spAutoFit/>
+          </a:bodyPr>
+          <a:lstStyle/>
+          <a:p>
+            <a:pPr>
+              <a:lnSpc>
+                <a:spcPct val="115000"/>
+              </a:lnSpc>
+              <a:spcAft>
+                <a:spcPts val="200"/>
+              </a:spcAft>
+            </a:pPr>
+            <a:r>
+              <a:rPr sz="900" b="1">
+                <a:solidFill>
+                  <a:srgbClr val="E11D48"/>
+                </a:solidFill>
+                <a:latin typeface="Malgun Gothic"/>
+              </a:rPr>
+              <a:t>● </a:t>
+            </a:r>
+            <a:r>
+              <a:rPr sz="1100">
+                <a:solidFill>
+                  <a:srgbClr val="334155"/>
+                </a:solidFill>
+                <a:latin typeface="Malgun Gothic"/>
+              </a:rPr>
+              <a:t>실제 기록이 있는 축만 채워져 신뢰할 수 있어요.</a:t>
+            </a:r>
+          </a:p>
+          <a:p>
+            <a:pPr>
+              <a:lnSpc>
+                <a:spcPct val="115000"/>
+              </a:lnSpc>
+              <a:spcAft>
+                <a:spcPts val="200"/>
+              </a:spcAft>
+            </a:pPr>
+            <a:r>
+              <a:rPr sz="900" b="1">
+                <a:solidFill>
+                  <a:srgbClr val="E11D48"/>
+                </a:solidFill>
+                <a:latin typeface="Malgun Gothic"/>
+              </a:rPr>
+              <a:t>● </a:t>
+            </a:r>
+            <a:r>
+              <a:rPr sz="1100">
+                <a:solidFill>
+                  <a:srgbClr val="334155"/>
+                </a:solidFill>
+                <a:latin typeface="Malgun Gothic"/>
+              </a:rPr>
+              <a:t>2개월 주기로 정리해 학부모 피로 없이 변화를 전달해요.</a:t>
+            </a:r>
+          </a:p>
+          <a:p>
+            <a:pPr>
+              <a:lnSpc>
+                <a:spcPct val="115000"/>
+              </a:lnSpc>
+              <a:spcAft>
+                <a:spcPts val="200"/>
+              </a:spcAft>
+            </a:pPr>
+            <a:r>
+              <a:rPr sz="900" b="1">
+                <a:solidFill>
+                  <a:srgbClr val="E11D48"/>
+                </a:solidFill>
+                <a:latin typeface="Malgun Gothic"/>
+              </a:rPr>
+              <a:t>● </a:t>
+            </a:r>
+            <a:r>
+              <a:rPr sz="1100">
+                <a:solidFill>
+                  <a:srgbClr val="334155"/>
+                </a:solidFill>
+                <a:latin typeface="Malgun Gothic"/>
+              </a:rPr>
+              <a:t>인쇄/PDF 버튼으로 상담용 종이 성적표도 즉시 만들 수 있어요.</a:t>
+            </a:r>
+          </a:p>
+        </p:txBody>
+      </p:sp>
+      <p:sp>
+        <p:nvSpPr>
+          <p:cNvPr id="17" name="Rounded Rectangle 16"/>
+          <p:cNvSpPr/>
+          <p:nvPr/>
+        </p:nvSpPr>
+        <p:spPr>
+          <a:xfrm>
+            <a:off x="457200" y="6208775"/>
+            <a:ext cx="5669280" cy="640080"/>
+          </a:xfrm>
+          <a:prstGeom prst="roundRect">
+            <a:avLst/>
+          </a:prstGeom>
+          <a:solidFill>
+            <a:srgbClr val="FFFBEB"/>
+          </a:solidFill>
+          <a:ln w="12700">
+            <a:solidFill>
+              <a:srgbClr val="F59E0B"/>
+            </a:solidFill>
+          </a:ln>
+          <a:effectLst/>
+        </p:spPr>
+        <p:style>
+          <a:lnRef idx="1">
+            <a:schemeClr val="accent1"/>
+          </a:lnRef>
+          <a:fillRef idx="3">
+            <a:schemeClr val="accent1"/>
+          </a:fillRef>
+          <a:effectRef idx="2">
+            <a:schemeClr val="accent1"/>
+          </a:effectRef>
+          <a:fontRef idx="minor">
+            <a:schemeClr val="lt1"/>
+          </a:fontRef>
+        </p:style>
+        <p:txBody>
+          <a:bodyPr rtlCol="0" anchor="ctr"/>
+          <a:lstStyle/>
+          <a:p>
+            <a:pPr algn="ctr"/>
+          </a:p>
+        </p:txBody>
+      </p:sp>
+      <p:sp>
+        <p:nvSpPr>
+          <p:cNvPr id="18" name="TextBox 17"/>
+          <p:cNvSpPr txBox="1"/>
+          <p:nvPr/>
+        </p:nvSpPr>
+        <p:spPr>
+          <a:xfrm>
+            <a:off x="594360" y="6254495"/>
+            <a:ext cx="5394960" cy="548640"/>
+          </a:xfrm>
+          <a:prstGeom prst="rect">
+            <a:avLst/>
+          </a:prstGeom>
+          <a:noFill/>
+        </p:spPr>
+        <p:txBody>
+          <a:bodyPr wrap="square" anchor="t">
+            <a:spAutoFit/>
+          </a:bodyPr>
+          <a:lstStyle/>
+          <a:p>
+            <a:pPr algn="l">
+              <a:lnSpc>
+                <a:spcPct val="105000"/>
+              </a:lnSpc>
+            </a:pPr>
+            <a:r>
+              <a:rPr sz="1050" b="0">
+                <a:solidFill>
+                  <a:srgbClr val="92670A"/>
+                </a:solidFill>
+                <a:latin typeface="Malgun Gothic"/>
+              </a:rPr>
+              <a:t>⚠️ 알아두기 · 성적표 열람은 승인 게이트를 거쳐요. 관리자는 로그인 세션으로, 학부모는 발급된 링크(토큰)로만 열립니다.</a:t>
+            </a:r>
+          </a:p>
+        </p:txBody>
+      </p:sp>
+      <p:sp>
+        <p:nvSpPr>
+          <p:cNvPr id="19" name="Rounded Rectangle 18"/>
+          <p:cNvSpPr/>
+          <p:nvPr/>
+        </p:nvSpPr>
+        <p:spPr>
+          <a:xfrm>
+            <a:off x="457200" y="6940295"/>
+            <a:ext cx="5669280" cy="658368"/>
+          </a:xfrm>
+          <a:prstGeom prst="roundRect">
+            <a:avLst/>
+          </a:prstGeom>
+          <a:solidFill>
+            <a:srgbClr val="FFF7E6"/>
+          </a:solidFill>
+          <a:ln w="12700">
+            <a:solidFill>
+              <a:srgbClr val="0EA5E9"/>
+            </a:solidFill>
+          </a:ln>
+          <a:effectLst/>
+        </p:spPr>
+        <p:style>
+          <a:lnRef idx="1">
+            <a:schemeClr val="accent1"/>
+          </a:lnRef>
+          <a:fillRef idx="3">
+            <a:schemeClr val="accent1"/>
+          </a:fillRef>
+          <a:effectRef idx="2">
+            <a:schemeClr val="accent1"/>
+          </a:effectRef>
+          <a:fontRef idx="minor">
+            <a:schemeClr val="lt1"/>
+          </a:fontRef>
+        </p:style>
+        <p:txBody>
+          <a:bodyPr rtlCol="0" anchor="ctr"/>
+          <a:lstStyle/>
+          <a:p>
+            <a:pPr algn="ctr"/>
+          </a:p>
+        </p:txBody>
+      </p:sp>
+      <p:sp>
+        <p:nvSpPr>
+          <p:cNvPr id="20" name="TextBox 19"/>
+          <p:cNvSpPr txBox="1"/>
+          <p:nvPr/>
+        </p:nvSpPr>
+        <p:spPr>
+          <a:xfrm>
+            <a:off x="594360" y="6986015"/>
+            <a:ext cx="5394960" cy="566928"/>
+          </a:xfrm>
+          <a:prstGeom prst="rect">
+            <a:avLst/>
+          </a:prstGeom>
+          <a:noFill/>
+        </p:spPr>
+        <p:txBody>
+          <a:bodyPr wrap="square" anchor="t">
+            <a:spAutoFit/>
+          </a:bodyPr>
+          <a:lstStyle/>
+          <a:p>
+            <a:pPr algn="l">
+              <a:lnSpc>
+                <a:spcPct val="105000"/>
+              </a:lnSpc>
+            </a:pPr>
+            <a:r>
+              <a:rPr sz="1050" b="0">
+                <a:solidFill>
+                  <a:srgbClr val="5B4A2A"/>
+                </a:solidFill>
+                <a:latin typeface="Malgun Gothic"/>
+              </a:rPr>
+              <a:t>💡 꿀팁 · 상담 예약과 함께 성적표 링크를 미리 보내면 상담이 훨씬 매끄러워요.</a:t>
+            </a:r>
+          </a:p>
+        </p:txBody>
+      </p:sp>
+      <p:sp>
+        <p:nvSpPr>
+          <p:cNvPr id="21" name="Rectangle 20"/>
+          <p:cNvSpPr/>
+          <p:nvPr/>
+        </p:nvSpPr>
+        <p:spPr>
+          <a:xfrm>
+            <a:off x="6300216" y="2345436"/>
+            <a:ext cx="5596128" cy="3538728"/>
+          </a:xfrm>
+          <a:prstGeom prst="rect">
+            <a:avLst/>
+          </a:prstGeom>
+          <a:solidFill>
+            <a:srgbClr val="FFFFFF"/>
+          </a:solidFill>
+          <a:ln w="12700">
+            <a:solidFill>
+              <a:srgbClr val="E2E8F0"/>
+            </a:solidFill>
+          </a:ln>
+          <a:effectLst/>
+        </p:spPr>
+        <p:style>
+          <a:lnRef idx="1">
+            <a:schemeClr val="accent1"/>
+          </a:lnRef>
+          <a:fillRef idx="3">
+            <a:schemeClr val="accent1"/>
+          </a:fillRef>
+          <a:effectRef idx="2">
+            <a:schemeClr val="accent1"/>
+          </a:effectRef>
+          <a:fontRef idx="minor">
+            <a:schemeClr val="lt1"/>
+          </a:fontRef>
+        </p:style>
+        <p:txBody>
+          <a:bodyPr rtlCol="0" anchor="ctr"/>
+          <a:lstStyle/>
+          <a:p>
+            <a:pPr algn="ctr"/>
+          </a:p>
+        </p:txBody>
+      </p:sp>
+      <p:pic>
+        <p:nvPicPr>
+          <p:cNvPr id="22" name="Picture 21" descr="student_report_pentagon.jpg"/>
+          <p:cNvPicPr>
+            <a:picLocks noChangeAspect="1"/>
+          </p:cNvPicPr>
+          <p:nvPr/>
+        </p:nvPicPr>
+        <p:blipFill>
+          <a:blip r:embed="rId2"/>
+          <a:stretch>
+            <a:fillRect/>
+          </a:stretch>
+        </p:blipFill>
+        <p:spPr>
+          <a:xfrm>
+            <a:off x="6355080" y="2400300"/>
+            <a:ext cx="5486400" cy="3429000"/>
+          </a:xfrm>
+          <a:prstGeom prst="rect">
+            <a:avLst/>
+          </a:prstGeom>
+        </p:spPr>
+      </p:pic>
+    </p:spTree>
+  </p:cSld>
+  <p:clrMapOvr>
+    <a:masterClrMapping/>
+  </p:clrMapOvr>
+</p:sld>
+</file>
+
+<file path=ppt/slides/slide28.xml><?xml version="1.0" encoding="utf-8"?>
+<p:sld xmlns:a="http://schemas.openxmlformats.org/drawingml/2006/main" xmlns:p="http://schemas.openxmlformats.org/presentationml/2006/main" xmlns:r="http://schemas.openxmlformats.org/officeDocument/2006/relationships">
+  <p:cSld>
+    <p:bg>
+      <p:bgPr>
+        <a:solidFill>
+          <a:srgbClr val="FFFFFF"/>
+        </a:solidFill>
+        <a:effectLst/>
+      </p:bgPr>
+    </p:bg>
+    <p:spTree>
+      <p:nvGrpSpPr>
+        <p:cNvPr id="1" name=""/>
+        <p:cNvGrpSpPr/>
+        <p:nvPr/>
+      </p:nvGrpSpPr>
+      <p:grpSpPr/>
+      <p:sp>
+        <p:nvSpPr>
+          <p:cNvPr id="2" name="Rectangle 1"/>
+          <p:cNvSpPr/>
+          <p:nvPr/>
+        </p:nvSpPr>
+        <p:spPr>
+          <a:xfrm>
+            <a:off x="0" y="0"/>
+            <a:ext cx="12191695" cy="566928"/>
+          </a:xfrm>
+          <a:prstGeom prst="rect">
+            <a:avLst/>
+          </a:prstGeom>
+          <a:solidFill>
+            <a:srgbClr val="E11D48"/>
+          </a:solidFill>
+          <a:ln>
+            <a:noFill/>
+          </a:ln>
+          <a:effectLst/>
+        </p:spPr>
+        <p:style>
+          <a:lnRef idx="1">
+            <a:schemeClr val="accent1"/>
+          </a:lnRef>
+          <a:fillRef idx="3">
+            <a:schemeClr val="accent1"/>
+          </a:fillRef>
+          <a:effectRef idx="2">
+            <a:schemeClr val="accent1"/>
+          </a:effectRef>
+          <a:fontRef idx="minor">
+            <a:schemeClr val="lt1"/>
+          </a:fontRef>
+        </p:style>
+        <p:txBody>
+          <a:bodyPr rtlCol="0" anchor="ctr"/>
+          <a:lstStyle/>
+          <a:p>
+            <a:pPr algn="ctr"/>
+          </a:p>
+        </p:txBody>
+      </p:sp>
+      <p:sp>
+        <p:nvSpPr>
+          <p:cNvPr id="3" name="Rectangle 2"/>
+          <p:cNvSpPr/>
+          <p:nvPr/>
+        </p:nvSpPr>
+        <p:spPr>
+          <a:xfrm>
+            <a:off x="0" y="566928"/>
+            <a:ext cx="12191695" cy="54864"/>
+          </a:xfrm>
+          <a:prstGeom prst="rect">
+            <a:avLst/>
+          </a:prstGeom>
+          <a:solidFill>
+            <a:srgbClr val="0EA5E9"/>
+          </a:solidFill>
+          <a:ln>
+            <a:noFill/>
+          </a:ln>
+          <a:effectLst/>
+        </p:spPr>
+        <p:style>
+          <a:lnRef idx="1">
+            <a:schemeClr val="accent1"/>
+          </a:lnRef>
+          <a:fillRef idx="3">
+            <a:schemeClr val="accent1"/>
+          </a:fillRef>
+          <a:effectRef idx="2">
+            <a:schemeClr val="accent1"/>
+          </a:effectRef>
+          <a:fontRef idx="minor">
+            <a:schemeClr val="lt1"/>
+          </a:fontRef>
+        </p:style>
+        <p:txBody>
+          <a:bodyPr rtlCol="0" anchor="ctr"/>
+          <a:lstStyle/>
+          <a:p>
+            <a:pPr algn="ctr"/>
+          </a:p>
+        </p:txBody>
+      </p:sp>
+      <p:sp>
+        <p:nvSpPr>
+          <p:cNvPr id="4" name="TextBox 3"/>
+          <p:cNvSpPr txBox="1"/>
+          <p:nvPr/>
+        </p:nvSpPr>
+        <p:spPr>
+          <a:xfrm>
+            <a:off x="365760" y="27432"/>
+            <a:ext cx="7315200" cy="502920"/>
+          </a:xfrm>
+          <a:prstGeom prst="rect">
+            <a:avLst/>
+          </a:prstGeom>
+          <a:noFill/>
+        </p:spPr>
+        <p:txBody>
+          <a:bodyPr wrap="square" anchor="ctr">
+            <a:spAutoFit/>
+          </a:bodyPr>
+          <a:lstStyle/>
+          <a:p>
+            <a:pPr algn="l">
+              <a:lnSpc>
+                <a:spcPct val="100000"/>
+              </a:lnSpc>
+            </a:pPr>
+            <a:r>
+              <a:rPr sz="1500" b="1">
+                <a:solidFill>
+                  <a:srgbClr val="FFFFFF"/>
+                </a:solidFill>
+                <a:latin typeface="Malgun Gothic"/>
+              </a:rPr>
+              <a:t>🤝 망고아이 대리점용 사용설명서</a:t>
+            </a:r>
+          </a:p>
+        </p:txBody>
+      </p:sp>
+      <p:sp>
+        <p:nvSpPr>
+          <p:cNvPr id="5" name="TextBox 4"/>
+          <p:cNvSpPr txBox="1"/>
+          <p:nvPr/>
+        </p:nvSpPr>
+        <p:spPr>
+          <a:xfrm>
+            <a:off x="8168335" y="27432"/>
+            <a:ext cx="3657600" cy="502920"/>
+          </a:xfrm>
+          <a:prstGeom prst="rect">
+            <a:avLst/>
+          </a:prstGeom>
+          <a:noFill/>
+        </p:spPr>
+        <p:txBody>
+          <a:bodyPr wrap="square" anchor="ctr">
+            <a:spAutoFit/>
+          </a:bodyPr>
+          <a:lstStyle/>
+          <a:p>
+            <a:pPr algn="r">
+              <a:lnSpc>
+                <a:spcPct val="100000"/>
+              </a:lnSpc>
+            </a:pPr>
+            <a:r>
+              <a:rPr sz="1300" b="1">
+                <a:solidFill>
+                  <a:srgbClr val="F1F5F9"/>
+                </a:solidFill>
+                <a:latin typeface="Malgun Gothic"/>
+              </a:rPr>
+              <a:t>기능 요약 · 데이터</a:t>
+            </a:r>
+          </a:p>
+        </p:txBody>
+      </p:sp>
+      <p:sp>
+        <p:nvSpPr>
+          <p:cNvPr id="6" name="Rounded Rectangle 5"/>
+          <p:cNvSpPr/>
+          <p:nvPr/>
+        </p:nvSpPr>
+        <p:spPr>
+          <a:xfrm>
             <a:off x="365760" y="841248"/>
             <a:ext cx="658368" cy="512064"/>
           </a:xfrm>
+          <a:prstGeom prst="roundRect">
+            <a:avLst/>
+          </a:prstGeom>
+          <a:solidFill>
+            <a:srgbClr val="E11D48"/>
+          </a:solidFill>
+          <a:ln>
+            <a:noFill/>
+          </a:ln>
+          <a:effectLst/>
+        </p:spPr>
+        <p:style>
+          <a:lnRef idx="1">
+            <a:schemeClr val="accent1"/>
+          </a:lnRef>
+          <a:fillRef idx="3">
+            <a:schemeClr val="accent1"/>
+          </a:fillRef>
+          <a:effectRef idx="2">
+            <a:schemeClr val="accent1"/>
+          </a:effectRef>
+          <a:fontRef idx="minor">
+            <a:schemeClr val="lt1"/>
+          </a:fontRef>
+        </p:style>
+        <p:txBody>
+          <a:bodyPr rtlCol="0" anchor="ctr"/>
+          <a:lstStyle/>
+          <a:p>
+            <a:pPr algn="ctr"/>
+          </a:p>
+        </p:txBody>
+      </p:sp>
+      <p:sp>
+        <p:nvSpPr>
+          <p:cNvPr id="7" name="TextBox 6"/>
+          <p:cNvSpPr txBox="1"/>
+          <p:nvPr/>
+        </p:nvSpPr>
+        <p:spPr>
+          <a:xfrm>
+            <a:off x="365760" y="841248"/>
+            <a:ext cx="658368" cy="512064"/>
+          </a:xfrm>
           <a:prstGeom prst="rect">
             <a:avLst/>
           </a:prstGeom>
@@ -20917,7 +23059,7 @@
                 </a:solidFill>
                 <a:latin typeface="Malgun Gothic"/>
               </a:rPr>
-              <a:t>23</a:t>
+              <a:t>25</a:t>
             </a:r>
           </a:p>
         </p:txBody>
@@ -21843,7 +23985,7 @@
 </p:sld>
 </file>
 
-<file path=ppt/slides/slide27.xml><?xml version="1.0" encoding="utf-8"?>
+<file path=ppt/slides/slide29.xml><?xml version="1.0" encoding="utf-8"?>
 <p:sld xmlns:a="http://schemas.openxmlformats.org/drawingml/2006/main" xmlns:p="http://schemas.openxmlformats.org/presentationml/2006/main" xmlns:r="http://schemas.openxmlformats.org/officeDocument/2006/relationships">
   <p:cSld>
     <p:bg>
@@ -22105,7 +24247,7 @@
                 </a:solidFill>
                 <a:latin typeface="Malgun Gothic"/>
               </a:rPr>
-              <a:t>24</a:t>
+              <a:t>26</a:t>
             </a:r>
           </a:p>
         </p:txBody>
@@ -22263,1873 +24405,6 @@
           </a:graphicData>
         </a:graphic>
       </p:graphicFrame>
-    </p:spTree>
-  </p:cSld>
-  <p:clrMapOvr>
-    <a:masterClrMapping/>
-  </p:clrMapOvr>
-</p:sld>
-</file>
-
-<file path=ppt/slides/slide28.xml><?xml version="1.0" encoding="utf-8"?>
-<p:sld xmlns:a="http://schemas.openxmlformats.org/drawingml/2006/main" xmlns:p="http://schemas.openxmlformats.org/presentationml/2006/main" xmlns:r="http://schemas.openxmlformats.org/officeDocument/2006/relationships">
-  <p:cSld>
-    <p:bg>
-      <p:bgPr>
-        <a:solidFill>
-          <a:srgbClr val="FFFFFF"/>
-        </a:solidFill>
-        <a:effectLst/>
-      </p:bgPr>
-    </p:bg>
-    <p:spTree>
-      <p:nvGrpSpPr>
-        <p:cNvPr id="1" name=""/>
-        <p:cNvGrpSpPr/>
-        <p:nvPr/>
-      </p:nvGrpSpPr>
-      <p:grpSpPr/>
-      <p:sp>
-        <p:nvSpPr>
-          <p:cNvPr id="2" name="Rectangle 1"/>
-          <p:cNvSpPr/>
-          <p:nvPr/>
-        </p:nvSpPr>
-        <p:spPr>
-          <a:xfrm>
-            <a:off x="0" y="0"/>
-            <a:ext cx="12191695" cy="566928"/>
-          </a:xfrm>
-          <a:prstGeom prst="rect">
-            <a:avLst/>
-          </a:prstGeom>
-          <a:solidFill>
-            <a:srgbClr val="E11D48"/>
-          </a:solidFill>
-          <a:ln>
-            <a:noFill/>
-          </a:ln>
-          <a:effectLst/>
-        </p:spPr>
-        <p:style>
-          <a:lnRef idx="1">
-            <a:schemeClr val="accent1"/>
-          </a:lnRef>
-          <a:fillRef idx="3">
-            <a:schemeClr val="accent1"/>
-          </a:fillRef>
-          <a:effectRef idx="2">
-            <a:schemeClr val="accent1"/>
-          </a:effectRef>
-          <a:fontRef idx="minor">
-            <a:schemeClr val="lt1"/>
-          </a:fontRef>
-        </p:style>
-        <p:txBody>
-          <a:bodyPr rtlCol="0" anchor="ctr"/>
-          <a:lstStyle/>
-          <a:p>
-            <a:pPr algn="ctr"/>
-          </a:p>
-        </p:txBody>
-      </p:sp>
-      <p:sp>
-        <p:nvSpPr>
-          <p:cNvPr id="3" name="Rectangle 2"/>
-          <p:cNvSpPr/>
-          <p:nvPr/>
-        </p:nvSpPr>
-        <p:spPr>
-          <a:xfrm>
-            <a:off x="0" y="566928"/>
-            <a:ext cx="12191695" cy="54864"/>
-          </a:xfrm>
-          <a:prstGeom prst="rect">
-            <a:avLst/>
-          </a:prstGeom>
-          <a:solidFill>
-            <a:srgbClr val="0EA5E9"/>
-          </a:solidFill>
-          <a:ln>
-            <a:noFill/>
-          </a:ln>
-          <a:effectLst/>
-        </p:spPr>
-        <p:style>
-          <a:lnRef idx="1">
-            <a:schemeClr val="accent1"/>
-          </a:lnRef>
-          <a:fillRef idx="3">
-            <a:schemeClr val="accent1"/>
-          </a:fillRef>
-          <a:effectRef idx="2">
-            <a:schemeClr val="accent1"/>
-          </a:effectRef>
-          <a:fontRef idx="minor">
-            <a:schemeClr val="lt1"/>
-          </a:fontRef>
-        </p:style>
-        <p:txBody>
-          <a:bodyPr rtlCol="0" anchor="ctr"/>
-          <a:lstStyle/>
-          <a:p>
-            <a:pPr algn="ctr"/>
-          </a:p>
-        </p:txBody>
-      </p:sp>
-      <p:sp>
-        <p:nvSpPr>
-          <p:cNvPr id="4" name="TextBox 3"/>
-          <p:cNvSpPr txBox="1"/>
-          <p:nvPr/>
-        </p:nvSpPr>
-        <p:spPr>
-          <a:xfrm>
-            <a:off x="365760" y="27432"/>
-            <a:ext cx="7315200" cy="502920"/>
-          </a:xfrm>
-          <a:prstGeom prst="rect">
-            <a:avLst/>
-          </a:prstGeom>
-          <a:noFill/>
-        </p:spPr>
-        <p:txBody>
-          <a:bodyPr wrap="square" anchor="ctr">
-            <a:spAutoFit/>
-          </a:bodyPr>
-          <a:lstStyle/>
-          <a:p>
-            <a:pPr algn="l">
-              <a:lnSpc>
-                <a:spcPct val="100000"/>
-              </a:lnSpc>
-            </a:pPr>
-            <a:r>
-              <a:rPr sz="1500" b="1">
-                <a:solidFill>
-                  <a:srgbClr val="FFFFFF"/>
-                </a:solidFill>
-                <a:latin typeface="Malgun Gothic"/>
-              </a:rPr>
-              <a:t>🤝 망고아이 대리점용 사용설명서</a:t>
-            </a:r>
-          </a:p>
-        </p:txBody>
-      </p:sp>
-      <p:sp>
-        <p:nvSpPr>
-          <p:cNvPr id="5" name="TextBox 4"/>
-          <p:cNvSpPr txBox="1"/>
-          <p:nvPr/>
-        </p:nvSpPr>
-        <p:spPr>
-          <a:xfrm>
-            <a:off x="8168335" y="27432"/>
-            <a:ext cx="3657600" cy="502920"/>
-          </a:xfrm>
-          <a:prstGeom prst="rect">
-            <a:avLst/>
-          </a:prstGeom>
-          <a:noFill/>
-        </p:spPr>
-        <p:txBody>
-          <a:bodyPr wrap="square" anchor="ctr">
-            <a:spAutoFit/>
-          </a:bodyPr>
-          <a:lstStyle/>
-          <a:p>
-            <a:pPr algn="r">
-              <a:lnSpc>
-                <a:spcPct val="100000"/>
-              </a:lnSpc>
-            </a:pPr>
-            <a:r>
-              <a:rPr sz="1300" b="1">
-                <a:solidFill>
-                  <a:srgbClr val="F1F5F9"/>
-                </a:solidFill>
-                <a:latin typeface="Malgun Gothic"/>
-              </a:rPr>
-              <a:t>자주 묻는 질문 (FAQ)</a:t>
-            </a:r>
-          </a:p>
-        </p:txBody>
-      </p:sp>
-      <p:sp>
-        <p:nvSpPr>
-          <p:cNvPr id="6" name="Rounded Rectangle 5"/>
-          <p:cNvSpPr/>
-          <p:nvPr/>
-        </p:nvSpPr>
-        <p:spPr>
-          <a:xfrm>
-            <a:off x="365760" y="841248"/>
-            <a:ext cx="658368" cy="512064"/>
-          </a:xfrm>
-          <a:prstGeom prst="roundRect">
-            <a:avLst/>
-          </a:prstGeom>
-          <a:solidFill>
-            <a:srgbClr val="E11D48"/>
-          </a:solidFill>
-          <a:ln>
-            <a:noFill/>
-          </a:ln>
-          <a:effectLst/>
-        </p:spPr>
-        <p:style>
-          <a:lnRef idx="1">
-            <a:schemeClr val="accent1"/>
-          </a:lnRef>
-          <a:fillRef idx="3">
-            <a:schemeClr val="accent1"/>
-          </a:fillRef>
-          <a:effectRef idx="2">
-            <a:schemeClr val="accent1"/>
-          </a:effectRef>
-          <a:fontRef idx="minor">
-            <a:schemeClr val="lt1"/>
-          </a:fontRef>
-        </p:style>
-        <p:txBody>
-          <a:bodyPr rtlCol="0" anchor="ctr"/>
-          <a:lstStyle/>
-          <a:p>
-            <a:pPr algn="ctr"/>
-          </a:p>
-        </p:txBody>
-      </p:sp>
-      <p:sp>
-        <p:nvSpPr>
-          <p:cNvPr id="7" name="TextBox 6"/>
-          <p:cNvSpPr txBox="1"/>
-          <p:nvPr/>
-        </p:nvSpPr>
-        <p:spPr>
-          <a:xfrm>
-            <a:off x="365760" y="841248"/>
-            <a:ext cx="658368" cy="512064"/>
-          </a:xfrm>
-          <a:prstGeom prst="rect">
-            <a:avLst/>
-          </a:prstGeom>
-          <a:noFill/>
-        </p:spPr>
-        <p:txBody>
-          <a:bodyPr wrap="square" anchor="ctr">
-            <a:spAutoFit/>
-          </a:bodyPr>
-          <a:lstStyle/>
-          <a:p>
-            <a:pPr algn="ctr">
-              <a:lnSpc>
-                <a:spcPct val="100000"/>
-              </a:lnSpc>
-            </a:pPr>
-            <a:r>
-              <a:rPr sz="1700" b="1">
-                <a:solidFill>
-                  <a:srgbClr val="FFFFFF"/>
-                </a:solidFill>
-                <a:latin typeface="Malgun Gothic"/>
-              </a:rPr>
-              <a:t>25</a:t>
-            </a:r>
-          </a:p>
-        </p:txBody>
-      </p:sp>
-      <p:sp>
-        <p:nvSpPr>
-          <p:cNvPr id="8" name="TextBox 7"/>
-          <p:cNvSpPr txBox="1"/>
-          <p:nvPr/>
-        </p:nvSpPr>
-        <p:spPr>
-          <a:xfrm>
-            <a:off x="1143000" y="868680"/>
-            <a:ext cx="9144000" cy="457200"/>
-          </a:xfrm>
-          <a:prstGeom prst="rect">
-            <a:avLst/>
-          </a:prstGeom>
-          <a:noFill/>
-        </p:spPr>
-        <p:txBody>
-          <a:bodyPr wrap="square" anchor="t">
-            <a:spAutoFit/>
-          </a:bodyPr>
-          <a:lstStyle/>
-          <a:p>
-            <a:pPr algn="l">
-              <a:lnSpc>
-                <a:spcPct val="100000"/>
-              </a:lnSpc>
-            </a:pPr>
-            <a:r>
-              <a:rPr sz="2200" b="1">
-                <a:solidFill>
-                  <a:srgbClr val="E11D48"/>
-                </a:solidFill>
-                <a:latin typeface="Malgun Gothic"/>
-              </a:rPr>
-              <a:t>❓ 자주 묻는 질문 (FAQ)</a:t>
-            </a:r>
-          </a:p>
-        </p:txBody>
-      </p:sp>
-      <p:sp>
-        <p:nvSpPr>
-          <p:cNvPr id="9" name="Rounded Rectangle 8"/>
-          <p:cNvSpPr/>
-          <p:nvPr/>
-        </p:nvSpPr>
-        <p:spPr>
-          <a:xfrm>
-            <a:off x="365760" y="1554480"/>
-            <a:ext cx="11460175" cy="868680"/>
-          </a:xfrm>
-          <a:prstGeom prst="roundRect">
-            <a:avLst/>
-          </a:prstGeom>
-          <a:solidFill>
-            <a:srgbClr val="F8FAFC"/>
-          </a:solidFill>
-          <a:ln w="12700">
-            <a:solidFill>
-              <a:srgbClr val="E2E8F0"/>
-            </a:solidFill>
-          </a:ln>
-          <a:effectLst/>
-        </p:spPr>
-        <p:style>
-          <a:lnRef idx="1">
-            <a:schemeClr val="accent1"/>
-          </a:lnRef>
-          <a:fillRef idx="3">
-            <a:schemeClr val="accent1"/>
-          </a:fillRef>
-          <a:effectRef idx="2">
-            <a:schemeClr val="accent1"/>
-          </a:effectRef>
-          <a:fontRef idx="minor">
-            <a:schemeClr val="lt1"/>
-          </a:fontRef>
-        </p:style>
-        <p:txBody>
-          <a:bodyPr rtlCol="0" anchor="ctr"/>
-          <a:lstStyle/>
-          <a:p>
-            <a:pPr algn="ctr"/>
-          </a:p>
-        </p:txBody>
-      </p:sp>
-      <p:sp>
-        <p:nvSpPr>
-          <p:cNvPr id="10" name="TextBox 9"/>
-          <p:cNvSpPr txBox="1"/>
-          <p:nvPr/>
-        </p:nvSpPr>
-        <p:spPr>
-          <a:xfrm>
-            <a:off x="548640" y="1627632"/>
-            <a:ext cx="11094415" cy="365760"/>
-          </a:xfrm>
-          <a:prstGeom prst="rect">
-            <a:avLst/>
-          </a:prstGeom>
-          <a:noFill/>
-        </p:spPr>
-        <p:txBody>
-          <a:bodyPr wrap="square" anchor="t">
-            <a:spAutoFit/>
-          </a:bodyPr>
-          <a:lstStyle/>
-          <a:p>
-            <a:pPr algn="l">
-              <a:lnSpc>
-                <a:spcPct val="100000"/>
-              </a:lnSpc>
-            </a:pPr>
-            <a:r>
-              <a:rPr sz="1350" b="1">
-                <a:solidFill>
-                  <a:srgbClr val="E11D48"/>
-                </a:solidFill>
-                <a:latin typeface="Malgun Gothic"/>
-              </a:rPr>
-              <a:t>Q. 어디서 접속하나요?</a:t>
-            </a:r>
-          </a:p>
-        </p:txBody>
-      </p:sp>
-      <p:sp>
-        <p:nvSpPr>
-          <p:cNvPr id="11" name="TextBox 10"/>
-          <p:cNvSpPr txBox="1"/>
-          <p:nvPr/>
-        </p:nvSpPr>
-        <p:spPr>
-          <a:xfrm>
-            <a:off x="548640" y="1965960"/>
-            <a:ext cx="11094415" cy="411480"/>
-          </a:xfrm>
-          <a:prstGeom prst="rect">
-            <a:avLst/>
-          </a:prstGeom>
-          <a:noFill/>
-        </p:spPr>
-        <p:txBody>
-          <a:bodyPr wrap="square" anchor="t">
-            <a:spAutoFit/>
-          </a:bodyPr>
-          <a:lstStyle/>
-          <a:p>
-            <a:pPr algn="l">
-              <a:lnSpc>
-                <a:spcPct val="105000"/>
-              </a:lnSpc>
-            </a:pPr>
-            <a:r>
-              <a:rPr sz="1150" b="0">
-                <a:solidFill>
-                  <a:srgbClr val="475569"/>
-                </a:solidFill>
-                <a:latin typeface="Malgun Gothic"/>
-              </a:rPr>
-              <a:t>A. admin.mangoi.co.kr 에서 로그인해요. 권한(대리점)에 따라 우리 대리점 데이터만 자동으로 보여요.</a:t>
-            </a:r>
-          </a:p>
-        </p:txBody>
-      </p:sp>
-      <p:sp>
-        <p:nvSpPr>
-          <p:cNvPr id="12" name="Rounded Rectangle 11"/>
-          <p:cNvSpPr/>
-          <p:nvPr/>
-        </p:nvSpPr>
-        <p:spPr>
-          <a:xfrm>
-            <a:off x="365760" y="2542032"/>
-            <a:ext cx="11460175" cy="868680"/>
-          </a:xfrm>
-          <a:prstGeom prst="roundRect">
-            <a:avLst/>
-          </a:prstGeom>
-          <a:solidFill>
-            <a:srgbClr val="F8FAFC"/>
-          </a:solidFill>
-          <a:ln w="12700">
-            <a:solidFill>
-              <a:srgbClr val="E2E8F0"/>
-            </a:solidFill>
-          </a:ln>
-          <a:effectLst/>
-        </p:spPr>
-        <p:style>
-          <a:lnRef idx="1">
-            <a:schemeClr val="accent1"/>
-          </a:lnRef>
-          <a:fillRef idx="3">
-            <a:schemeClr val="accent1"/>
-          </a:fillRef>
-          <a:effectRef idx="2">
-            <a:schemeClr val="accent1"/>
-          </a:effectRef>
-          <a:fontRef idx="minor">
-            <a:schemeClr val="lt1"/>
-          </a:fontRef>
-        </p:style>
-        <p:txBody>
-          <a:bodyPr rtlCol="0" anchor="ctr"/>
-          <a:lstStyle/>
-          <a:p>
-            <a:pPr algn="ctr"/>
-          </a:p>
-        </p:txBody>
-      </p:sp>
-      <p:sp>
-        <p:nvSpPr>
-          <p:cNvPr id="13" name="TextBox 12"/>
-          <p:cNvSpPr txBox="1"/>
-          <p:nvPr/>
-        </p:nvSpPr>
-        <p:spPr>
-          <a:xfrm>
-            <a:off x="548640" y="2615184"/>
-            <a:ext cx="11094415" cy="365760"/>
-          </a:xfrm>
-          <a:prstGeom prst="rect">
-            <a:avLst/>
-          </a:prstGeom>
-          <a:noFill/>
-        </p:spPr>
-        <p:txBody>
-          <a:bodyPr wrap="square" anchor="t">
-            <a:spAutoFit/>
-          </a:bodyPr>
-          <a:lstStyle/>
-          <a:p>
-            <a:pPr algn="l">
-              <a:lnSpc>
-                <a:spcPct val="100000"/>
-              </a:lnSpc>
-            </a:pPr>
-            <a:r>
-              <a:rPr sz="1350" b="1">
-                <a:solidFill>
-                  <a:srgbClr val="E11D48"/>
-                </a:solidFill>
-                <a:latin typeface="Malgun Gothic"/>
-              </a:rPr>
-              <a:t>Q. 다른 대리점 데이터도 보이나요?</a:t>
-            </a:r>
-          </a:p>
-        </p:txBody>
-      </p:sp>
-      <p:sp>
-        <p:nvSpPr>
-          <p:cNvPr id="14" name="TextBox 13"/>
-          <p:cNvSpPr txBox="1"/>
-          <p:nvPr/>
-        </p:nvSpPr>
-        <p:spPr>
-          <a:xfrm>
-            <a:off x="548640" y="2953512"/>
-            <a:ext cx="11094415" cy="411480"/>
-          </a:xfrm>
-          <a:prstGeom prst="rect">
-            <a:avLst/>
-          </a:prstGeom>
-          <a:noFill/>
-        </p:spPr>
-        <p:txBody>
-          <a:bodyPr wrap="square" anchor="t">
-            <a:spAutoFit/>
-          </a:bodyPr>
-          <a:lstStyle/>
-          <a:p>
-            <a:pPr algn="l">
-              <a:lnSpc>
-                <a:spcPct val="105000"/>
-              </a:lnSpc>
-            </a:pPr>
-            <a:r>
-              <a:rPr sz="1150" b="0">
-                <a:solidFill>
-                  <a:srgbClr val="475569"/>
-                </a:solidFill>
-                <a:latin typeface="Malgun Gothic"/>
-              </a:rPr>
-              <a:t>A. 아니요. 권한 범위상 우리 대리점 데이터만 보입니다.</a:t>
-            </a:r>
-          </a:p>
-        </p:txBody>
-      </p:sp>
-      <p:sp>
-        <p:nvSpPr>
-          <p:cNvPr id="15" name="Rounded Rectangle 14"/>
-          <p:cNvSpPr/>
-          <p:nvPr/>
-        </p:nvSpPr>
-        <p:spPr>
-          <a:xfrm>
-            <a:off x="365760" y="3529584"/>
-            <a:ext cx="11460175" cy="868680"/>
-          </a:xfrm>
-          <a:prstGeom prst="roundRect">
-            <a:avLst/>
-          </a:prstGeom>
-          <a:solidFill>
-            <a:srgbClr val="F8FAFC"/>
-          </a:solidFill>
-          <a:ln w="12700">
-            <a:solidFill>
-              <a:srgbClr val="E2E8F0"/>
-            </a:solidFill>
-          </a:ln>
-          <a:effectLst/>
-        </p:spPr>
-        <p:style>
-          <a:lnRef idx="1">
-            <a:schemeClr val="accent1"/>
-          </a:lnRef>
-          <a:fillRef idx="3">
-            <a:schemeClr val="accent1"/>
-          </a:fillRef>
-          <a:effectRef idx="2">
-            <a:schemeClr val="accent1"/>
-          </a:effectRef>
-          <a:fontRef idx="minor">
-            <a:schemeClr val="lt1"/>
-          </a:fontRef>
-        </p:style>
-        <p:txBody>
-          <a:bodyPr rtlCol="0" anchor="ctr"/>
-          <a:lstStyle/>
-          <a:p>
-            <a:pPr algn="ctr"/>
-          </a:p>
-        </p:txBody>
-      </p:sp>
-      <p:sp>
-        <p:nvSpPr>
-          <p:cNvPr id="16" name="TextBox 15"/>
-          <p:cNvSpPr txBox="1"/>
-          <p:nvPr/>
-        </p:nvSpPr>
-        <p:spPr>
-          <a:xfrm>
-            <a:off x="548640" y="3602736"/>
-            <a:ext cx="11094415" cy="365760"/>
-          </a:xfrm>
-          <a:prstGeom prst="rect">
-            <a:avLst/>
-          </a:prstGeom>
-          <a:noFill/>
-        </p:spPr>
-        <p:txBody>
-          <a:bodyPr wrap="square" anchor="t">
-            <a:spAutoFit/>
-          </a:bodyPr>
-          <a:lstStyle/>
-          <a:p>
-            <a:pPr algn="l">
-              <a:lnSpc>
-                <a:spcPct val="100000"/>
-              </a:lnSpc>
-            </a:pPr>
-            <a:r>
-              <a:rPr sz="1350" b="1">
-                <a:solidFill>
-                  <a:srgbClr val="E11D48"/>
-                </a:solidFill>
-                <a:latin typeface="Malgun Gothic"/>
-              </a:rPr>
-              <a:t>Q. 등록을 늘리려면?</a:t>
-            </a:r>
-          </a:p>
-        </p:txBody>
-      </p:sp>
-      <p:sp>
-        <p:nvSpPr>
-          <p:cNvPr id="17" name="TextBox 16"/>
-          <p:cNvSpPr txBox="1"/>
-          <p:nvPr/>
-        </p:nvSpPr>
-        <p:spPr>
-          <a:xfrm>
-            <a:off x="548640" y="3941064"/>
-            <a:ext cx="11094415" cy="411480"/>
-          </a:xfrm>
-          <a:prstGeom prst="rect">
-            <a:avLst/>
-          </a:prstGeom>
-          <a:noFill/>
-        </p:spPr>
-        <p:txBody>
-          <a:bodyPr wrap="square" anchor="t">
-            <a:spAutoFit/>
-          </a:bodyPr>
-          <a:lstStyle/>
-          <a:p>
-            <a:pPr algn="l">
-              <a:lnSpc>
-                <a:spcPct val="105000"/>
-              </a:lnSpc>
-            </a:pPr>
-            <a:r>
-              <a:rPr sz="1150" b="0">
-                <a:solidFill>
-                  <a:srgbClr val="475569"/>
-                </a:solidFill>
-                <a:latin typeface="Malgun Gothic"/>
-              </a:rPr>
-              <a:t>A. 빠른 상담 응대와 체험→등록 흐름, 학습 리포트를 활용한 학부모 설득이 핵심입니다.</a:t>
-            </a:r>
-          </a:p>
-        </p:txBody>
-      </p:sp>
-      <p:sp>
-        <p:nvSpPr>
-          <p:cNvPr id="18" name="Rounded Rectangle 17"/>
-          <p:cNvSpPr/>
-          <p:nvPr/>
-        </p:nvSpPr>
-        <p:spPr>
-          <a:xfrm>
-            <a:off x="365760" y="4517136"/>
-            <a:ext cx="11460175" cy="868680"/>
-          </a:xfrm>
-          <a:prstGeom prst="roundRect">
-            <a:avLst/>
-          </a:prstGeom>
-          <a:solidFill>
-            <a:srgbClr val="F8FAFC"/>
-          </a:solidFill>
-          <a:ln w="12700">
-            <a:solidFill>
-              <a:srgbClr val="E2E8F0"/>
-            </a:solidFill>
-          </a:ln>
-          <a:effectLst/>
-        </p:spPr>
-        <p:style>
-          <a:lnRef idx="1">
-            <a:schemeClr val="accent1"/>
-          </a:lnRef>
-          <a:fillRef idx="3">
-            <a:schemeClr val="accent1"/>
-          </a:fillRef>
-          <a:effectRef idx="2">
-            <a:schemeClr val="accent1"/>
-          </a:effectRef>
-          <a:fontRef idx="minor">
-            <a:schemeClr val="lt1"/>
-          </a:fontRef>
-        </p:style>
-        <p:txBody>
-          <a:bodyPr rtlCol="0" anchor="ctr"/>
-          <a:lstStyle/>
-          <a:p>
-            <a:pPr algn="ctr"/>
-          </a:p>
-        </p:txBody>
-      </p:sp>
-      <p:sp>
-        <p:nvSpPr>
-          <p:cNvPr id="19" name="TextBox 18"/>
-          <p:cNvSpPr txBox="1"/>
-          <p:nvPr/>
-        </p:nvSpPr>
-        <p:spPr>
-          <a:xfrm>
-            <a:off x="548640" y="4590288"/>
-            <a:ext cx="11094415" cy="365760"/>
-          </a:xfrm>
-          <a:prstGeom prst="rect">
-            <a:avLst/>
-          </a:prstGeom>
-          <a:noFill/>
-        </p:spPr>
-        <p:txBody>
-          <a:bodyPr wrap="square" anchor="t">
-            <a:spAutoFit/>
-          </a:bodyPr>
-          <a:lstStyle/>
-          <a:p>
-            <a:pPr algn="l">
-              <a:lnSpc>
-                <a:spcPct val="100000"/>
-              </a:lnSpc>
-            </a:pPr>
-            <a:r>
-              <a:rPr sz="1350" b="1">
-                <a:solidFill>
-                  <a:srgbClr val="E11D48"/>
-                </a:solidFill>
-                <a:latin typeface="Malgun Gothic"/>
-              </a:rPr>
-              <a:t>Q. 정산은 어떻게 확인하나요?</a:t>
-            </a:r>
-          </a:p>
-        </p:txBody>
-      </p:sp>
-      <p:sp>
-        <p:nvSpPr>
-          <p:cNvPr id="20" name="TextBox 19"/>
-          <p:cNvSpPr txBox="1"/>
-          <p:nvPr/>
-        </p:nvSpPr>
-        <p:spPr>
-          <a:xfrm>
-            <a:off x="548640" y="4928616"/>
-            <a:ext cx="11094415" cy="411480"/>
-          </a:xfrm>
-          <a:prstGeom prst="rect">
-            <a:avLst/>
-          </a:prstGeom>
-          <a:noFill/>
-        </p:spPr>
-        <p:txBody>
-          <a:bodyPr wrap="square" anchor="t">
-            <a:spAutoFit/>
-          </a:bodyPr>
-          <a:lstStyle/>
-          <a:p>
-            <a:pPr algn="l">
-              <a:lnSpc>
-                <a:spcPct val="105000"/>
-              </a:lnSpc>
-            </a:pPr>
-            <a:r>
-              <a:rPr sz="1150" b="0">
-                <a:solidFill>
-                  <a:srgbClr val="475569"/>
-                </a:solidFill>
-                <a:latin typeface="Malgun Gothic"/>
-              </a:rPr>
-              <a:t>A. 지사→대리점 정산(수령액)이 조직 트리 구조로 자동 계산되며, 월간 리포트에서 확인합니다.</a:t>
-            </a:r>
-          </a:p>
-        </p:txBody>
-      </p:sp>
-      <p:sp>
-        <p:nvSpPr>
-          <p:cNvPr id="21" name="Rounded Rectangle 20"/>
-          <p:cNvSpPr/>
-          <p:nvPr/>
-        </p:nvSpPr>
-        <p:spPr>
-          <a:xfrm>
-            <a:off x="365760" y="5504688"/>
-            <a:ext cx="11460175" cy="868680"/>
-          </a:xfrm>
-          <a:prstGeom prst="roundRect">
-            <a:avLst/>
-          </a:prstGeom>
-          <a:solidFill>
-            <a:srgbClr val="F8FAFC"/>
-          </a:solidFill>
-          <a:ln w="12700">
-            <a:solidFill>
-              <a:srgbClr val="E2E8F0"/>
-            </a:solidFill>
-          </a:ln>
-          <a:effectLst/>
-        </p:spPr>
-        <p:style>
-          <a:lnRef idx="1">
-            <a:schemeClr val="accent1"/>
-          </a:lnRef>
-          <a:fillRef idx="3">
-            <a:schemeClr val="accent1"/>
-          </a:fillRef>
-          <a:effectRef idx="2">
-            <a:schemeClr val="accent1"/>
-          </a:effectRef>
-          <a:fontRef idx="minor">
-            <a:schemeClr val="lt1"/>
-          </a:fontRef>
-        </p:style>
-        <p:txBody>
-          <a:bodyPr rtlCol="0" anchor="ctr"/>
-          <a:lstStyle/>
-          <a:p>
-            <a:pPr algn="ctr"/>
-          </a:p>
-        </p:txBody>
-      </p:sp>
-      <p:sp>
-        <p:nvSpPr>
-          <p:cNvPr id="22" name="TextBox 21"/>
-          <p:cNvSpPr txBox="1"/>
-          <p:nvPr/>
-        </p:nvSpPr>
-        <p:spPr>
-          <a:xfrm>
-            <a:off x="548640" y="5577840"/>
-            <a:ext cx="11094415" cy="365760"/>
-          </a:xfrm>
-          <a:prstGeom prst="rect">
-            <a:avLst/>
-          </a:prstGeom>
-          <a:noFill/>
-        </p:spPr>
-        <p:txBody>
-          <a:bodyPr wrap="square" anchor="t">
-            <a:spAutoFit/>
-          </a:bodyPr>
-          <a:lstStyle/>
-          <a:p>
-            <a:pPr algn="l">
-              <a:lnSpc>
-                <a:spcPct val="100000"/>
-              </a:lnSpc>
-            </a:pPr>
-            <a:r>
-              <a:rPr sz="1350" b="1">
-                <a:solidFill>
-                  <a:srgbClr val="E11D48"/>
-                </a:solidFill>
-                <a:latin typeface="Malgun Gothic"/>
-              </a:rPr>
-              <a:t>Q. 학생이 그만둘 것 같아요.</a:t>
-            </a:r>
-          </a:p>
-        </p:txBody>
-      </p:sp>
-      <p:sp>
-        <p:nvSpPr>
-          <p:cNvPr id="23" name="TextBox 22"/>
-          <p:cNvSpPr txBox="1"/>
-          <p:nvPr/>
-        </p:nvSpPr>
-        <p:spPr>
-          <a:xfrm>
-            <a:off x="548640" y="5916168"/>
-            <a:ext cx="11094415" cy="411480"/>
-          </a:xfrm>
-          <a:prstGeom prst="rect">
-            <a:avLst/>
-          </a:prstGeom>
-          <a:noFill/>
-        </p:spPr>
-        <p:txBody>
-          <a:bodyPr wrap="square" anchor="t">
-            <a:spAutoFit/>
-          </a:bodyPr>
-          <a:lstStyle/>
-          <a:p>
-            <a:pPr algn="l">
-              <a:lnSpc>
-                <a:spcPct val="105000"/>
-              </a:lnSpc>
-            </a:pPr>
-            <a:r>
-              <a:rPr sz="1150" b="0">
-                <a:solidFill>
-                  <a:srgbClr val="475569"/>
-                </a:solidFill>
-                <a:latin typeface="Malgun Gothic"/>
-              </a:rPr>
-              <a:t>A. 이탈위험 신호(결석·성과 하락)를 보고 상담·알림톡으로 빠르게 개입하세요.</a:t>
-            </a:r>
-          </a:p>
-        </p:txBody>
-      </p:sp>
-    </p:spTree>
-  </p:cSld>
-  <p:clrMapOvr>
-    <a:masterClrMapping/>
-  </p:clrMapOvr>
-</p:sld>
-</file>
-
-<file path=ppt/slides/slide29.xml><?xml version="1.0" encoding="utf-8"?>
-<p:sld xmlns:a="http://schemas.openxmlformats.org/drawingml/2006/main" xmlns:p="http://schemas.openxmlformats.org/presentationml/2006/main" xmlns:r="http://schemas.openxmlformats.org/officeDocument/2006/relationships">
-  <p:cSld>
-    <p:bg>
-      <p:bgPr>
-        <a:solidFill>
-          <a:srgbClr val="FFF1F2"/>
-        </a:solidFill>
-        <a:effectLst/>
-      </p:bgPr>
-    </p:bg>
-    <p:spTree>
-      <p:nvGrpSpPr>
-        <p:cNvPr id="1" name=""/>
-        <p:cNvGrpSpPr/>
-        <p:nvPr/>
-      </p:nvGrpSpPr>
-      <p:grpSpPr/>
-      <p:sp>
-        <p:nvSpPr>
-          <p:cNvPr id="2" name="Rectangle 1"/>
-          <p:cNvSpPr/>
-          <p:nvPr/>
-        </p:nvSpPr>
-        <p:spPr>
-          <a:xfrm>
-            <a:off x="0" y="0"/>
-            <a:ext cx="12191695" cy="566928"/>
-          </a:xfrm>
-          <a:prstGeom prst="rect">
-            <a:avLst/>
-          </a:prstGeom>
-          <a:solidFill>
-            <a:srgbClr val="E11D48"/>
-          </a:solidFill>
-          <a:ln>
-            <a:noFill/>
-          </a:ln>
-          <a:effectLst/>
-        </p:spPr>
-        <p:style>
-          <a:lnRef idx="1">
-            <a:schemeClr val="accent1"/>
-          </a:lnRef>
-          <a:fillRef idx="3">
-            <a:schemeClr val="accent1"/>
-          </a:fillRef>
-          <a:effectRef idx="2">
-            <a:schemeClr val="accent1"/>
-          </a:effectRef>
-          <a:fontRef idx="minor">
-            <a:schemeClr val="lt1"/>
-          </a:fontRef>
-        </p:style>
-        <p:txBody>
-          <a:bodyPr rtlCol="0" anchor="ctr"/>
-          <a:lstStyle/>
-          <a:p>
-            <a:pPr algn="ctr"/>
-          </a:p>
-        </p:txBody>
-      </p:sp>
-      <p:sp>
-        <p:nvSpPr>
-          <p:cNvPr id="3" name="Rectangle 2"/>
-          <p:cNvSpPr/>
-          <p:nvPr/>
-        </p:nvSpPr>
-        <p:spPr>
-          <a:xfrm>
-            <a:off x="0" y="566928"/>
-            <a:ext cx="12191695" cy="54864"/>
-          </a:xfrm>
-          <a:prstGeom prst="rect">
-            <a:avLst/>
-          </a:prstGeom>
-          <a:solidFill>
-            <a:srgbClr val="0EA5E9"/>
-          </a:solidFill>
-          <a:ln>
-            <a:noFill/>
-          </a:ln>
-          <a:effectLst/>
-        </p:spPr>
-        <p:style>
-          <a:lnRef idx="1">
-            <a:schemeClr val="accent1"/>
-          </a:lnRef>
-          <a:fillRef idx="3">
-            <a:schemeClr val="accent1"/>
-          </a:fillRef>
-          <a:effectRef idx="2">
-            <a:schemeClr val="accent1"/>
-          </a:effectRef>
-          <a:fontRef idx="minor">
-            <a:schemeClr val="lt1"/>
-          </a:fontRef>
-        </p:style>
-        <p:txBody>
-          <a:bodyPr rtlCol="0" anchor="ctr"/>
-          <a:lstStyle/>
-          <a:p>
-            <a:pPr algn="ctr"/>
-          </a:p>
-        </p:txBody>
-      </p:sp>
-      <p:sp>
-        <p:nvSpPr>
-          <p:cNvPr id="4" name="TextBox 3"/>
-          <p:cNvSpPr txBox="1"/>
-          <p:nvPr/>
-        </p:nvSpPr>
-        <p:spPr>
-          <a:xfrm>
-            <a:off x="365760" y="27432"/>
-            <a:ext cx="7315200" cy="502920"/>
-          </a:xfrm>
-          <a:prstGeom prst="rect">
-            <a:avLst/>
-          </a:prstGeom>
-          <a:noFill/>
-        </p:spPr>
-        <p:txBody>
-          <a:bodyPr wrap="square" anchor="ctr">
-            <a:spAutoFit/>
-          </a:bodyPr>
-          <a:lstStyle/>
-          <a:p>
-            <a:pPr algn="l">
-              <a:lnSpc>
-                <a:spcPct val="100000"/>
-              </a:lnSpc>
-            </a:pPr>
-            <a:r>
-              <a:rPr sz="1500" b="1">
-                <a:solidFill>
-                  <a:srgbClr val="FFFFFF"/>
-                </a:solidFill>
-                <a:latin typeface="Malgun Gothic"/>
-              </a:rPr>
-              <a:t>🤝 망고아이 대리점용 사용설명서</a:t>
-            </a:r>
-          </a:p>
-        </p:txBody>
-      </p:sp>
-      <p:sp>
-        <p:nvSpPr>
-          <p:cNvPr id="5" name="TextBox 4"/>
-          <p:cNvSpPr txBox="1"/>
-          <p:nvPr/>
-        </p:nvSpPr>
-        <p:spPr>
-          <a:xfrm>
-            <a:off x="8168335" y="27432"/>
-            <a:ext cx="3657600" cy="502920"/>
-          </a:xfrm>
-          <a:prstGeom prst="rect">
-            <a:avLst/>
-          </a:prstGeom>
-          <a:noFill/>
-        </p:spPr>
-        <p:txBody>
-          <a:bodyPr wrap="square" anchor="ctr">
-            <a:spAutoFit/>
-          </a:bodyPr>
-          <a:lstStyle/>
-          <a:p>
-            <a:pPr algn="r">
-              <a:lnSpc>
-                <a:spcPct val="100000"/>
-              </a:lnSpc>
-            </a:pPr>
-            <a:r>
-              <a:rPr sz="1300" b="1">
-                <a:solidFill>
-                  <a:srgbClr val="F1F5F9"/>
-                </a:solidFill>
-                <a:latin typeface="Malgun Gothic"/>
-              </a:rPr>
-              <a:t>체크리스트</a:t>
-            </a:r>
-          </a:p>
-        </p:txBody>
-      </p:sp>
-      <p:sp>
-        <p:nvSpPr>
-          <p:cNvPr id="6" name="Rounded Rectangle 5"/>
-          <p:cNvSpPr/>
-          <p:nvPr/>
-        </p:nvSpPr>
-        <p:spPr>
-          <a:xfrm>
-            <a:off x="365760" y="841248"/>
-            <a:ext cx="658368" cy="512064"/>
-          </a:xfrm>
-          <a:prstGeom prst="roundRect">
-            <a:avLst/>
-          </a:prstGeom>
-          <a:solidFill>
-            <a:srgbClr val="E11D48"/>
-          </a:solidFill>
-          <a:ln>
-            <a:noFill/>
-          </a:ln>
-          <a:effectLst/>
-        </p:spPr>
-        <p:style>
-          <a:lnRef idx="1">
-            <a:schemeClr val="accent1"/>
-          </a:lnRef>
-          <a:fillRef idx="3">
-            <a:schemeClr val="accent1"/>
-          </a:fillRef>
-          <a:effectRef idx="2">
-            <a:schemeClr val="accent1"/>
-          </a:effectRef>
-          <a:fontRef idx="minor">
-            <a:schemeClr val="lt1"/>
-          </a:fontRef>
-        </p:style>
-        <p:txBody>
-          <a:bodyPr rtlCol="0" anchor="ctr"/>
-          <a:lstStyle/>
-          <a:p>
-            <a:pPr algn="ctr"/>
-          </a:p>
-        </p:txBody>
-      </p:sp>
-      <p:sp>
-        <p:nvSpPr>
-          <p:cNvPr id="7" name="TextBox 6"/>
-          <p:cNvSpPr txBox="1"/>
-          <p:nvPr/>
-        </p:nvSpPr>
-        <p:spPr>
-          <a:xfrm>
-            <a:off x="365760" y="841248"/>
-            <a:ext cx="658368" cy="512064"/>
-          </a:xfrm>
-          <a:prstGeom prst="rect">
-            <a:avLst/>
-          </a:prstGeom>
-          <a:noFill/>
-        </p:spPr>
-        <p:txBody>
-          <a:bodyPr wrap="square" anchor="ctr">
-            <a:spAutoFit/>
-          </a:bodyPr>
-          <a:lstStyle/>
-          <a:p>
-            <a:pPr algn="ctr">
-              <a:lnSpc>
-                <a:spcPct val="100000"/>
-              </a:lnSpc>
-            </a:pPr>
-            <a:r>
-              <a:rPr sz="1700" b="1">
-                <a:solidFill>
-                  <a:srgbClr val="FFFFFF"/>
-                </a:solidFill>
-                <a:latin typeface="Malgun Gothic"/>
-              </a:rPr>
-              <a:t>26</a:t>
-            </a:r>
-          </a:p>
-        </p:txBody>
-      </p:sp>
-      <p:sp>
-        <p:nvSpPr>
-          <p:cNvPr id="8" name="TextBox 7"/>
-          <p:cNvSpPr txBox="1"/>
-          <p:nvPr/>
-        </p:nvSpPr>
-        <p:spPr>
-          <a:xfrm>
-            <a:off x="1143000" y="868680"/>
-            <a:ext cx="9144000" cy="457200"/>
-          </a:xfrm>
-          <a:prstGeom prst="rect">
-            <a:avLst/>
-          </a:prstGeom>
-          <a:noFill/>
-        </p:spPr>
-        <p:txBody>
-          <a:bodyPr wrap="square" anchor="t">
-            <a:spAutoFit/>
-          </a:bodyPr>
-          <a:lstStyle/>
-          <a:p>
-            <a:pPr algn="l">
-              <a:lnSpc>
-                <a:spcPct val="100000"/>
-              </a:lnSpc>
-            </a:pPr>
-            <a:r>
-              <a:rPr sz="2200" b="1">
-                <a:solidFill>
-                  <a:srgbClr val="E11D48"/>
-                </a:solidFill>
-                <a:latin typeface="Malgun Gothic"/>
-              </a:rPr>
-              <a:t>✅ 대리점 운영 체크리스트</a:t>
-            </a:r>
-          </a:p>
-        </p:txBody>
-      </p:sp>
-      <p:sp>
-        <p:nvSpPr>
-          <p:cNvPr id="9" name="Rounded Rectangle 8"/>
-          <p:cNvSpPr/>
-          <p:nvPr/>
-        </p:nvSpPr>
-        <p:spPr>
-          <a:xfrm>
-            <a:off x="457200" y="1645920"/>
-            <a:ext cx="292608" cy="292608"/>
-          </a:xfrm>
-          <a:prstGeom prst="roundRect">
-            <a:avLst/>
-          </a:prstGeom>
-          <a:solidFill>
-            <a:srgbClr val="FFFFFF"/>
-          </a:solidFill>
-          <a:ln w="12700">
-            <a:solidFill>
-              <a:srgbClr val="E11D48"/>
-            </a:solidFill>
-          </a:ln>
-          <a:effectLst/>
-        </p:spPr>
-        <p:style>
-          <a:lnRef idx="1">
-            <a:schemeClr val="accent1"/>
-          </a:lnRef>
-          <a:fillRef idx="3">
-            <a:schemeClr val="accent1"/>
-          </a:fillRef>
-          <a:effectRef idx="2">
-            <a:schemeClr val="accent1"/>
-          </a:effectRef>
-          <a:fontRef idx="minor">
-            <a:schemeClr val="lt1"/>
-          </a:fontRef>
-        </p:style>
-        <p:txBody>
-          <a:bodyPr rtlCol="0" anchor="ctr"/>
-          <a:lstStyle/>
-          <a:p>
-            <a:pPr algn="ctr"/>
-          </a:p>
-        </p:txBody>
-      </p:sp>
-      <p:sp>
-        <p:nvSpPr>
-          <p:cNvPr id="10" name="TextBox 9"/>
-          <p:cNvSpPr txBox="1"/>
-          <p:nvPr/>
-        </p:nvSpPr>
-        <p:spPr>
-          <a:xfrm>
-            <a:off x="914400" y="1581912"/>
-            <a:ext cx="10058400" cy="411480"/>
-          </a:xfrm>
-          <a:prstGeom prst="rect">
-            <a:avLst/>
-          </a:prstGeom>
-          <a:noFill/>
-        </p:spPr>
-        <p:txBody>
-          <a:bodyPr wrap="square" anchor="t">
-            <a:spAutoFit/>
-          </a:bodyPr>
-          <a:lstStyle/>
-          <a:p>
-            <a:pPr algn="l">
-              <a:lnSpc>
-                <a:spcPct val="100000"/>
-              </a:lnSpc>
-            </a:pPr>
-            <a:r>
-              <a:rPr sz="1500" b="1">
-                <a:solidFill>
-                  <a:srgbClr val="334155"/>
-                </a:solidFill>
-                <a:latin typeface="Malgun Gothic"/>
-              </a:rPr>
-              <a:t>오늘 매출·재원·출석 지표를 확인했나요?</a:t>
-            </a:r>
-          </a:p>
-        </p:txBody>
-      </p:sp>
-      <p:sp>
-        <p:nvSpPr>
-          <p:cNvPr id="11" name="Rounded Rectangle 10"/>
-          <p:cNvSpPr/>
-          <p:nvPr/>
-        </p:nvSpPr>
-        <p:spPr>
-          <a:xfrm>
-            <a:off x="457200" y="2212848"/>
-            <a:ext cx="292608" cy="292608"/>
-          </a:xfrm>
-          <a:prstGeom prst="roundRect">
-            <a:avLst/>
-          </a:prstGeom>
-          <a:solidFill>
-            <a:srgbClr val="FFFFFF"/>
-          </a:solidFill>
-          <a:ln w="12700">
-            <a:solidFill>
-              <a:srgbClr val="E11D48"/>
-            </a:solidFill>
-          </a:ln>
-          <a:effectLst/>
-        </p:spPr>
-        <p:style>
-          <a:lnRef idx="1">
-            <a:schemeClr val="accent1"/>
-          </a:lnRef>
-          <a:fillRef idx="3">
-            <a:schemeClr val="accent1"/>
-          </a:fillRef>
-          <a:effectRef idx="2">
-            <a:schemeClr val="accent1"/>
-          </a:effectRef>
-          <a:fontRef idx="minor">
-            <a:schemeClr val="lt1"/>
-          </a:fontRef>
-        </p:style>
-        <p:txBody>
-          <a:bodyPr rtlCol="0" anchor="ctr"/>
-          <a:lstStyle/>
-          <a:p>
-            <a:pPr algn="ctr"/>
-          </a:p>
-        </p:txBody>
-      </p:sp>
-      <p:sp>
-        <p:nvSpPr>
-          <p:cNvPr id="12" name="TextBox 11"/>
-          <p:cNvSpPr txBox="1"/>
-          <p:nvPr/>
-        </p:nvSpPr>
-        <p:spPr>
-          <a:xfrm>
-            <a:off x="914400" y="2148840"/>
-            <a:ext cx="10058400" cy="411480"/>
-          </a:xfrm>
-          <a:prstGeom prst="rect">
-            <a:avLst/>
-          </a:prstGeom>
-          <a:noFill/>
-        </p:spPr>
-        <p:txBody>
-          <a:bodyPr wrap="square" anchor="t">
-            <a:spAutoFit/>
-          </a:bodyPr>
-          <a:lstStyle/>
-          <a:p>
-            <a:pPr algn="l">
-              <a:lnSpc>
-                <a:spcPct val="100000"/>
-              </a:lnSpc>
-            </a:pPr>
-            <a:r>
-              <a:rPr sz="1500" b="1">
-                <a:solidFill>
-                  <a:srgbClr val="334155"/>
-                </a:solidFill>
-                <a:latin typeface="Malgun Gothic"/>
-              </a:rPr>
-              <a:t>신규 상담/문의를 접수·응대했나요?</a:t>
-            </a:r>
-          </a:p>
-        </p:txBody>
-      </p:sp>
-      <p:sp>
-        <p:nvSpPr>
-          <p:cNvPr id="13" name="Rounded Rectangle 12"/>
-          <p:cNvSpPr/>
-          <p:nvPr/>
-        </p:nvSpPr>
-        <p:spPr>
-          <a:xfrm>
-            <a:off x="457200" y="2779776"/>
-            <a:ext cx="292608" cy="292608"/>
-          </a:xfrm>
-          <a:prstGeom prst="roundRect">
-            <a:avLst/>
-          </a:prstGeom>
-          <a:solidFill>
-            <a:srgbClr val="FFFFFF"/>
-          </a:solidFill>
-          <a:ln w="12700">
-            <a:solidFill>
-              <a:srgbClr val="E11D48"/>
-            </a:solidFill>
-          </a:ln>
-          <a:effectLst/>
-        </p:spPr>
-        <p:style>
-          <a:lnRef idx="1">
-            <a:schemeClr val="accent1"/>
-          </a:lnRef>
-          <a:fillRef idx="3">
-            <a:schemeClr val="accent1"/>
-          </a:fillRef>
-          <a:effectRef idx="2">
-            <a:schemeClr val="accent1"/>
-          </a:effectRef>
-          <a:fontRef idx="minor">
-            <a:schemeClr val="lt1"/>
-          </a:fontRef>
-        </p:style>
-        <p:txBody>
-          <a:bodyPr rtlCol="0" anchor="ctr"/>
-          <a:lstStyle/>
-          <a:p>
-            <a:pPr algn="ctr"/>
-          </a:p>
-        </p:txBody>
-      </p:sp>
-      <p:sp>
-        <p:nvSpPr>
-          <p:cNvPr id="14" name="TextBox 13"/>
-          <p:cNvSpPr txBox="1"/>
-          <p:nvPr/>
-        </p:nvSpPr>
-        <p:spPr>
-          <a:xfrm>
-            <a:off x="914400" y="2715768"/>
-            <a:ext cx="10058400" cy="411480"/>
-          </a:xfrm>
-          <a:prstGeom prst="rect">
-            <a:avLst/>
-          </a:prstGeom>
-          <a:noFill/>
-        </p:spPr>
-        <p:txBody>
-          <a:bodyPr wrap="square" anchor="t">
-            <a:spAutoFit/>
-          </a:bodyPr>
-          <a:lstStyle/>
-          <a:p>
-            <a:pPr algn="l">
-              <a:lnSpc>
-                <a:spcPct val="100000"/>
-              </a:lnSpc>
-            </a:pPr>
-            <a:r>
-              <a:rPr sz="1500" b="1">
-                <a:solidFill>
-                  <a:srgbClr val="334155"/>
-                </a:solidFill>
-                <a:latin typeface="Malgun Gothic"/>
-              </a:rPr>
-              <a:t>미납 건을 확인하고 안내했나요?</a:t>
-            </a:r>
-          </a:p>
-        </p:txBody>
-      </p:sp>
-      <p:sp>
-        <p:nvSpPr>
-          <p:cNvPr id="15" name="Rounded Rectangle 14"/>
-          <p:cNvSpPr/>
-          <p:nvPr/>
-        </p:nvSpPr>
-        <p:spPr>
-          <a:xfrm>
-            <a:off x="457200" y="3346704"/>
-            <a:ext cx="292608" cy="292608"/>
-          </a:xfrm>
-          <a:prstGeom prst="roundRect">
-            <a:avLst/>
-          </a:prstGeom>
-          <a:solidFill>
-            <a:srgbClr val="FFFFFF"/>
-          </a:solidFill>
-          <a:ln w="12700">
-            <a:solidFill>
-              <a:srgbClr val="E11D48"/>
-            </a:solidFill>
-          </a:ln>
-          <a:effectLst/>
-        </p:spPr>
-        <p:style>
-          <a:lnRef idx="1">
-            <a:schemeClr val="accent1"/>
-          </a:lnRef>
-          <a:fillRef idx="3">
-            <a:schemeClr val="accent1"/>
-          </a:fillRef>
-          <a:effectRef idx="2">
-            <a:schemeClr val="accent1"/>
-          </a:effectRef>
-          <a:fontRef idx="minor">
-            <a:schemeClr val="lt1"/>
-          </a:fontRef>
-        </p:style>
-        <p:txBody>
-          <a:bodyPr rtlCol="0" anchor="ctr"/>
-          <a:lstStyle/>
-          <a:p>
-            <a:pPr algn="ctr"/>
-          </a:p>
-        </p:txBody>
-      </p:sp>
-      <p:sp>
-        <p:nvSpPr>
-          <p:cNvPr id="16" name="TextBox 15"/>
-          <p:cNvSpPr txBox="1"/>
-          <p:nvPr/>
-        </p:nvSpPr>
-        <p:spPr>
-          <a:xfrm>
-            <a:off x="914400" y="3282696"/>
-            <a:ext cx="10058400" cy="411480"/>
-          </a:xfrm>
-          <a:prstGeom prst="rect">
-            <a:avLst/>
-          </a:prstGeom>
-          <a:noFill/>
-        </p:spPr>
-        <p:txBody>
-          <a:bodyPr wrap="square" anchor="t">
-            <a:spAutoFit/>
-          </a:bodyPr>
-          <a:lstStyle/>
-          <a:p>
-            <a:pPr algn="l">
-              <a:lnSpc>
-                <a:spcPct val="100000"/>
-              </a:lnSpc>
-            </a:pPr>
-            <a:r>
-              <a:rPr sz="1500" b="1">
-                <a:solidFill>
-                  <a:srgbClr val="334155"/>
-                </a:solidFill>
-                <a:latin typeface="Malgun Gothic"/>
-              </a:rPr>
-              <a:t>이탈위험 학생을 챙겼나요?</a:t>
-            </a:r>
-          </a:p>
-        </p:txBody>
-      </p:sp>
-      <p:sp>
-        <p:nvSpPr>
-          <p:cNvPr id="17" name="Rounded Rectangle 16"/>
-          <p:cNvSpPr/>
-          <p:nvPr/>
-        </p:nvSpPr>
-        <p:spPr>
-          <a:xfrm>
-            <a:off x="457200" y="3913632"/>
-            <a:ext cx="292608" cy="292608"/>
-          </a:xfrm>
-          <a:prstGeom prst="roundRect">
-            <a:avLst/>
-          </a:prstGeom>
-          <a:solidFill>
-            <a:srgbClr val="FFFFFF"/>
-          </a:solidFill>
-          <a:ln w="12700">
-            <a:solidFill>
-              <a:srgbClr val="E11D48"/>
-            </a:solidFill>
-          </a:ln>
-          <a:effectLst/>
-        </p:spPr>
-        <p:style>
-          <a:lnRef idx="1">
-            <a:schemeClr val="accent1"/>
-          </a:lnRef>
-          <a:fillRef idx="3">
-            <a:schemeClr val="accent1"/>
-          </a:fillRef>
-          <a:effectRef idx="2">
-            <a:schemeClr val="accent1"/>
-          </a:effectRef>
-          <a:fontRef idx="minor">
-            <a:schemeClr val="lt1"/>
-          </a:fontRef>
-        </p:style>
-        <p:txBody>
-          <a:bodyPr rtlCol="0" anchor="ctr"/>
-          <a:lstStyle/>
-          <a:p>
-            <a:pPr algn="ctr"/>
-          </a:p>
-        </p:txBody>
-      </p:sp>
-      <p:sp>
-        <p:nvSpPr>
-          <p:cNvPr id="18" name="TextBox 17"/>
-          <p:cNvSpPr txBox="1"/>
-          <p:nvPr/>
-        </p:nvSpPr>
-        <p:spPr>
-          <a:xfrm>
-            <a:off x="914400" y="3849624"/>
-            <a:ext cx="10058400" cy="411480"/>
-          </a:xfrm>
-          <a:prstGeom prst="rect">
-            <a:avLst/>
-          </a:prstGeom>
-          <a:noFill/>
-        </p:spPr>
-        <p:txBody>
-          <a:bodyPr wrap="square" anchor="t">
-            <a:spAutoFit/>
-          </a:bodyPr>
-          <a:lstStyle/>
-          <a:p>
-            <a:pPr algn="l">
-              <a:lnSpc>
-                <a:spcPct val="100000"/>
-              </a:lnSpc>
-            </a:pPr>
-            <a:r>
-              <a:rPr sz="1500" b="1">
-                <a:solidFill>
-                  <a:srgbClr val="334155"/>
-                </a:solidFill>
-                <a:latin typeface="Malgun Gothic"/>
-              </a:rPr>
-              <a:t>학부모에게 리포트·마이페이지를 안내했나요?</a:t>
-            </a:r>
-          </a:p>
-        </p:txBody>
-      </p:sp>
-      <p:sp>
-        <p:nvSpPr>
-          <p:cNvPr id="19" name="Rounded Rectangle 18"/>
-          <p:cNvSpPr/>
-          <p:nvPr/>
-        </p:nvSpPr>
-        <p:spPr>
-          <a:xfrm>
-            <a:off x="457200" y="4480560"/>
-            <a:ext cx="292608" cy="292608"/>
-          </a:xfrm>
-          <a:prstGeom prst="roundRect">
-            <a:avLst/>
-          </a:prstGeom>
-          <a:solidFill>
-            <a:srgbClr val="FFFFFF"/>
-          </a:solidFill>
-          <a:ln w="12700">
-            <a:solidFill>
-              <a:srgbClr val="E11D48"/>
-            </a:solidFill>
-          </a:ln>
-          <a:effectLst/>
-        </p:spPr>
-        <p:style>
-          <a:lnRef idx="1">
-            <a:schemeClr val="accent1"/>
-          </a:lnRef>
-          <a:fillRef idx="3">
-            <a:schemeClr val="accent1"/>
-          </a:fillRef>
-          <a:effectRef idx="2">
-            <a:schemeClr val="accent1"/>
-          </a:effectRef>
-          <a:fontRef idx="minor">
-            <a:schemeClr val="lt1"/>
-          </a:fontRef>
-        </p:style>
-        <p:txBody>
-          <a:bodyPr rtlCol="0" anchor="ctr"/>
-          <a:lstStyle/>
-          <a:p>
-            <a:pPr algn="ctr"/>
-          </a:p>
-        </p:txBody>
-      </p:sp>
-      <p:sp>
-        <p:nvSpPr>
-          <p:cNvPr id="20" name="TextBox 19"/>
-          <p:cNvSpPr txBox="1"/>
-          <p:nvPr/>
-        </p:nvSpPr>
-        <p:spPr>
-          <a:xfrm>
-            <a:off x="914400" y="4416552"/>
-            <a:ext cx="10058400" cy="411480"/>
-          </a:xfrm>
-          <a:prstGeom prst="rect">
-            <a:avLst/>
-          </a:prstGeom>
-          <a:noFill/>
-        </p:spPr>
-        <p:txBody>
-          <a:bodyPr wrap="square" anchor="t">
-            <a:spAutoFit/>
-          </a:bodyPr>
-          <a:lstStyle/>
-          <a:p>
-            <a:pPr algn="l">
-              <a:lnSpc>
-                <a:spcPct val="100000"/>
-              </a:lnSpc>
-            </a:pPr>
-            <a:r>
-              <a:rPr sz="1500" b="1">
-                <a:solidFill>
-                  <a:srgbClr val="334155"/>
-                </a:solidFill>
-                <a:latin typeface="Malgun Gothic"/>
-              </a:rPr>
-              <a:t>이번 달 정산(수령)을 확인했나요?</a:t>
-            </a:r>
-          </a:p>
-        </p:txBody>
-      </p:sp>
-      <p:sp>
-        <p:nvSpPr>
-          <p:cNvPr id="21" name="Rounded Rectangle 20"/>
-          <p:cNvSpPr/>
-          <p:nvPr/>
-        </p:nvSpPr>
-        <p:spPr>
-          <a:xfrm>
-            <a:off x="457200" y="5047488"/>
-            <a:ext cx="292608" cy="292608"/>
-          </a:xfrm>
-          <a:prstGeom prst="roundRect">
-            <a:avLst/>
-          </a:prstGeom>
-          <a:solidFill>
-            <a:srgbClr val="FFFFFF"/>
-          </a:solidFill>
-          <a:ln w="12700">
-            <a:solidFill>
-              <a:srgbClr val="E11D48"/>
-            </a:solidFill>
-          </a:ln>
-          <a:effectLst/>
-        </p:spPr>
-        <p:style>
-          <a:lnRef idx="1">
-            <a:schemeClr val="accent1"/>
-          </a:lnRef>
-          <a:fillRef idx="3">
-            <a:schemeClr val="accent1"/>
-          </a:fillRef>
-          <a:effectRef idx="2">
-            <a:schemeClr val="accent1"/>
-          </a:effectRef>
-          <a:fontRef idx="minor">
-            <a:schemeClr val="lt1"/>
-          </a:fontRef>
-        </p:style>
-        <p:txBody>
-          <a:bodyPr rtlCol="0" anchor="ctr"/>
-          <a:lstStyle/>
-          <a:p>
-            <a:pPr algn="ctr"/>
-          </a:p>
-        </p:txBody>
-      </p:sp>
-      <p:sp>
-        <p:nvSpPr>
-          <p:cNvPr id="22" name="TextBox 21"/>
-          <p:cNvSpPr txBox="1"/>
-          <p:nvPr/>
-        </p:nvSpPr>
-        <p:spPr>
-          <a:xfrm>
-            <a:off x="914400" y="4983480"/>
-            <a:ext cx="10058400" cy="411480"/>
-          </a:xfrm>
-          <a:prstGeom prst="rect">
-            <a:avLst/>
-          </a:prstGeom>
-          <a:noFill/>
-        </p:spPr>
-        <p:txBody>
-          <a:bodyPr wrap="square" anchor="t">
-            <a:spAutoFit/>
-          </a:bodyPr>
-          <a:lstStyle/>
-          <a:p>
-            <a:pPr algn="l">
-              <a:lnSpc>
-                <a:spcPct val="100000"/>
-              </a:lnSpc>
-            </a:pPr>
-            <a:r>
-              <a:rPr sz="1500" b="1">
-                <a:solidFill>
-                  <a:srgbClr val="334155"/>
-                </a:solidFill>
-                <a:latin typeface="Malgun Gothic"/>
-              </a:rPr>
-              <a:t>체험→등록 후속 연락을 했나요?</a:t>
-            </a:r>
-          </a:p>
-        </p:txBody>
-      </p:sp>
-      <p:pic>
-        <p:nvPicPr>
-          <p:cNvPr id="23" name="Picture 22" descr="mango_char.png"/>
-          <p:cNvPicPr>
-            <a:picLocks noChangeAspect="1"/>
-          </p:cNvPicPr>
-          <p:nvPr/>
-        </p:nvPicPr>
-        <p:blipFill>
-          <a:blip r:embed="rId2"/>
-          <a:stretch>
-            <a:fillRect/>
-          </a:stretch>
-        </p:blipFill>
-        <p:spPr>
-          <a:xfrm>
-            <a:off x="9153162" y="4480559"/>
-            <a:ext cx="2489892" cy="2011680"/>
-          </a:xfrm>
-          <a:prstGeom prst="rect">
-            <a:avLst/>
-          </a:prstGeom>
-        </p:spPr>
-      </p:pic>
     </p:spTree>
   </p:cSld>
   <p:clrMapOvr>
@@ -26540,7 +26815,7 @@
         </p:nvSpPr>
         <p:spPr>
           <a:xfrm>
-            <a:off x="6141567" y="1481328"/>
+            <a:off x="411480" y="5321808"/>
             <a:ext cx="384048" cy="228600"/>
           </a:xfrm>
           <a:prstGeom prst="roundRect">
@@ -26584,7 +26859,7 @@
         </p:nvSpPr>
         <p:spPr>
           <a:xfrm>
-            <a:off x="6141567" y="1463040"/>
+            <a:off x="411480" y="5303520"/>
             <a:ext cx="384048" cy="265176"/>
           </a:xfrm>
           <a:prstGeom prst="rect">
@@ -26623,7 +26898,7 @@
         </p:nvSpPr>
         <p:spPr>
           <a:xfrm>
-            <a:off x="6617055" y="1453896"/>
+            <a:off x="886968" y="5294376"/>
             <a:ext cx="4587087" cy="274320"/>
           </a:xfrm>
           <a:prstGeom prst="rect">
@@ -26662,7 +26937,7 @@
         </p:nvSpPr>
         <p:spPr>
           <a:xfrm>
-            <a:off x="11213287" y="1453896"/>
+            <a:off x="5483199" y="5294376"/>
             <a:ext cx="457200" cy="274320"/>
           </a:xfrm>
           <a:prstGeom prst="rect">
@@ -26701,7 +26976,7 @@
         </p:nvSpPr>
         <p:spPr>
           <a:xfrm>
-            <a:off x="6141567" y="1755648"/>
+            <a:off x="6141567" y="1481328"/>
             <a:ext cx="384048" cy="228600"/>
           </a:xfrm>
           <a:prstGeom prst="roundRect">
@@ -26745,7 +27020,7 @@
         </p:nvSpPr>
         <p:spPr>
           <a:xfrm>
-            <a:off x="6141567" y="1737360"/>
+            <a:off x="6141567" y="1463040"/>
             <a:ext cx="384048" cy="265176"/>
           </a:xfrm>
           <a:prstGeom prst="rect">
@@ -26784,7 +27059,7 @@
         </p:nvSpPr>
         <p:spPr>
           <a:xfrm>
-            <a:off x="6617055" y="1728216"/>
+            <a:off x="6617055" y="1453896"/>
             <a:ext cx="4587087" cy="274320"/>
           </a:xfrm>
           <a:prstGeom prst="rect">
@@ -26823,7 +27098,7 @@
         </p:nvSpPr>
         <p:spPr>
           <a:xfrm>
-            <a:off x="11213287" y="1728216"/>
+            <a:off x="11213287" y="1453896"/>
             <a:ext cx="457200" cy="274320"/>
           </a:xfrm>
           <a:prstGeom prst="rect">
@@ -26862,7 +27137,7 @@
         </p:nvSpPr>
         <p:spPr>
           <a:xfrm>
-            <a:off x="6141567" y="2029968"/>
+            <a:off x="6141567" y="1755648"/>
             <a:ext cx="384048" cy="228600"/>
           </a:xfrm>
           <a:prstGeom prst="roundRect">
@@ -26906,7 +27181,7 @@
         </p:nvSpPr>
         <p:spPr>
           <a:xfrm>
-            <a:off x="6141567" y="2011680"/>
+            <a:off x="6141567" y="1737360"/>
             <a:ext cx="384048" cy="265176"/>
           </a:xfrm>
           <a:prstGeom prst="rect">
@@ -26945,7 +27220,7 @@
         </p:nvSpPr>
         <p:spPr>
           <a:xfrm>
-            <a:off x="6617055" y="2002536"/>
+            <a:off x="6617055" y="1728216"/>
             <a:ext cx="4587087" cy="274320"/>
           </a:xfrm>
           <a:prstGeom prst="rect">
@@ -26984,7 +27259,7 @@
         </p:nvSpPr>
         <p:spPr>
           <a:xfrm>
-            <a:off x="11213287" y="2002536"/>
+            <a:off x="11213287" y="1728216"/>
             <a:ext cx="457200" cy="274320"/>
           </a:xfrm>
           <a:prstGeom prst="rect">
@@ -27023,7 +27298,7 @@
         </p:nvSpPr>
         <p:spPr>
           <a:xfrm>
-            <a:off x="6141567" y="2304288"/>
+            <a:off x="6141567" y="2029968"/>
             <a:ext cx="384048" cy="228600"/>
           </a:xfrm>
           <a:prstGeom prst="roundRect">
@@ -27067,7 +27342,7 @@
         </p:nvSpPr>
         <p:spPr>
           <a:xfrm>
-            <a:off x="6141567" y="2286000"/>
+            <a:off x="6141567" y="2011680"/>
             <a:ext cx="384048" cy="265176"/>
           </a:xfrm>
           <a:prstGeom prst="rect">
@@ -27106,7 +27381,7 @@
         </p:nvSpPr>
         <p:spPr>
           <a:xfrm>
-            <a:off x="6617055" y="2276856"/>
+            <a:off x="6617055" y="2002536"/>
             <a:ext cx="4587087" cy="274320"/>
           </a:xfrm>
           <a:prstGeom prst="rect">
@@ -27145,7 +27420,7 @@
         </p:nvSpPr>
         <p:spPr>
           <a:xfrm>
-            <a:off x="11213287" y="2276856"/>
+            <a:off x="11213287" y="2002536"/>
             <a:ext cx="457200" cy="274320"/>
           </a:xfrm>
           <a:prstGeom prst="rect">
@@ -27184,7 +27459,7 @@
         </p:nvSpPr>
         <p:spPr>
           <a:xfrm>
-            <a:off x="6141567" y="2578608"/>
+            <a:off x="6141567" y="2304288"/>
             <a:ext cx="384048" cy="228600"/>
           </a:xfrm>
           <a:prstGeom prst="roundRect">
@@ -27228,7 +27503,7 @@
         </p:nvSpPr>
         <p:spPr>
           <a:xfrm>
-            <a:off x="6141567" y="2560320"/>
+            <a:off x="6141567" y="2286000"/>
             <a:ext cx="384048" cy="265176"/>
           </a:xfrm>
           <a:prstGeom prst="rect">
@@ -27267,7 +27542,7 @@
         </p:nvSpPr>
         <p:spPr>
           <a:xfrm>
-            <a:off x="6617055" y="2551176"/>
+            <a:off x="6617055" y="2276856"/>
             <a:ext cx="4587087" cy="274320"/>
           </a:xfrm>
           <a:prstGeom prst="rect">
@@ -27306,7 +27581,7 @@
         </p:nvSpPr>
         <p:spPr>
           <a:xfrm>
-            <a:off x="11213287" y="2551176"/>
+            <a:off x="11213287" y="2276856"/>
             <a:ext cx="457200" cy="274320"/>
           </a:xfrm>
           <a:prstGeom prst="rect">
@@ -27345,7 +27620,7 @@
         </p:nvSpPr>
         <p:spPr>
           <a:xfrm>
-            <a:off x="6141567" y="2852928"/>
+            <a:off x="6141567" y="2578608"/>
             <a:ext cx="384048" cy="228600"/>
           </a:xfrm>
           <a:prstGeom prst="roundRect">
@@ -27389,7 +27664,7 @@
         </p:nvSpPr>
         <p:spPr>
           <a:xfrm>
-            <a:off x="6141567" y="2834640"/>
+            <a:off x="6141567" y="2560320"/>
             <a:ext cx="384048" cy="265176"/>
           </a:xfrm>
           <a:prstGeom prst="rect">
@@ -27428,7 +27703,7 @@
         </p:nvSpPr>
         <p:spPr>
           <a:xfrm>
-            <a:off x="6617055" y="2825496"/>
+            <a:off x="6617055" y="2551176"/>
             <a:ext cx="4587087" cy="274320"/>
           </a:xfrm>
           <a:prstGeom prst="rect">
@@ -27467,7 +27742,7 @@
         </p:nvSpPr>
         <p:spPr>
           <a:xfrm>
-            <a:off x="11213287" y="2825496"/>
+            <a:off x="11213287" y="2551176"/>
             <a:ext cx="457200" cy="274320"/>
           </a:xfrm>
           <a:prstGeom prst="rect">
@@ -27506,7 +27781,7 @@
         </p:nvSpPr>
         <p:spPr>
           <a:xfrm>
-            <a:off x="6141567" y="3127248"/>
+            <a:off x="6141567" y="2852928"/>
             <a:ext cx="384048" cy="228600"/>
           </a:xfrm>
           <a:prstGeom prst="roundRect">
@@ -27550,7 +27825,7 @@
         </p:nvSpPr>
         <p:spPr>
           <a:xfrm>
-            <a:off x="6141567" y="3108960"/>
+            <a:off x="6141567" y="2834640"/>
             <a:ext cx="384048" cy="265176"/>
           </a:xfrm>
           <a:prstGeom prst="rect">
@@ -27589,7 +27864,7 @@
         </p:nvSpPr>
         <p:spPr>
           <a:xfrm>
-            <a:off x="6617055" y="3099816"/>
+            <a:off x="6617055" y="2825496"/>
             <a:ext cx="4587087" cy="274320"/>
           </a:xfrm>
           <a:prstGeom prst="rect">
@@ -27628,7 +27903,7 @@
         </p:nvSpPr>
         <p:spPr>
           <a:xfrm>
-            <a:off x="11213287" y="3099816"/>
+            <a:off x="11213287" y="2825496"/>
             <a:ext cx="457200" cy="274320"/>
           </a:xfrm>
           <a:prstGeom prst="rect">
@@ -27667,7 +27942,7 @@
         </p:nvSpPr>
         <p:spPr>
           <a:xfrm>
-            <a:off x="6141567" y="3401568"/>
+            <a:off x="6141567" y="3127248"/>
             <a:ext cx="384048" cy="228600"/>
           </a:xfrm>
           <a:prstGeom prst="roundRect">
@@ -27711,7 +27986,7 @@
         </p:nvSpPr>
         <p:spPr>
           <a:xfrm>
-            <a:off x="6141567" y="3383280"/>
+            <a:off x="6141567" y="3108960"/>
             <a:ext cx="384048" cy="265176"/>
           </a:xfrm>
           <a:prstGeom prst="rect">
@@ -27750,7 +28025,7 @@
         </p:nvSpPr>
         <p:spPr>
           <a:xfrm>
-            <a:off x="6617055" y="3374136"/>
+            <a:off x="6617055" y="3099816"/>
             <a:ext cx="4587087" cy="274320"/>
           </a:xfrm>
           <a:prstGeom prst="rect">
@@ -27789,7 +28064,7 @@
         </p:nvSpPr>
         <p:spPr>
           <a:xfrm>
-            <a:off x="11213287" y="3374136"/>
+            <a:off x="11213287" y="3099816"/>
             <a:ext cx="457200" cy="274320"/>
           </a:xfrm>
           <a:prstGeom prst="rect">
@@ -27828,7 +28103,7 @@
         </p:nvSpPr>
         <p:spPr>
           <a:xfrm>
-            <a:off x="6141567" y="3675887"/>
+            <a:off x="6141567" y="3401568"/>
             <a:ext cx="384048" cy="228600"/>
           </a:xfrm>
           <a:prstGeom prst="roundRect">
@@ -27872,7 +28147,7 @@
         </p:nvSpPr>
         <p:spPr>
           <a:xfrm>
-            <a:off x="6141567" y="3657599"/>
+            <a:off x="6141567" y="3383280"/>
             <a:ext cx="384048" cy="265176"/>
           </a:xfrm>
           <a:prstGeom prst="rect">
@@ -27911,7 +28186,7 @@
         </p:nvSpPr>
         <p:spPr>
           <a:xfrm>
-            <a:off x="6617055" y="3648456"/>
+            <a:off x="6617055" y="3374136"/>
             <a:ext cx="4587087" cy="274320"/>
           </a:xfrm>
           <a:prstGeom prst="rect">
@@ -27950,7 +28225,7 @@
         </p:nvSpPr>
         <p:spPr>
           <a:xfrm>
-            <a:off x="11213287" y="3648456"/>
+            <a:off x="11213287" y="3374136"/>
             <a:ext cx="457200" cy="274320"/>
           </a:xfrm>
           <a:prstGeom prst="rect">
@@ -27989,7 +28264,7 @@
         </p:nvSpPr>
         <p:spPr>
           <a:xfrm>
-            <a:off x="6141567" y="3950208"/>
+            <a:off x="6141567" y="3675887"/>
             <a:ext cx="384048" cy="228600"/>
           </a:xfrm>
           <a:prstGeom prst="roundRect">
@@ -28033,7 +28308,7 @@
         </p:nvSpPr>
         <p:spPr>
           <a:xfrm>
-            <a:off x="6141567" y="3931920"/>
+            <a:off x="6141567" y="3657599"/>
             <a:ext cx="384048" cy="265176"/>
           </a:xfrm>
           <a:prstGeom prst="rect">
@@ -28072,7 +28347,7 @@
         </p:nvSpPr>
         <p:spPr>
           <a:xfrm>
-            <a:off x="6617055" y="3922776"/>
+            <a:off x="6617055" y="3648456"/>
             <a:ext cx="4587087" cy="274320"/>
           </a:xfrm>
           <a:prstGeom prst="rect">
@@ -28098,7 +28373,7 @@
                 </a:solidFill>
                 <a:latin typeface="Malgun Gothic"/>
               </a:rPr>
-              <a:t>기능 요약 · 데이터</a:t>
+              <a:t>강사 통합 관리 개편 (명부 필터 · 그룹 · 상세 탭)</a:t>
             </a:r>
           </a:p>
         </p:txBody>
@@ -28111,7 +28386,7 @@
         </p:nvSpPr>
         <p:spPr>
           <a:xfrm>
-            <a:off x="11213287" y="3922776"/>
+            <a:off x="11213287" y="3648456"/>
             <a:ext cx="457200" cy="274320"/>
           </a:xfrm>
           <a:prstGeom prst="rect">
@@ -28150,7 +28425,7 @@
         </p:nvSpPr>
         <p:spPr>
           <a:xfrm>
-            <a:off x="6141567" y="4224528"/>
+            <a:off x="6141567" y="3950208"/>
             <a:ext cx="384048" cy="228600"/>
           </a:xfrm>
           <a:prstGeom prst="roundRect">
@@ -28194,7 +28469,7 @@
         </p:nvSpPr>
         <p:spPr>
           <a:xfrm>
-            <a:off x="6141567" y="4206240"/>
+            <a:off x="6141567" y="3931920"/>
             <a:ext cx="384048" cy="265176"/>
           </a:xfrm>
           <a:prstGeom prst="rect">
@@ -28233,7 +28508,7 @@
         </p:nvSpPr>
         <p:spPr>
           <a:xfrm>
-            <a:off x="6617055" y="4197096"/>
+            <a:off x="6617055" y="3922776"/>
             <a:ext cx="4587087" cy="274320"/>
           </a:xfrm>
           <a:prstGeom prst="rect">
@@ -28259,7 +28534,7 @@
                 </a:solidFill>
                 <a:latin typeface="Malgun Gothic"/>
               </a:rPr>
-              <a:t>한눈에 보는 데이터</a:t>
+              <a:t>학부모 월간 성적표 (오각형) 발송</a:t>
             </a:r>
           </a:p>
         </p:txBody>
@@ -28272,7 +28547,7 @@
         </p:nvSpPr>
         <p:spPr>
           <a:xfrm>
-            <a:off x="11213287" y="4197096"/>
+            <a:off x="11213287" y="3922776"/>
             <a:ext cx="457200" cy="274320"/>
           </a:xfrm>
           <a:prstGeom prst="rect">
@@ -28311,7 +28586,7 @@
         </p:nvSpPr>
         <p:spPr>
           <a:xfrm>
-            <a:off x="6141567" y="4498848"/>
+            <a:off x="6141567" y="4224528"/>
             <a:ext cx="384048" cy="228600"/>
           </a:xfrm>
           <a:prstGeom prst="roundRect">
@@ -28355,7 +28630,7 @@
         </p:nvSpPr>
         <p:spPr>
           <a:xfrm>
-            <a:off x="6141567" y="4480560"/>
+            <a:off x="6141567" y="4206240"/>
             <a:ext cx="384048" cy="265176"/>
           </a:xfrm>
           <a:prstGeom prst="rect">
@@ -28394,7 +28669,7 @@
         </p:nvSpPr>
         <p:spPr>
           <a:xfrm>
-            <a:off x="6617055" y="4471416"/>
+            <a:off x="6617055" y="4197096"/>
             <a:ext cx="4587087" cy="274320"/>
           </a:xfrm>
           <a:prstGeom prst="rect">
@@ -28420,7 +28695,7 @@
                 </a:solidFill>
                 <a:latin typeface="Malgun Gothic"/>
               </a:rPr>
-              <a:t>자주 묻는 질문 (FAQ)</a:t>
+              <a:t>기능 요약 · 데이터</a:t>
             </a:r>
           </a:p>
         </p:txBody>
@@ -28433,7 +28708,7 @@
         </p:nvSpPr>
         <p:spPr>
           <a:xfrm>
-            <a:off x="11213287" y="4471416"/>
+            <a:off x="11213287" y="4197096"/>
             <a:ext cx="457200" cy="274320"/>
           </a:xfrm>
           <a:prstGeom prst="rect">
@@ -28472,7 +28747,7 @@
         </p:nvSpPr>
         <p:spPr>
           <a:xfrm>
-            <a:off x="6141567" y="4773168"/>
+            <a:off x="6141567" y="4498848"/>
             <a:ext cx="384048" cy="228600"/>
           </a:xfrm>
           <a:prstGeom prst="roundRect">
@@ -28516,7 +28791,7 @@
         </p:nvSpPr>
         <p:spPr>
           <a:xfrm>
-            <a:off x="6141567" y="4754880"/>
+            <a:off x="6141567" y="4480560"/>
             <a:ext cx="384048" cy="265176"/>
           </a:xfrm>
           <a:prstGeom prst="rect">
@@ -28555,7 +28830,7 @@
         </p:nvSpPr>
         <p:spPr>
           <a:xfrm>
-            <a:off x="6617055" y="4745736"/>
+            <a:off x="6617055" y="4471416"/>
             <a:ext cx="4587087" cy="274320"/>
           </a:xfrm>
           <a:prstGeom prst="rect">
@@ -28581,7 +28856,7 @@
                 </a:solidFill>
                 <a:latin typeface="Malgun Gothic"/>
               </a:rPr>
-              <a:t>체크리스트</a:t>
+              <a:t>한눈에 보는 데이터</a:t>
             </a:r>
           </a:p>
         </p:txBody>
@@ -28594,7 +28869,7 @@
         </p:nvSpPr>
         <p:spPr>
           <a:xfrm>
-            <a:off x="11213287" y="4745736"/>
+            <a:off x="11213287" y="4471416"/>
             <a:ext cx="457200" cy="274320"/>
           </a:xfrm>
           <a:prstGeom prst="rect">
@@ -28633,7 +28908,7 @@
         </p:nvSpPr>
         <p:spPr>
           <a:xfrm>
-            <a:off x="6141567" y="5047488"/>
+            <a:off x="6141567" y="4773168"/>
             <a:ext cx="384048" cy="228600"/>
           </a:xfrm>
           <a:prstGeom prst="roundRect">
@@ -28677,6 +28952,167 @@
         </p:nvSpPr>
         <p:spPr>
           <a:xfrm>
+            <a:off x="6141567" y="4754880"/>
+            <a:ext cx="384048" cy="265176"/>
+          </a:xfrm>
+          <a:prstGeom prst="rect">
+            <a:avLst/>
+          </a:prstGeom>
+          <a:noFill/>
+        </p:spPr>
+        <p:txBody>
+          <a:bodyPr wrap="square" anchor="ctr">
+            <a:spAutoFit/>
+          </a:bodyPr>
+          <a:lstStyle/>
+          <a:p>
+            <a:pPr algn="ctr">
+              <a:lnSpc>
+                <a:spcPct val="100000"/>
+              </a:lnSpc>
+            </a:pPr>
+            <a:r>
+              <a:rPr sz="900" b="1">
+                <a:solidFill>
+                  <a:srgbClr val="FFFFFF"/>
+                </a:solidFill>
+                <a:latin typeface="Malgun Gothic"/>
+              </a:rPr>
+              <a:t>27</a:t>
+            </a:r>
+          </a:p>
+        </p:txBody>
+      </p:sp>
+      <p:sp>
+        <p:nvSpPr>
+          <p:cNvPr id="115" name="TextBox 114"/>
+          <p:cNvSpPr txBox="1"/>
+          <p:nvPr/>
+        </p:nvSpPr>
+        <p:spPr>
+          <a:xfrm>
+            <a:off x="6617055" y="4745736"/>
+            <a:ext cx="4587087" cy="274320"/>
+          </a:xfrm>
+          <a:prstGeom prst="rect">
+            <a:avLst/>
+          </a:prstGeom>
+          <a:noFill/>
+        </p:spPr>
+        <p:txBody>
+          <a:bodyPr wrap="square" anchor="ctr">
+            <a:spAutoFit/>
+          </a:bodyPr>
+          <a:lstStyle/>
+          <a:p>
+            <a:pPr algn="l">
+              <a:lnSpc>
+                <a:spcPct val="100000"/>
+              </a:lnSpc>
+            </a:pPr>
+            <a:r>
+              <a:rPr sz="1050" b="1">
+                <a:solidFill>
+                  <a:srgbClr val="334155"/>
+                </a:solidFill>
+                <a:latin typeface="Malgun Gothic"/>
+              </a:rPr>
+              <a:t>자주 묻는 질문 (FAQ)</a:t>
+            </a:r>
+          </a:p>
+        </p:txBody>
+      </p:sp>
+      <p:sp>
+        <p:nvSpPr>
+          <p:cNvPr id="116" name="TextBox 115"/>
+          <p:cNvSpPr txBox="1"/>
+          <p:nvPr/>
+        </p:nvSpPr>
+        <p:spPr>
+          <a:xfrm>
+            <a:off x="11213287" y="4745736"/>
+            <a:ext cx="457200" cy="274320"/>
+          </a:xfrm>
+          <a:prstGeom prst="rect">
+            <a:avLst/>
+          </a:prstGeom>
+          <a:noFill/>
+        </p:spPr>
+        <p:txBody>
+          <a:bodyPr wrap="square" anchor="ctr">
+            <a:spAutoFit/>
+          </a:bodyPr>
+          <a:lstStyle/>
+          <a:p>
+            <a:pPr algn="r">
+              <a:lnSpc>
+                <a:spcPct val="100000"/>
+              </a:lnSpc>
+            </a:pPr>
+            <a:r>
+              <a:rPr sz="1050" b="1">
+                <a:solidFill>
+                  <a:srgbClr val="E11D48"/>
+                </a:solidFill>
+                <a:latin typeface="Malgun Gothic"/>
+              </a:rPr>
+              <a:t>30</a:t>
+            </a:r>
+          </a:p>
+        </p:txBody>
+      </p:sp>
+      <p:sp>
+        <p:nvSpPr>
+          <p:cNvPr id="117" name="Rounded Rectangle 116"/>
+          <p:cNvSpPr/>
+          <p:nvPr/>
+        </p:nvSpPr>
+        <p:spPr>
+          <a:xfrm>
+            <a:off x="6141567" y="5047488"/>
+            <a:ext cx="384048" cy="228600"/>
+          </a:xfrm>
+          <a:prstGeom prst="roundRect">
+            <a:avLst/>
+          </a:prstGeom>
+          <a:solidFill>
+            <a:srgbClr val="E11D48"/>
+          </a:solidFill>
+          <a:ln>
+            <a:noFill/>
+          </a:ln>
+          <a:effectLst/>
+        </p:spPr>
+        <p:style>
+          <a:lnRef idx="1">
+            <a:schemeClr val="accent1"/>
+          </a:lnRef>
+          <a:fillRef idx="3">
+            <a:schemeClr val="accent1"/>
+          </a:fillRef>
+          <a:effectRef idx="2">
+            <a:schemeClr val="accent1"/>
+          </a:effectRef>
+          <a:fontRef idx="minor">
+            <a:schemeClr val="lt1"/>
+          </a:fontRef>
+        </p:style>
+        <p:txBody>
+          <a:bodyPr rtlCol="0" anchor="ctr"/>
+          <a:lstStyle/>
+          <a:p>
+            <a:pPr algn="ctr"/>
+          </a:p>
+        </p:txBody>
+      </p:sp>
+      <p:sp>
+        <p:nvSpPr>
+          <p:cNvPr id="118" name="TextBox 117"/>
+          <p:cNvSpPr txBox="1"/>
+          <p:nvPr/>
+        </p:nvSpPr>
+        <p:spPr>
+          <a:xfrm>
             <a:off x="6141567" y="5029200"/>
             <a:ext cx="384048" cy="265176"/>
           </a:xfrm>
@@ -28703,14 +29139,14 @@
                 </a:solidFill>
                 <a:latin typeface="Malgun Gothic"/>
               </a:rPr>
-              <a:t>27</a:t>
-            </a:r>
-          </a:p>
-        </p:txBody>
-      </p:sp>
-      <p:sp>
-        <p:nvSpPr>
-          <p:cNvPr id="115" name="TextBox 114"/>
+              <a:t>28</a:t>
+            </a:r>
+          </a:p>
+        </p:txBody>
+      </p:sp>
+      <p:sp>
+        <p:nvSpPr>
+          <p:cNvPr id="119" name="TextBox 118"/>
           <p:cNvSpPr txBox="1"/>
           <p:nvPr/>
         </p:nvSpPr>
@@ -28742,14 +29178,14 @@
                 </a:solidFill>
                 <a:latin typeface="Malgun Gothic"/>
               </a:rPr>
-              <a:t>마무리</a:t>
-            </a:r>
-          </a:p>
-        </p:txBody>
-      </p:sp>
-      <p:sp>
-        <p:nvSpPr>
-          <p:cNvPr id="116" name="TextBox 115"/>
+              <a:t>체크리스트</a:t>
+            </a:r>
+          </a:p>
+        </p:txBody>
+      </p:sp>
+      <p:sp>
+        <p:nvSpPr>
+          <p:cNvPr id="120" name="TextBox 119"/>
           <p:cNvSpPr txBox="1"/>
           <p:nvPr/>
         </p:nvSpPr>
@@ -28781,7 +29217,168 @@
                 </a:solidFill>
                 <a:latin typeface="Malgun Gothic"/>
               </a:rPr>
-              <a:t>30</a:t>
+              <a:t>31</a:t>
+            </a:r>
+          </a:p>
+        </p:txBody>
+      </p:sp>
+      <p:sp>
+        <p:nvSpPr>
+          <p:cNvPr id="121" name="Rounded Rectangle 120"/>
+          <p:cNvSpPr/>
+          <p:nvPr/>
+        </p:nvSpPr>
+        <p:spPr>
+          <a:xfrm>
+            <a:off x="6141567" y="5321808"/>
+            <a:ext cx="384048" cy="228600"/>
+          </a:xfrm>
+          <a:prstGeom prst="roundRect">
+            <a:avLst/>
+          </a:prstGeom>
+          <a:solidFill>
+            <a:srgbClr val="E11D48"/>
+          </a:solidFill>
+          <a:ln>
+            <a:noFill/>
+          </a:ln>
+          <a:effectLst/>
+        </p:spPr>
+        <p:style>
+          <a:lnRef idx="1">
+            <a:schemeClr val="accent1"/>
+          </a:lnRef>
+          <a:fillRef idx="3">
+            <a:schemeClr val="accent1"/>
+          </a:fillRef>
+          <a:effectRef idx="2">
+            <a:schemeClr val="accent1"/>
+          </a:effectRef>
+          <a:fontRef idx="minor">
+            <a:schemeClr val="lt1"/>
+          </a:fontRef>
+        </p:style>
+        <p:txBody>
+          <a:bodyPr rtlCol="0" anchor="ctr"/>
+          <a:lstStyle/>
+          <a:p>
+            <a:pPr algn="ctr"/>
+          </a:p>
+        </p:txBody>
+      </p:sp>
+      <p:sp>
+        <p:nvSpPr>
+          <p:cNvPr id="122" name="TextBox 121"/>
+          <p:cNvSpPr txBox="1"/>
+          <p:nvPr/>
+        </p:nvSpPr>
+        <p:spPr>
+          <a:xfrm>
+            <a:off x="6141567" y="5303520"/>
+            <a:ext cx="384048" cy="265176"/>
+          </a:xfrm>
+          <a:prstGeom prst="rect">
+            <a:avLst/>
+          </a:prstGeom>
+          <a:noFill/>
+        </p:spPr>
+        <p:txBody>
+          <a:bodyPr wrap="square" anchor="ctr">
+            <a:spAutoFit/>
+          </a:bodyPr>
+          <a:lstStyle/>
+          <a:p>
+            <a:pPr algn="ctr">
+              <a:lnSpc>
+                <a:spcPct val="100000"/>
+              </a:lnSpc>
+            </a:pPr>
+            <a:r>
+              <a:rPr sz="900" b="1">
+                <a:solidFill>
+                  <a:srgbClr val="FFFFFF"/>
+                </a:solidFill>
+                <a:latin typeface="Malgun Gothic"/>
+              </a:rPr>
+              <a:t>29</a:t>
+            </a:r>
+          </a:p>
+        </p:txBody>
+      </p:sp>
+      <p:sp>
+        <p:nvSpPr>
+          <p:cNvPr id="123" name="TextBox 122"/>
+          <p:cNvSpPr txBox="1"/>
+          <p:nvPr/>
+        </p:nvSpPr>
+        <p:spPr>
+          <a:xfrm>
+            <a:off x="6617055" y="5294376"/>
+            <a:ext cx="4587087" cy="274320"/>
+          </a:xfrm>
+          <a:prstGeom prst="rect">
+            <a:avLst/>
+          </a:prstGeom>
+          <a:noFill/>
+        </p:spPr>
+        <p:txBody>
+          <a:bodyPr wrap="square" anchor="ctr">
+            <a:spAutoFit/>
+          </a:bodyPr>
+          <a:lstStyle/>
+          <a:p>
+            <a:pPr algn="l">
+              <a:lnSpc>
+                <a:spcPct val="100000"/>
+              </a:lnSpc>
+            </a:pPr>
+            <a:r>
+              <a:rPr sz="1050" b="1">
+                <a:solidFill>
+                  <a:srgbClr val="334155"/>
+                </a:solidFill>
+                <a:latin typeface="Malgun Gothic"/>
+              </a:rPr>
+              <a:t>마무리</a:t>
+            </a:r>
+          </a:p>
+        </p:txBody>
+      </p:sp>
+      <p:sp>
+        <p:nvSpPr>
+          <p:cNvPr id="124" name="TextBox 123"/>
+          <p:cNvSpPr txBox="1"/>
+          <p:nvPr/>
+        </p:nvSpPr>
+        <p:spPr>
+          <a:xfrm>
+            <a:off x="11213287" y="5294376"/>
+            <a:ext cx="457200" cy="274320"/>
+          </a:xfrm>
+          <a:prstGeom prst="rect">
+            <a:avLst/>
+          </a:prstGeom>
+          <a:noFill/>
+        </p:spPr>
+        <p:txBody>
+          <a:bodyPr wrap="square" anchor="ctr">
+            <a:spAutoFit/>
+          </a:bodyPr>
+          <a:lstStyle/>
+          <a:p>
+            <a:pPr algn="r">
+              <a:lnSpc>
+                <a:spcPct val="100000"/>
+              </a:lnSpc>
+            </a:pPr>
+            <a:r>
+              <a:rPr sz="1050" b="1">
+                <a:solidFill>
+                  <a:srgbClr val="E11D48"/>
+                </a:solidFill>
+                <a:latin typeface="Malgun Gothic"/>
+              </a:rPr>
+              <a:t>32</a:t>
             </a:r>
           </a:p>
         </p:txBody>
@@ -28973,7 +29570,7 @@
                 </a:solidFill>
                 <a:latin typeface="Malgun Gothic"/>
               </a:rPr>
-              <a:t>마무리</a:t>
+              <a:t>자주 묻는 질문 (FAQ)</a:t>
             </a:r>
           </a:p>
         </p:txBody>
@@ -29057,6 +29654,1873 @@
                 <a:latin typeface="Malgun Gothic"/>
               </a:rPr>
               <a:t>27</a:t>
+            </a:r>
+          </a:p>
+        </p:txBody>
+      </p:sp>
+      <p:sp>
+        <p:nvSpPr>
+          <p:cNvPr id="8" name="TextBox 7"/>
+          <p:cNvSpPr txBox="1"/>
+          <p:nvPr/>
+        </p:nvSpPr>
+        <p:spPr>
+          <a:xfrm>
+            <a:off x="1143000" y="868680"/>
+            <a:ext cx="9144000" cy="457200"/>
+          </a:xfrm>
+          <a:prstGeom prst="rect">
+            <a:avLst/>
+          </a:prstGeom>
+          <a:noFill/>
+        </p:spPr>
+        <p:txBody>
+          <a:bodyPr wrap="square" anchor="t">
+            <a:spAutoFit/>
+          </a:bodyPr>
+          <a:lstStyle/>
+          <a:p>
+            <a:pPr algn="l">
+              <a:lnSpc>
+                <a:spcPct val="100000"/>
+              </a:lnSpc>
+            </a:pPr>
+            <a:r>
+              <a:rPr sz="2200" b="1">
+                <a:solidFill>
+                  <a:srgbClr val="E11D48"/>
+                </a:solidFill>
+                <a:latin typeface="Malgun Gothic"/>
+              </a:rPr>
+              <a:t>❓ 자주 묻는 질문 (FAQ)</a:t>
+            </a:r>
+          </a:p>
+        </p:txBody>
+      </p:sp>
+      <p:sp>
+        <p:nvSpPr>
+          <p:cNvPr id="9" name="Rounded Rectangle 8"/>
+          <p:cNvSpPr/>
+          <p:nvPr/>
+        </p:nvSpPr>
+        <p:spPr>
+          <a:xfrm>
+            <a:off x="365760" y="1554480"/>
+            <a:ext cx="11460175" cy="868680"/>
+          </a:xfrm>
+          <a:prstGeom prst="roundRect">
+            <a:avLst/>
+          </a:prstGeom>
+          <a:solidFill>
+            <a:srgbClr val="F8FAFC"/>
+          </a:solidFill>
+          <a:ln w="12700">
+            <a:solidFill>
+              <a:srgbClr val="E2E8F0"/>
+            </a:solidFill>
+          </a:ln>
+          <a:effectLst/>
+        </p:spPr>
+        <p:style>
+          <a:lnRef idx="1">
+            <a:schemeClr val="accent1"/>
+          </a:lnRef>
+          <a:fillRef idx="3">
+            <a:schemeClr val="accent1"/>
+          </a:fillRef>
+          <a:effectRef idx="2">
+            <a:schemeClr val="accent1"/>
+          </a:effectRef>
+          <a:fontRef idx="minor">
+            <a:schemeClr val="lt1"/>
+          </a:fontRef>
+        </p:style>
+        <p:txBody>
+          <a:bodyPr rtlCol="0" anchor="ctr"/>
+          <a:lstStyle/>
+          <a:p>
+            <a:pPr algn="ctr"/>
+          </a:p>
+        </p:txBody>
+      </p:sp>
+      <p:sp>
+        <p:nvSpPr>
+          <p:cNvPr id="10" name="TextBox 9"/>
+          <p:cNvSpPr txBox="1"/>
+          <p:nvPr/>
+        </p:nvSpPr>
+        <p:spPr>
+          <a:xfrm>
+            <a:off x="548640" y="1627632"/>
+            <a:ext cx="11094415" cy="365760"/>
+          </a:xfrm>
+          <a:prstGeom prst="rect">
+            <a:avLst/>
+          </a:prstGeom>
+          <a:noFill/>
+        </p:spPr>
+        <p:txBody>
+          <a:bodyPr wrap="square" anchor="t">
+            <a:spAutoFit/>
+          </a:bodyPr>
+          <a:lstStyle/>
+          <a:p>
+            <a:pPr algn="l">
+              <a:lnSpc>
+                <a:spcPct val="100000"/>
+              </a:lnSpc>
+            </a:pPr>
+            <a:r>
+              <a:rPr sz="1350" b="1">
+                <a:solidFill>
+                  <a:srgbClr val="E11D48"/>
+                </a:solidFill>
+                <a:latin typeface="Malgun Gothic"/>
+              </a:rPr>
+              <a:t>Q. 어디서 접속하나요?</a:t>
+            </a:r>
+          </a:p>
+        </p:txBody>
+      </p:sp>
+      <p:sp>
+        <p:nvSpPr>
+          <p:cNvPr id="11" name="TextBox 10"/>
+          <p:cNvSpPr txBox="1"/>
+          <p:nvPr/>
+        </p:nvSpPr>
+        <p:spPr>
+          <a:xfrm>
+            <a:off x="548640" y="1965960"/>
+            <a:ext cx="11094415" cy="411480"/>
+          </a:xfrm>
+          <a:prstGeom prst="rect">
+            <a:avLst/>
+          </a:prstGeom>
+          <a:noFill/>
+        </p:spPr>
+        <p:txBody>
+          <a:bodyPr wrap="square" anchor="t">
+            <a:spAutoFit/>
+          </a:bodyPr>
+          <a:lstStyle/>
+          <a:p>
+            <a:pPr algn="l">
+              <a:lnSpc>
+                <a:spcPct val="105000"/>
+              </a:lnSpc>
+            </a:pPr>
+            <a:r>
+              <a:rPr sz="1150" b="0">
+                <a:solidFill>
+                  <a:srgbClr val="475569"/>
+                </a:solidFill>
+                <a:latin typeface="Malgun Gothic"/>
+              </a:rPr>
+              <a:t>A. admin.mangoi.co.kr 에서 로그인해요. 권한(대리점)에 따라 우리 대리점 데이터만 자동으로 보여요.</a:t>
+            </a:r>
+          </a:p>
+        </p:txBody>
+      </p:sp>
+      <p:sp>
+        <p:nvSpPr>
+          <p:cNvPr id="12" name="Rounded Rectangle 11"/>
+          <p:cNvSpPr/>
+          <p:nvPr/>
+        </p:nvSpPr>
+        <p:spPr>
+          <a:xfrm>
+            <a:off x="365760" y="2542032"/>
+            <a:ext cx="11460175" cy="868680"/>
+          </a:xfrm>
+          <a:prstGeom prst="roundRect">
+            <a:avLst/>
+          </a:prstGeom>
+          <a:solidFill>
+            <a:srgbClr val="F8FAFC"/>
+          </a:solidFill>
+          <a:ln w="12700">
+            <a:solidFill>
+              <a:srgbClr val="E2E8F0"/>
+            </a:solidFill>
+          </a:ln>
+          <a:effectLst/>
+        </p:spPr>
+        <p:style>
+          <a:lnRef idx="1">
+            <a:schemeClr val="accent1"/>
+          </a:lnRef>
+          <a:fillRef idx="3">
+            <a:schemeClr val="accent1"/>
+          </a:fillRef>
+          <a:effectRef idx="2">
+            <a:schemeClr val="accent1"/>
+          </a:effectRef>
+          <a:fontRef idx="minor">
+            <a:schemeClr val="lt1"/>
+          </a:fontRef>
+        </p:style>
+        <p:txBody>
+          <a:bodyPr rtlCol="0" anchor="ctr"/>
+          <a:lstStyle/>
+          <a:p>
+            <a:pPr algn="ctr"/>
+          </a:p>
+        </p:txBody>
+      </p:sp>
+      <p:sp>
+        <p:nvSpPr>
+          <p:cNvPr id="13" name="TextBox 12"/>
+          <p:cNvSpPr txBox="1"/>
+          <p:nvPr/>
+        </p:nvSpPr>
+        <p:spPr>
+          <a:xfrm>
+            <a:off x="548640" y="2615184"/>
+            <a:ext cx="11094415" cy="365760"/>
+          </a:xfrm>
+          <a:prstGeom prst="rect">
+            <a:avLst/>
+          </a:prstGeom>
+          <a:noFill/>
+        </p:spPr>
+        <p:txBody>
+          <a:bodyPr wrap="square" anchor="t">
+            <a:spAutoFit/>
+          </a:bodyPr>
+          <a:lstStyle/>
+          <a:p>
+            <a:pPr algn="l">
+              <a:lnSpc>
+                <a:spcPct val="100000"/>
+              </a:lnSpc>
+            </a:pPr>
+            <a:r>
+              <a:rPr sz="1350" b="1">
+                <a:solidFill>
+                  <a:srgbClr val="E11D48"/>
+                </a:solidFill>
+                <a:latin typeface="Malgun Gothic"/>
+              </a:rPr>
+              <a:t>Q. 다른 대리점 데이터도 보이나요?</a:t>
+            </a:r>
+          </a:p>
+        </p:txBody>
+      </p:sp>
+      <p:sp>
+        <p:nvSpPr>
+          <p:cNvPr id="14" name="TextBox 13"/>
+          <p:cNvSpPr txBox="1"/>
+          <p:nvPr/>
+        </p:nvSpPr>
+        <p:spPr>
+          <a:xfrm>
+            <a:off x="548640" y="2953512"/>
+            <a:ext cx="11094415" cy="411480"/>
+          </a:xfrm>
+          <a:prstGeom prst="rect">
+            <a:avLst/>
+          </a:prstGeom>
+          <a:noFill/>
+        </p:spPr>
+        <p:txBody>
+          <a:bodyPr wrap="square" anchor="t">
+            <a:spAutoFit/>
+          </a:bodyPr>
+          <a:lstStyle/>
+          <a:p>
+            <a:pPr algn="l">
+              <a:lnSpc>
+                <a:spcPct val="105000"/>
+              </a:lnSpc>
+            </a:pPr>
+            <a:r>
+              <a:rPr sz="1150" b="0">
+                <a:solidFill>
+                  <a:srgbClr val="475569"/>
+                </a:solidFill>
+                <a:latin typeface="Malgun Gothic"/>
+              </a:rPr>
+              <a:t>A. 아니요. 권한 범위상 우리 대리점 데이터만 보입니다.</a:t>
+            </a:r>
+          </a:p>
+        </p:txBody>
+      </p:sp>
+      <p:sp>
+        <p:nvSpPr>
+          <p:cNvPr id="15" name="Rounded Rectangle 14"/>
+          <p:cNvSpPr/>
+          <p:nvPr/>
+        </p:nvSpPr>
+        <p:spPr>
+          <a:xfrm>
+            <a:off x="365760" y="3529584"/>
+            <a:ext cx="11460175" cy="868680"/>
+          </a:xfrm>
+          <a:prstGeom prst="roundRect">
+            <a:avLst/>
+          </a:prstGeom>
+          <a:solidFill>
+            <a:srgbClr val="F8FAFC"/>
+          </a:solidFill>
+          <a:ln w="12700">
+            <a:solidFill>
+              <a:srgbClr val="E2E8F0"/>
+            </a:solidFill>
+          </a:ln>
+          <a:effectLst/>
+        </p:spPr>
+        <p:style>
+          <a:lnRef idx="1">
+            <a:schemeClr val="accent1"/>
+          </a:lnRef>
+          <a:fillRef idx="3">
+            <a:schemeClr val="accent1"/>
+          </a:fillRef>
+          <a:effectRef idx="2">
+            <a:schemeClr val="accent1"/>
+          </a:effectRef>
+          <a:fontRef idx="minor">
+            <a:schemeClr val="lt1"/>
+          </a:fontRef>
+        </p:style>
+        <p:txBody>
+          <a:bodyPr rtlCol="0" anchor="ctr"/>
+          <a:lstStyle/>
+          <a:p>
+            <a:pPr algn="ctr"/>
+          </a:p>
+        </p:txBody>
+      </p:sp>
+      <p:sp>
+        <p:nvSpPr>
+          <p:cNvPr id="16" name="TextBox 15"/>
+          <p:cNvSpPr txBox="1"/>
+          <p:nvPr/>
+        </p:nvSpPr>
+        <p:spPr>
+          <a:xfrm>
+            <a:off x="548640" y="3602736"/>
+            <a:ext cx="11094415" cy="365760"/>
+          </a:xfrm>
+          <a:prstGeom prst="rect">
+            <a:avLst/>
+          </a:prstGeom>
+          <a:noFill/>
+        </p:spPr>
+        <p:txBody>
+          <a:bodyPr wrap="square" anchor="t">
+            <a:spAutoFit/>
+          </a:bodyPr>
+          <a:lstStyle/>
+          <a:p>
+            <a:pPr algn="l">
+              <a:lnSpc>
+                <a:spcPct val="100000"/>
+              </a:lnSpc>
+            </a:pPr>
+            <a:r>
+              <a:rPr sz="1350" b="1">
+                <a:solidFill>
+                  <a:srgbClr val="E11D48"/>
+                </a:solidFill>
+                <a:latin typeface="Malgun Gothic"/>
+              </a:rPr>
+              <a:t>Q. 등록을 늘리려면?</a:t>
+            </a:r>
+          </a:p>
+        </p:txBody>
+      </p:sp>
+      <p:sp>
+        <p:nvSpPr>
+          <p:cNvPr id="17" name="TextBox 16"/>
+          <p:cNvSpPr txBox="1"/>
+          <p:nvPr/>
+        </p:nvSpPr>
+        <p:spPr>
+          <a:xfrm>
+            <a:off x="548640" y="3941064"/>
+            <a:ext cx="11094415" cy="411480"/>
+          </a:xfrm>
+          <a:prstGeom prst="rect">
+            <a:avLst/>
+          </a:prstGeom>
+          <a:noFill/>
+        </p:spPr>
+        <p:txBody>
+          <a:bodyPr wrap="square" anchor="t">
+            <a:spAutoFit/>
+          </a:bodyPr>
+          <a:lstStyle/>
+          <a:p>
+            <a:pPr algn="l">
+              <a:lnSpc>
+                <a:spcPct val="105000"/>
+              </a:lnSpc>
+            </a:pPr>
+            <a:r>
+              <a:rPr sz="1150" b="0">
+                <a:solidFill>
+                  <a:srgbClr val="475569"/>
+                </a:solidFill>
+                <a:latin typeface="Malgun Gothic"/>
+              </a:rPr>
+              <a:t>A. 빠른 상담 응대와 체험→등록 흐름, 학습 리포트를 활용한 학부모 설득이 핵심입니다.</a:t>
+            </a:r>
+          </a:p>
+        </p:txBody>
+      </p:sp>
+      <p:sp>
+        <p:nvSpPr>
+          <p:cNvPr id="18" name="Rounded Rectangle 17"/>
+          <p:cNvSpPr/>
+          <p:nvPr/>
+        </p:nvSpPr>
+        <p:spPr>
+          <a:xfrm>
+            <a:off x="365760" y="4517136"/>
+            <a:ext cx="11460175" cy="868680"/>
+          </a:xfrm>
+          <a:prstGeom prst="roundRect">
+            <a:avLst/>
+          </a:prstGeom>
+          <a:solidFill>
+            <a:srgbClr val="F8FAFC"/>
+          </a:solidFill>
+          <a:ln w="12700">
+            <a:solidFill>
+              <a:srgbClr val="E2E8F0"/>
+            </a:solidFill>
+          </a:ln>
+          <a:effectLst/>
+        </p:spPr>
+        <p:style>
+          <a:lnRef idx="1">
+            <a:schemeClr val="accent1"/>
+          </a:lnRef>
+          <a:fillRef idx="3">
+            <a:schemeClr val="accent1"/>
+          </a:fillRef>
+          <a:effectRef idx="2">
+            <a:schemeClr val="accent1"/>
+          </a:effectRef>
+          <a:fontRef idx="minor">
+            <a:schemeClr val="lt1"/>
+          </a:fontRef>
+        </p:style>
+        <p:txBody>
+          <a:bodyPr rtlCol="0" anchor="ctr"/>
+          <a:lstStyle/>
+          <a:p>
+            <a:pPr algn="ctr"/>
+          </a:p>
+        </p:txBody>
+      </p:sp>
+      <p:sp>
+        <p:nvSpPr>
+          <p:cNvPr id="19" name="TextBox 18"/>
+          <p:cNvSpPr txBox="1"/>
+          <p:nvPr/>
+        </p:nvSpPr>
+        <p:spPr>
+          <a:xfrm>
+            <a:off x="548640" y="4590288"/>
+            <a:ext cx="11094415" cy="365760"/>
+          </a:xfrm>
+          <a:prstGeom prst="rect">
+            <a:avLst/>
+          </a:prstGeom>
+          <a:noFill/>
+        </p:spPr>
+        <p:txBody>
+          <a:bodyPr wrap="square" anchor="t">
+            <a:spAutoFit/>
+          </a:bodyPr>
+          <a:lstStyle/>
+          <a:p>
+            <a:pPr algn="l">
+              <a:lnSpc>
+                <a:spcPct val="100000"/>
+              </a:lnSpc>
+            </a:pPr>
+            <a:r>
+              <a:rPr sz="1350" b="1">
+                <a:solidFill>
+                  <a:srgbClr val="E11D48"/>
+                </a:solidFill>
+                <a:latin typeface="Malgun Gothic"/>
+              </a:rPr>
+              <a:t>Q. 정산은 어떻게 확인하나요?</a:t>
+            </a:r>
+          </a:p>
+        </p:txBody>
+      </p:sp>
+      <p:sp>
+        <p:nvSpPr>
+          <p:cNvPr id="20" name="TextBox 19"/>
+          <p:cNvSpPr txBox="1"/>
+          <p:nvPr/>
+        </p:nvSpPr>
+        <p:spPr>
+          <a:xfrm>
+            <a:off x="548640" y="4928616"/>
+            <a:ext cx="11094415" cy="411480"/>
+          </a:xfrm>
+          <a:prstGeom prst="rect">
+            <a:avLst/>
+          </a:prstGeom>
+          <a:noFill/>
+        </p:spPr>
+        <p:txBody>
+          <a:bodyPr wrap="square" anchor="t">
+            <a:spAutoFit/>
+          </a:bodyPr>
+          <a:lstStyle/>
+          <a:p>
+            <a:pPr algn="l">
+              <a:lnSpc>
+                <a:spcPct val="105000"/>
+              </a:lnSpc>
+            </a:pPr>
+            <a:r>
+              <a:rPr sz="1150" b="0">
+                <a:solidFill>
+                  <a:srgbClr val="475569"/>
+                </a:solidFill>
+                <a:latin typeface="Malgun Gothic"/>
+              </a:rPr>
+              <a:t>A. 지사→대리점 정산(수령액)이 조직 트리 구조로 자동 계산되며, 월간 리포트에서 확인합니다.</a:t>
+            </a:r>
+          </a:p>
+        </p:txBody>
+      </p:sp>
+      <p:sp>
+        <p:nvSpPr>
+          <p:cNvPr id="21" name="Rounded Rectangle 20"/>
+          <p:cNvSpPr/>
+          <p:nvPr/>
+        </p:nvSpPr>
+        <p:spPr>
+          <a:xfrm>
+            <a:off x="365760" y="5504688"/>
+            <a:ext cx="11460175" cy="868680"/>
+          </a:xfrm>
+          <a:prstGeom prst="roundRect">
+            <a:avLst/>
+          </a:prstGeom>
+          <a:solidFill>
+            <a:srgbClr val="F8FAFC"/>
+          </a:solidFill>
+          <a:ln w="12700">
+            <a:solidFill>
+              <a:srgbClr val="E2E8F0"/>
+            </a:solidFill>
+          </a:ln>
+          <a:effectLst/>
+        </p:spPr>
+        <p:style>
+          <a:lnRef idx="1">
+            <a:schemeClr val="accent1"/>
+          </a:lnRef>
+          <a:fillRef idx="3">
+            <a:schemeClr val="accent1"/>
+          </a:fillRef>
+          <a:effectRef idx="2">
+            <a:schemeClr val="accent1"/>
+          </a:effectRef>
+          <a:fontRef idx="minor">
+            <a:schemeClr val="lt1"/>
+          </a:fontRef>
+        </p:style>
+        <p:txBody>
+          <a:bodyPr rtlCol="0" anchor="ctr"/>
+          <a:lstStyle/>
+          <a:p>
+            <a:pPr algn="ctr"/>
+          </a:p>
+        </p:txBody>
+      </p:sp>
+      <p:sp>
+        <p:nvSpPr>
+          <p:cNvPr id="22" name="TextBox 21"/>
+          <p:cNvSpPr txBox="1"/>
+          <p:nvPr/>
+        </p:nvSpPr>
+        <p:spPr>
+          <a:xfrm>
+            <a:off x="548640" y="5577840"/>
+            <a:ext cx="11094415" cy="365760"/>
+          </a:xfrm>
+          <a:prstGeom prst="rect">
+            <a:avLst/>
+          </a:prstGeom>
+          <a:noFill/>
+        </p:spPr>
+        <p:txBody>
+          <a:bodyPr wrap="square" anchor="t">
+            <a:spAutoFit/>
+          </a:bodyPr>
+          <a:lstStyle/>
+          <a:p>
+            <a:pPr algn="l">
+              <a:lnSpc>
+                <a:spcPct val="100000"/>
+              </a:lnSpc>
+            </a:pPr>
+            <a:r>
+              <a:rPr sz="1350" b="1">
+                <a:solidFill>
+                  <a:srgbClr val="E11D48"/>
+                </a:solidFill>
+                <a:latin typeface="Malgun Gothic"/>
+              </a:rPr>
+              <a:t>Q. 학생이 그만둘 것 같아요.</a:t>
+            </a:r>
+          </a:p>
+        </p:txBody>
+      </p:sp>
+      <p:sp>
+        <p:nvSpPr>
+          <p:cNvPr id="23" name="TextBox 22"/>
+          <p:cNvSpPr txBox="1"/>
+          <p:nvPr/>
+        </p:nvSpPr>
+        <p:spPr>
+          <a:xfrm>
+            <a:off x="548640" y="5916168"/>
+            <a:ext cx="11094415" cy="411480"/>
+          </a:xfrm>
+          <a:prstGeom prst="rect">
+            <a:avLst/>
+          </a:prstGeom>
+          <a:noFill/>
+        </p:spPr>
+        <p:txBody>
+          <a:bodyPr wrap="square" anchor="t">
+            <a:spAutoFit/>
+          </a:bodyPr>
+          <a:lstStyle/>
+          <a:p>
+            <a:pPr algn="l">
+              <a:lnSpc>
+                <a:spcPct val="105000"/>
+              </a:lnSpc>
+            </a:pPr>
+            <a:r>
+              <a:rPr sz="1150" b="0">
+                <a:solidFill>
+                  <a:srgbClr val="475569"/>
+                </a:solidFill>
+                <a:latin typeface="Malgun Gothic"/>
+              </a:rPr>
+              <a:t>A. 이탈위험 신호(결석·성과 하락)를 보고 상담·알림톡으로 빠르게 개입하세요.</a:t>
+            </a:r>
+          </a:p>
+        </p:txBody>
+      </p:sp>
+    </p:spTree>
+  </p:cSld>
+  <p:clrMapOvr>
+    <a:masterClrMapping/>
+  </p:clrMapOvr>
+</p:sld>
+</file>
+
+<file path=ppt/slides/slide31.xml><?xml version="1.0" encoding="utf-8"?>
+<p:sld xmlns:a="http://schemas.openxmlformats.org/drawingml/2006/main" xmlns:p="http://schemas.openxmlformats.org/presentationml/2006/main" xmlns:r="http://schemas.openxmlformats.org/officeDocument/2006/relationships">
+  <p:cSld>
+    <p:bg>
+      <p:bgPr>
+        <a:solidFill>
+          <a:srgbClr val="FFF1F2"/>
+        </a:solidFill>
+        <a:effectLst/>
+      </p:bgPr>
+    </p:bg>
+    <p:spTree>
+      <p:nvGrpSpPr>
+        <p:cNvPr id="1" name=""/>
+        <p:cNvGrpSpPr/>
+        <p:nvPr/>
+      </p:nvGrpSpPr>
+      <p:grpSpPr/>
+      <p:sp>
+        <p:nvSpPr>
+          <p:cNvPr id="2" name="Rectangle 1"/>
+          <p:cNvSpPr/>
+          <p:nvPr/>
+        </p:nvSpPr>
+        <p:spPr>
+          <a:xfrm>
+            <a:off x="0" y="0"/>
+            <a:ext cx="12191695" cy="566928"/>
+          </a:xfrm>
+          <a:prstGeom prst="rect">
+            <a:avLst/>
+          </a:prstGeom>
+          <a:solidFill>
+            <a:srgbClr val="E11D48"/>
+          </a:solidFill>
+          <a:ln>
+            <a:noFill/>
+          </a:ln>
+          <a:effectLst/>
+        </p:spPr>
+        <p:style>
+          <a:lnRef idx="1">
+            <a:schemeClr val="accent1"/>
+          </a:lnRef>
+          <a:fillRef idx="3">
+            <a:schemeClr val="accent1"/>
+          </a:fillRef>
+          <a:effectRef idx="2">
+            <a:schemeClr val="accent1"/>
+          </a:effectRef>
+          <a:fontRef idx="minor">
+            <a:schemeClr val="lt1"/>
+          </a:fontRef>
+        </p:style>
+        <p:txBody>
+          <a:bodyPr rtlCol="0" anchor="ctr"/>
+          <a:lstStyle/>
+          <a:p>
+            <a:pPr algn="ctr"/>
+          </a:p>
+        </p:txBody>
+      </p:sp>
+      <p:sp>
+        <p:nvSpPr>
+          <p:cNvPr id="3" name="Rectangle 2"/>
+          <p:cNvSpPr/>
+          <p:nvPr/>
+        </p:nvSpPr>
+        <p:spPr>
+          <a:xfrm>
+            <a:off x="0" y="566928"/>
+            <a:ext cx="12191695" cy="54864"/>
+          </a:xfrm>
+          <a:prstGeom prst="rect">
+            <a:avLst/>
+          </a:prstGeom>
+          <a:solidFill>
+            <a:srgbClr val="0EA5E9"/>
+          </a:solidFill>
+          <a:ln>
+            <a:noFill/>
+          </a:ln>
+          <a:effectLst/>
+        </p:spPr>
+        <p:style>
+          <a:lnRef idx="1">
+            <a:schemeClr val="accent1"/>
+          </a:lnRef>
+          <a:fillRef idx="3">
+            <a:schemeClr val="accent1"/>
+          </a:fillRef>
+          <a:effectRef idx="2">
+            <a:schemeClr val="accent1"/>
+          </a:effectRef>
+          <a:fontRef idx="minor">
+            <a:schemeClr val="lt1"/>
+          </a:fontRef>
+        </p:style>
+        <p:txBody>
+          <a:bodyPr rtlCol="0" anchor="ctr"/>
+          <a:lstStyle/>
+          <a:p>
+            <a:pPr algn="ctr"/>
+          </a:p>
+        </p:txBody>
+      </p:sp>
+      <p:sp>
+        <p:nvSpPr>
+          <p:cNvPr id="4" name="TextBox 3"/>
+          <p:cNvSpPr txBox="1"/>
+          <p:nvPr/>
+        </p:nvSpPr>
+        <p:spPr>
+          <a:xfrm>
+            <a:off x="365760" y="27432"/>
+            <a:ext cx="7315200" cy="502920"/>
+          </a:xfrm>
+          <a:prstGeom prst="rect">
+            <a:avLst/>
+          </a:prstGeom>
+          <a:noFill/>
+        </p:spPr>
+        <p:txBody>
+          <a:bodyPr wrap="square" anchor="ctr">
+            <a:spAutoFit/>
+          </a:bodyPr>
+          <a:lstStyle/>
+          <a:p>
+            <a:pPr algn="l">
+              <a:lnSpc>
+                <a:spcPct val="100000"/>
+              </a:lnSpc>
+            </a:pPr>
+            <a:r>
+              <a:rPr sz="1500" b="1">
+                <a:solidFill>
+                  <a:srgbClr val="FFFFFF"/>
+                </a:solidFill>
+                <a:latin typeface="Malgun Gothic"/>
+              </a:rPr>
+              <a:t>🤝 망고아이 대리점용 사용설명서</a:t>
+            </a:r>
+          </a:p>
+        </p:txBody>
+      </p:sp>
+      <p:sp>
+        <p:nvSpPr>
+          <p:cNvPr id="5" name="TextBox 4"/>
+          <p:cNvSpPr txBox="1"/>
+          <p:nvPr/>
+        </p:nvSpPr>
+        <p:spPr>
+          <a:xfrm>
+            <a:off x="8168335" y="27432"/>
+            <a:ext cx="3657600" cy="502920"/>
+          </a:xfrm>
+          <a:prstGeom prst="rect">
+            <a:avLst/>
+          </a:prstGeom>
+          <a:noFill/>
+        </p:spPr>
+        <p:txBody>
+          <a:bodyPr wrap="square" anchor="ctr">
+            <a:spAutoFit/>
+          </a:bodyPr>
+          <a:lstStyle/>
+          <a:p>
+            <a:pPr algn="r">
+              <a:lnSpc>
+                <a:spcPct val="100000"/>
+              </a:lnSpc>
+            </a:pPr>
+            <a:r>
+              <a:rPr sz="1300" b="1">
+                <a:solidFill>
+                  <a:srgbClr val="F1F5F9"/>
+                </a:solidFill>
+                <a:latin typeface="Malgun Gothic"/>
+              </a:rPr>
+              <a:t>체크리스트</a:t>
+            </a:r>
+          </a:p>
+        </p:txBody>
+      </p:sp>
+      <p:sp>
+        <p:nvSpPr>
+          <p:cNvPr id="6" name="Rounded Rectangle 5"/>
+          <p:cNvSpPr/>
+          <p:nvPr/>
+        </p:nvSpPr>
+        <p:spPr>
+          <a:xfrm>
+            <a:off x="365760" y="841248"/>
+            <a:ext cx="658368" cy="512064"/>
+          </a:xfrm>
+          <a:prstGeom prst="roundRect">
+            <a:avLst/>
+          </a:prstGeom>
+          <a:solidFill>
+            <a:srgbClr val="E11D48"/>
+          </a:solidFill>
+          <a:ln>
+            <a:noFill/>
+          </a:ln>
+          <a:effectLst/>
+        </p:spPr>
+        <p:style>
+          <a:lnRef idx="1">
+            <a:schemeClr val="accent1"/>
+          </a:lnRef>
+          <a:fillRef idx="3">
+            <a:schemeClr val="accent1"/>
+          </a:fillRef>
+          <a:effectRef idx="2">
+            <a:schemeClr val="accent1"/>
+          </a:effectRef>
+          <a:fontRef idx="minor">
+            <a:schemeClr val="lt1"/>
+          </a:fontRef>
+        </p:style>
+        <p:txBody>
+          <a:bodyPr rtlCol="0" anchor="ctr"/>
+          <a:lstStyle/>
+          <a:p>
+            <a:pPr algn="ctr"/>
+          </a:p>
+        </p:txBody>
+      </p:sp>
+      <p:sp>
+        <p:nvSpPr>
+          <p:cNvPr id="7" name="TextBox 6"/>
+          <p:cNvSpPr txBox="1"/>
+          <p:nvPr/>
+        </p:nvSpPr>
+        <p:spPr>
+          <a:xfrm>
+            <a:off x="365760" y="841248"/>
+            <a:ext cx="658368" cy="512064"/>
+          </a:xfrm>
+          <a:prstGeom prst="rect">
+            <a:avLst/>
+          </a:prstGeom>
+          <a:noFill/>
+        </p:spPr>
+        <p:txBody>
+          <a:bodyPr wrap="square" anchor="ctr">
+            <a:spAutoFit/>
+          </a:bodyPr>
+          <a:lstStyle/>
+          <a:p>
+            <a:pPr algn="ctr">
+              <a:lnSpc>
+                <a:spcPct val="100000"/>
+              </a:lnSpc>
+            </a:pPr>
+            <a:r>
+              <a:rPr sz="1700" b="1">
+                <a:solidFill>
+                  <a:srgbClr val="FFFFFF"/>
+                </a:solidFill>
+                <a:latin typeface="Malgun Gothic"/>
+              </a:rPr>
+              <a:t>28</a:t>
+            </a:r>
+          </a:p>
+        </p:txBody>
+      </p:sp>
+      <p:sp>
+        <p:nvSpPr>
+          <p:cNvPr id="8" name="TextBox 7"/>
+          <p:cNvSpPr txBox="1"/>
+          <p:nvPr/>
+        </p:nvSpPr>
+        <p:spPr>
+          <a:xfrm>
+            <a:off x="1143000" y="868680"/>
+            <a:ext cx="9144000" cy="457200"/>
+          </a:xfrm>
+          <a:prstGeom prst="rect">
+            <a:avLst/>
+          </a:prstGeom>
+          <a:noFill/>
+        </p:spPr>
+        <p:txBody>
+          <a:bodyPr wrap="square" anchor="t">
+            <a:spAutoFit/>
+          </a:bodyPr>
+          <a:lstStyle/>
+          <a:p>
+            <a:pPr algn="l">
+              <a:lnSpc>
+                <a:spcPct val="100000"/>
+              </a:lnSpc>
+            </a:pPr>
+            <a:r>
+              <a:rPr sz="2200" b="1">
+                <a:solidFill>
+                  <a:srgbClr val="E11D48"/>
+                </a:solidFill>
+                <a:latin typeface="Malgun Gothic"/>
+              </a:rPr>
+              <a:t>✅ 대리점 운영 체크리스트</a:t>
+            </a:r>
+          </a:p>
+        </p:txBody>
+      </p:sp>
+      <p:sp>
+        <p:nvSpPr>
+          <p:cNvPr id="9" name="Rounded Rectangle 8"/>
+          <p:cNvSpPr/>
+          <p:nvPr/>
+        </p:nvSpPr>
+        <p:spPr>
+          <a:xfrm>
+            <a:off x="457200" y="1645920"/>
+            <a:ext cx="292608" cy="292608"/>
+          </a:xfrm>
+          <a:prstGeom prst="roundRect">
+            <a:avLst/>
+          </a:prstGeom>
+          <a:solidFill>
+            <a:srgbClr val="FFFFFF"/>
+          </a:solidFill>
+          <a:ln w="12700">
+            <a:solidFill>
+              <a:srgbClr val="E11D48"/>
+            </a:solidFill>
+          </a:ln>
+          <a:effectLst/>
+        </p:spPr>
+        <p:style>
+          <a:lnRef idx="1">
+            <a:schemeClr val="accent1"/>
+          </a:lnRef>
+          <a:fillRef idx="3">
+            <a:schemeClr val="accent1"/>
+          </a:fillRef>
+          <a:effectRef idx="2">
+            <a:schemeClr val="accent1"/>
+          </a:effectRef>
+          <a:fontRef idx="minor">
+            <a:schemeClr val="lt1"/>
+          </a:fontRef>
+        </p:style>
+        <p:txBody>
+          <a:bodyPr rtlCol="0" anchor="ctr"/>
+          <a:lstStyle/>
+          <a:p>
+            <a:pPr algn="ctr"/>
+          </a:p>
+        </p:txBody>
+      </p:sp>
+      <p:sp>
+        <p:nvSpPr>
+          <p:cNvPr id="10" name="TextBox 9"/>
+          <p:cNvSpPr txBox="1"/>
+          <p:nvPr/>
+        </p:nvSpPr>
+        <p:spPr>
+          <a:xfrm>
+            <a:off x="914400" y="1581912"/>
+            <a:ext cx="10058400" cy="411480"/>
+          </a:xfrm>
+          <a:prstGeom prst="rect">
+            <a:avLst/>
+          </a:prstGeom>
+          <a:noFill/>
+        </p:spPr>
+        <p:txBody>
+          <a:bodyPr wrap="square" anchor="t">
+            <a:spAutoFit/>
+          </a:bodyPr>
+          <a:lstStyle/>
+          <a:p>
+            <a:pPr algn="l">
+              <a:lnSpc>
+                <a:spcPct val="100000"/>
+              </a:lnSpc>
+            </a:pPr>
+            <a:r>
+              <a:rPr sz="1500" b="1">
+                <a:solidFill>
+                  <a:srgbClr val="334155"/>
+                </a:solidFill>
+                <a:latin typeface="Malgun Gothic"/>
+              </a:rPr>
+              <a:t>오늘 매출·재원·출석 지표를 확인했나요?</a:t>
+            </a:r>
+          </a:p>
+        </p:txBody>
+      </p:sp>
+      <p:sp>
+        <p:nvSpPr>
+          <p:cNvPr id="11" name="Rounded Rectangle 10"/>
+          <p:cNvSpPr/>
+          <p:nvPr/>
+        </p:nvSpPr>
+        <p:spPr>
+          <a:xfrm>
+            <a:off x="457200" y="2212848"/>
+            <a:ext cx="292608" cy="292608"/>
+          </a:xfrm>
+          <a:prstGeom prst="roundRect">
+            <a:avLst/>
+          </a:prstGeom>
+          <a:solidFill>
+            <a:srgbClr val="FFFFFF"/>
+          </a:solidFill>
+          <a:ln w="12700">
+            <a:solidFill>
+              <a:srgbClr val="E11D48"/>
+            </a:solidFill>
+          </a:ln>
+          <a:effectLst/>
+        </p:spPr>
+        <p:style>
+          <a:lnRef idx="1">
+            <a:schemeClr val="accent1"/>
+          </a:lnRef>
+          <a:fillRef idx="3">
+            <a:schemeClr val="accent1"/>
+          </a:fillRef>
+          <a:effectRef idx="2">
+            <a:schemeClr val="accent1"/>
+          </a:effectRef>
+          <a:fontRef idx="minor">
+            <a:schemeClr val="lt1"/>
+          </a:fontRef>
+        </p:style>
+        <p:txBody>
+          <a:bodyPr rtlCol="0" anchor="ctr"/>
+          <a:lstStyle/>
+          <a:p>
+            <a:pPr algn="ctr"/>
+          </a:p>
+        </p:txBody>
+      </p:sp>
+      <p:sp>
+        <p:nvSpPr>
+          <p:cNvPr id="12" name="TextBox 11"/>
+          <p:cNvSpPr txBox="1"/>
+          <p:nvPr/>
+        </p:nvSpPr>
+        <p:spPr>
+          <a:xfrm>
+            <a:off x="914400" y="2148840"/>
+            <a:ext cx="10058400" cy="411480"/>
+          </a:xfrm>
+          <a:prstGeom prst="rect">
+            <a:avLst/>
+          </a:prstGeom>
+          <a:noFill/>
+        </p:spPr>
+        <p:txBody>
+          <a:bodyPr wrap="square" anchor="t">
+            <a:spAutoFit/>
+          </a:bodyPr>
+          <a:lstStyle/>
+          <a:p>
+            <a:pPr algn="l">
+              <a:lnSpc>
+                <a:spcPct val="100000"/>
+              </a:lnSpc>
+            </a:pPr>
+            <a:r>
+              <a:rPr sz="1500" b="1">
+                <a:solidFill>
+                  <a:srgbClr val="334155"/>
+                </a:solidFill>
+                <a:latin typeface="Malgun Gothic"/>
+              </a:rPr>
+              <a:t>신규 상담/문의를 접수·응대했나요?</a:t>
+            </a:r>
+          </a:p>
+        </p:txBody>
+      </p:sp>
+      <p:sp>
+        <p:nvSpPr>
+          <p:cNvPr id="13" name="Rounded Rectangle 12"/>
+          <p:cNvSpPr/>
+          <p:nvPr/>
+        </p:nvSpPr>
+        <p:spPr>
+          <a:xfrm>
+            <a:off x="457200" y="2779776"/>
+            <a:ext cx="292608" cy="292608"/>
+          </a:xfrm>
+          <a:prstGeom prst="roundRect">
+            <a:avLst/>
+          </a:prstGeom>
+          <a:solidFill>
+            <a:srgbClr val="FFFFFF"/>
+          </a:solidFill>
+          <a:ln w="12700">
+            <a:solidFill>
+              <a:srgbClr val="E11D48"/>
+            </a:solidFill>
+          </a:ln>
+          <a:effectLst/>
+        </p:spPr>
+        <p:style>
+          <a:lnRef idx="1">
+            <a:schemeClr val="accent1"/>
+          </a:lnRef>
+          <a:fillRef idx="3">
+            <a:schemeClr val="accent1"/>
+          </a:fillRef>
+          <a:effectRef idx="2">
+            <a:schemeClr val="accent1"/>
+          </a:effectRef>
+          <a:fontRef idx="minor">
+            <a:schemeClr val="lt1"/>
+          </a:fontRef>
+        </p:style>
+        <p:txBody>
+          <a:bodyPr rtlCol="0" anchor="ctr"/>
+          <a:lstStyle/>
+          <a:p>
+            <a:pPr algn="ctr"/>
+          </a:p>
+        </p:txBody>
+      </p:sp>
+      <p:sp>
+        <p:nvSpPr>
+          <p:cNvPr id="14" name="TextBox 13"/>
+          <p:cNvSpPr txBox="1"/>
+          <p:nvPr/>
+        </p:nvSpPr>
+        <p:spPr>
+          <a:xfrm>
+            <a:off x="914400" y="2715768"/>
+            <a:ext cx="10058400" cy="411480"/>
+          </a:xfrm>
+          <a:prstGeom prst="rect">
+            <a:avLst/>
+          </a:prstGeom>
+          <a:noFill/>
+        </p:spPr>
+        <p:txBody>
+          <a:bodyPr wrap="square" anchor="t">
+            <a:spAutoFit/>
+          </a:bodyPr>
+          <a:lstStyle/>
+          <a:p>
+            <a:pPr algn="l">
+              <a:lnSpc>
+                <a:spcPct val="100000"/>
+              </a:lnSpc>
+            </a:pPr>
+            <a:r>
+              <a:rPr sz="1500" b="1">
+                <a:solidFill>
+                  <a:srgbClr val="334155"/>
+                </a:solidFill>
+                <a:latin typeface="Malgun Gothic"/>
+              </a:rPr>
+              <a:t>미납 건을 확인하고 안내했나요?</a:t>
+            </a:r>
+          </a:p>
+        </p:txBody>
+      </p:sp>
+      <p:sp>
+        <p:nvSpPr>
+          <p:cNvPr id="15" name="Rounded Rectangle 14"/>
+          <p:cNvSpPr/>
+          <p:nvPr/>
+        </p:nvSpPr>
+        <p:spPr>
+          <a:xfrm>
+            <a:off x="457200" y="3346704"/>
+            <a:ext cx="292608" cy="292608"/>
+          </a:xfrm>
+          <a:prstGeom prst="roundRect">
+            <a:avLst/>
+          </a:prstGeom>
+          <a:solidFill>
+            <a:srgbClr val="FFFFFF"/>
+          </a:solidFill>
+          <a:ln w="12700">
+            <a:solidFill>
+              <a:srgbClr val="E11D48"/>
+            </a:solidFill>
+          </a:ln>
+          <a:effectLst/>
+        </p:spPr>
+        <p:style>
+          <a:lnRef idx="1">
+            <a:schemeClr val="accent1"/>
+          </a:lnRef>
+          <a:fillRef idx="3">
+            <a:schemeClr val="accent1"/>
+          </a:fillRef>
+          <a:effectRef idx="2">
+            <a:schemeClr val="accent1"/>
+          </a:effectRef>
+          <a:fontRef idx="minor">
+            <a:schemeClr val="lt1"/>
+          </a:fontRef>
+        </p:style>
+        <p:txBody>
+          <a:bodyPr rtlCol="0" anchor="ctr"/>
+          <a:lstStyle/>
+          <a:p>
+            <a:pPr algn="ctr"/>
+          </a:p>
+        </p:txBody>
+      </p:sp>
+      <p:sp>
+        <p:nvSpPr>
+          <p:cNvPr id="16" name="TextBox 15"/>
+          <p:cNvSpPr txBox="1"/>
+          <p:nvPr/>
+        </p:nvSpPr>
+        <p:spPr>
+          <a:xfrm>
+            <a:off x="914400" y="3282696"/>
+            <a:ext cx="10058400" cy="411480"/>
+          </a:xfrm>
+          <a:prstGeom prst="rect">
+            <a:avLst/>
+          </a:prstGeom>
+          <a:noFill/>
+        </p:spPr>
+        <p:txBody>
+          <a:bodyPr wrap="square" anchor="t">
+            <a:spAutoFit/>
+          </a:bodyPr>
+          <a:lstStyle/>
+          <a:p>
+            <a:pPr algn="l">
+              <a:lnSpc>
+                <a:spcPct val="100000"/>
+              </a:lnSpc>
+            </a:pPr>
+            <a:r>
+              <a:rPr sz="1500" b="1">
+                <a:solidFill>
+                  <a:srgbClr val="334155"/>
+                </a:solidFill>
+                <a:latin typeface="Malgun Gothic"/>
+              </a:rPr>
+              <a:t>이탈위험 학생을 챙겼나요?</a:t>
+            </a:r>
+          </a:p>
+        </p:txBody>
+      </p:sp>
+      <p:sp>
+        <p:nvSpPr>
+          <p:cNvPr id="17" name="Rounded Rectangle 16"/>
+          <p:cNvSpPr/>
+          <p:nvPr/>
+        </p:nvSpPr>
+        <p:spPr>
+          <a:xfrm>
+            <a:off x="457200" y="3913632"/>
+            <a:ext cx="292608" cy="292608"/>
+          </a:xfrm>
+          <a:prstGeom prst="roundRect">
+            <a:avLst/>
+          </a:prstGeom>
+          <a:solidFill>
+            <a:srgbClr val="FFFFFF"/>
+          </a:solidFill>
+          <a:ln w="12700">
+            <a:solidFill>
+              <a:srgbClr val="E11D48"/>
+            </a:solidFill>
+          </a:ln>
+          <a:effectLst/>
+        </p:spPr>
+        <p:style>
+          <a:lnRef idx="1">
+            <a:schemeClr val="accent1"/>
+          </a:lnRef>
+          <a:fillRef idx="3">
+            <a:schemeClr val="accent1"/>
+          </a:fillRef>
+          <a:effectRef idx="2">
+            <a:schemeClr val="accent1"/>
+          </a:effectRef>
+          <a:fontRef idx="minor">
+            <a:schemeClr val="lt1"/>
+          </a:fontRef>
+        </p:style>
+        <p:txBody>
+          <a:bodyPr rtlCol="0" anchor="ctr"/>
+          <a:lstStyle/>
+          <a:p>
+            <a:pPr algn="ctr"/>
+          </a:p>
+        </p:txBody>
+      </p:sp>
+      <p:sp>
+        <p:nvSpPr>
+          <p:cNvPr id="18" name="TextBox 17"/>
+          <p:cNvSpPr txBox="1"/>
+          <p:nvPr/>
+        </p:nvSpPr>
+        <p:spPr>
+          <a:xfrm>
+            <a:off x="914400" y="3849624"/>
+            <a:ext cx="10058400" cy="411480"/>
+          </a:xfrm>
+          <a:prstGeom prst="rect">
+            <a:avLst/>
+          </a:prstGeom>
+          <a:noFill/>
+        </p:spPr>
+        <p:txBody>
+          <a:bodyPr wrap="square" anchor="t">
+            <a:spAutoFit/>
+          </a:bodyPr>
+          <a:lstStyle/>
+          <a:p>
+            <a:pPr algn="l">
+              <a:lnSpc>
+                <a:spcPct val="100000"/>
+              </a:lnSpc>
+            </a:pPr>
+            <a:r>
+              <a:rPr sz="1500" b="1">
+                <a:solidFill>
+                  <a:srgbClr val="334155"/>
+                </a:solidFill>
+                <a:latin typeface="Malgun Gothic"/>
+              </a:rPr>
+              <a:t>학부모에게 리포트·마이페이지를 안내했나요?</a:t>
+            </a:r>
+          </a:p>
+        </p:txBody>
+      </p:sp>
+      <p:sp>
+        <p:nvSpPr>
+          <p:cNvPr id="19" name="Rounded Rectangle 18"/>
+          <p:cNvSpPr/>
+          <p:nvPr/>
+        </p:nvSpPr>
+        <p:spPr>
+          <a:xfrm>
+            <a:off x="457200" y="4480560"/>
+            <a:ext cx="292608" cy="292608"/>
+          </a:xfrm>
+          <a:prstGeom prst="roundRect">
+            <a:avLst/>
+          </a:prstGeom>
+          <a:solidFill>
+            <a:srgbClr val="FFFFFF"/>
+          </a:solidFill>
+          <a:ln w="12700">
+            <a:solidFill>
+              <a:srgbClr val="E11D48"/>
+            </a:solidFill>
+          </a:ln>
+          <a:effectLst/>
+        </p:spPr>
+        <p:style>
+          <a:lnRef idx="1">
+            <a:schemeClr val="accent1"/>
+          </a:lnRef>
+          <a:fillRef idx="3">
+            <a:schemeClr val="accent1"/>
+          </a:fillRef>
+          <a:effectRef idx="2">
+            <a:schemeClr val="accent1"/>
+          </a:effectRef>
+          <a:fontRef idx="minor">
+            <a:schemeClr val="lt1"/>
+          </a:fontRef>
+        </p:style>
+        <p:txBody>
+          <a:bodyPr rtlCol="0" anchor="ctr"/>
+          <a:lstStyle/>
+          <a:p>
+            <a:pPr algn="ctr"/>
+          </a:p>
+        </p:txBody>
+      </p:sp>
+      <p:sp>
+        <p:nvSpPr>
+          <p:cNvPr id="20" name="TextBox 19"/>
+          <p:cNvSpPr txBox="1"/>
+          <p:nvPr/>
+        </p:nvSpPr>
+        <p:spPr>
+          <a:xfrm>
+            <a:off x="914400" y="4416552"/>
+            <a:ext cx="10058400" cy="411480"/>
+          </a:xfrm>
+          <a:prstGeom prst="rect">
+            <a:avLst/>
+          </a:prstGeom>
+          <a:noFill/>
+        </p:spPr>
+        <p:txBody>
+          <a:bodyPr wrap="square" anchor="t">
+            <a:spAutoFit/>
+          </a:bodyPr>
+          <a:lstStyle/>
+          <a:p>
+            <a:pPr algn="l">
+              <a:lnSpc>
+                <a:spcPct val="100000"/>
+              </a:lnSpc>
+            </a:pPr>
+            <a:r>
+              <a:rPr sz="1500" b="1">
+                <a:solidFill>
+                  <a:srgbClr val="334155"/>
+                </a:solidFill>
+                <a:latin typeface="Malgun Gothic"/>
+              </a:rPr>
+              <a:t>이번 달 정산(수령)을 확인했나요?</a:t>
+            </a:r>
+          </a:p>
+        </p:txBody>
+      </p:sp>
+      <p:sp>
+        <p:nvSpPr>
+          <p:cNvPr id="21" name="Rounded Rectangle 20"/>
+          <p:cNvSpPr/>
+          <p:nvPr/>
+        </p:nvSpPr>
+        <p:spPr>
+          <a:xfrm>
+            <a:off x="457200" y="5047488"/>
+            <a:ext cx="292608" cy="292608"/>
+          </a:xfrm>
+          <a:prstGeom prst="roundRect">
+            <a:avLst/>
+          </a:prstGeom>
+          <a:solidFill>
+            <a:srgbClr val="FFFFFF"/>
+          </a:solidFill>
+          <a:ln w="12700">
+            <a:solidFill>
+              <a:srgbClr val="E11D48"/>
+            </a:solidFill>
+          </a:ln>
+          <a:effectLst/>
+        </p:spPr>
+        <p:style>
+          <a:lnRef idx="1">
+            <a:schemeClr val="accent1"/>
+          </a:lnRef>
+          <a:fillRef idx="3">
+            <a:schemeClr val="accent1"/>
+          </a:fillRef>
+          <a:effectRef idx="2">
+            <a:schemeClr val="accent1"/>
+          </a:effectRef>
+          <a:fontRef idx="minor">
+            <a:schemeClr val="lt1"/>
+          </a:fontRef>
+        </p:style>
+        <p:txBody>
+          <a:bodyPr rtlCol="0" anchor="ctr"/>
+          <a:lstStyle/>
+          <a:p>
+            <a:pPr algn="ctr"/>
+          </a:p>
+        </p:txBody>
+      </p:sp>
+      <p:sp>
+        <p:nvSpPr>
+          <p:cNvPr id="22" name="TextBox 21"/>
+          <p:cNvSpPr txBox="1"/>
+          <p:nvPr/>
+        </p:nvSpPr>
+        <p:spPr>
+          <a:xfrm>
+            <a:off x="914400" y="4983480"/>
+            <a:ext cx="10058400" cy="411480"/>
+          </a:xfrm>
+          <a:prstGeom prst="rect">
+            <a:avLst/>
+          </a:prstGeom>
+          <a:noFill/>
+        </p:spPr>
+        <p:txBody>
+          <a:bodyPr wrap="square" anchor="t">
+            <a:spAutoFit/>
+          </a:bodyPr>
+          <a:lstStyle/>
+          <a:p>
+            <a:pPr algn="l">
+              <a:lnSpc>
+                <a:spcPct val="100000"/>
+              </a:lnSpc>
+            </a:pPr>
+            <a:r>
+              <a:rPr sz="1500" b="1">
+                <a:solidFill>
+                  <a:srgbClr val="334155"/>
+                </a:solidFill>
+                <a:latin typeface="Malgun Gothic"/>
+              </a:rPr>
+              <a:t>체험→등록 후속 연락을 했나요?</a:t>
+            </a:r>
+          </a:p>
+        </p:txBody>
+      </p:sp>
+      <p:pic>
+        <p:nvPicPr>
+          <p:cNvPr id="23" name="Picture 22" descr="mango_char.png"/>
+          <p:cNvPicPr>
+            <a:picLocks noChangeAspect="1"/>
+          </p:cNvPicPr>
+          <p:nvPr/>
+        </p:nvPicPr>
+        <p:blipFill>
+          <a:blip r:embed="rId2"/>
+          <a:stretch>
+            <a:fillRect/>
+          </a:stretch>
+        </p:blipFill>
+        <p:spPr>
+          <a:xfrm>
+            <a:off x="9153162" y="4480559"/>
+            <a:ext cx="2489892" cy="2011680"/>
+          </a:xfrm>
+          <a:prstGeom prst="rect">
+            <a:avLst/>
+          </a:prstGeom>
+        </p:spPr>
+      </p:pic>
+    </p:spTree>
+  </p:cSld>
+  <p:clrMapOvr>
+    <a:masterClrMapping/>
+  </p:clrMapOvr>
+</p:sld>
+</file>
+
+<file path=ppt/slides/slide32.xml><?xml version="1.0" encoding="utf-8"?>
+<p:sld xmlns:a="http://schemas.openxmlformats.org/drawingml/2006/main" xmlns:p="http://schemas.openxmlformats.org/presentationml/2006/main" xmlns:r="http://schemas.openxmlformats.org/officeDocument/2006/relationships">
+  <p:cSld>
+    <p:bg>
+      <p:bgPr>
+        <a:solidFill>
+          <a:srgbClr val="FFFFFF"/>
+        </a:solidFill>
+        <a:effectLst/>
+      </p:bgPr>
+    </p:bg>
+    <p:spTree>
+      <p:nvGrpSpPr>
+        <p:cNvPr id="1" name=""/>
+        <p:cNvGrpSpPr/>
+        <p:nvPr/>
+      </p:nvGrpSpPr>
+      <p:grpSpPr/>
+      <p:sp>
+        <p:nvSpPr>
+          <p:cNvPr id="2" name="Rectangle 1"/>
+          <p:cNvSpPr/>
+          <p:nvPr/>
+        </p:nvSpPr>
+        <p:spPr>
+          <a:xfrm>
+            <a:off x="0" y="0"/>
+            <a:ext cx="12191695" cy="566928"/>
+          </a:xfrm>
+          <a:prstGeom prst="rect">
+            <a:avLst/>
+          </a:prstGeom>
+          <a:solidFill>
+            <a:srgbClr val="E11D48"/>
+          </a:solidFill>
+          <a:ln>
+            <a:noFill/>
+          </a:ln>
+          <a:effectLst/>
+        </p:spPr>
+        <p:style>
+          <a:lnRef idx="1">
+            <a:schemeClr val="accent1"/>
+          </a:lnRef>
+          <a:fillRef idx="3">
+            <a:schemeClr val="accent1"/>
+          </a:fillRef>
+          <a:effectRef idx="2">
+            <a:schemeClr val="accent1"/>
+          </a:effectRef>
+          <a:fontRef idx="minor">
+            <a:schemeClr val="lt1"/>
+          </a:fontRef>
+        </p:style>
+        <p:txBody>
+          <a:bodyPr rtlCol="0" anchor="ctr"/>
+          <a:lstStyle/>
+          <a:p>
+            <a:pPr algn="ctr"/>
+          </a:p>
+        </p:txBody>
+      </p:sp>
+      <p:sp>
+        <p:nvSpPr>
+          <p:cNvPr id="3" name="Rectangle 2"/>
+          <p:cNvSpPr/>
+          <p:nvPr/>
+        </p:nvSpPr>
+        <p:spPr>
+          <a:xfrm>
+            <a:off x="0" y="566928"/>
+            <a:ext cx="12191695" cy="54864"/>
+          </a:xfrm>
+          <a:prstGeom prst="rect">
+            <a:avLst/>
+          </a:prstGeom>
+          <a:solidFill>
+            <a:srgbClr val="0EA5E9"/>
+          </a:solidFill>
+          <a:ln>
+            <a:noFill/>
+          </a:ln>
+          <a:effectLst/>
+        </p:spPr>
+        <p:style>
+          <a:lnRef idx="1">
+            <a:schemeClr val="accent1"/>
+          </a:lnRef>
+          <a:fillRef idx="3">
+            <a:schemeClr val="accent1"/>
+          </a:fillRef>
+          <a:effectRef idx="2">
+            <a:schemeClr val="accent1"/>
+          </a:effectRef>
+          <a:fontRef idx="minor">
+            <a:schemeClr val="lt1"/>
+          </a:fontRef>
+        </p:style>
+        <p:txBody>
+          <a:bodyPr rtlCol="0" anchor="ctr"/>
+          <a:lstStyle/>
+          <a:p>
+            <a:pPr algn="ctr"/>
+          </a:p>
+        </p:txBody>
+      </p:sp>
+      <p:sp>
+        <p:nvSpPr>
+          <p:cNvPr id="4" name="TextBox 3"/>
+          <p:cNvSpPr txBox="1"/>
+          <p:nvPr/>
+        </p:nvSpPr>
+        <p:spPr>
+          <a:xfrm>
+            <a:off x="365760" y="27432"/>
+            <a:ext cx="7315200" cy="502920"/>
+          </a:xfrm>
+          <a:prstGeom prst="rect">
+            <a:avLst/>
+          </a:prstGeom>
+          <a:noFill/>
+        </p:spPr>
+        <p:txBody>
+          <a:bodyPr wrap="square" anchor="ctr">
+            <a:spAutoFit/>
+          </a:bodyPr>
+          <a:lstStyle/>
+          <a:p>
+            <a:pPr algn="l">
+              <a:lnSpc>
+                <a:spcPct val="100000"/>
+              </a:lnSpc>
+            </a:pPr>
+            <a:r>
+              <a:rPr sz="1500" b="1">
+                <a:solidFill>
+                  <a:srgbClr val="FFFFFF"/>
+                </a:solidFill>
+                <a:latin typeface="Malgun Gothic"/>
+              </a:rPr>
+              <a:t>🤝 망고아이 대리점용 사용설명서</a:t>
+            </a:r>
+          </a:p>
+        </p:txBody>
+      </p:sp>
+      <p:sp>
+        <p:nvSpPr>
+          <p:cNvPr id="5" name="TextBox 4"/>
+          <p:cNvSpPr txBox="1"/>
+          <p:nvPr/>
+        </p:nvSpPr>
+        <p:spPr>
+          <a:xfrm>
+            <a:off x="8168335" y="27432"/>
+            <a:ext cx="3657600" cy="502920"/>
+          </a:xfrm>
+          <a:prstGeom prst="rect">
+            <a:avLst/>
+          </a:prstGeom>
+          <a:noFill/>
+        </p:spPr>
+        <p:txBody>
+          <a:bodyPr wrap="square" anchor="ctr">
+            <a:spAutoFit/>
+          </a:bodyPr>
+          <a:lstStyle/>
+          <a:p>
+            <a:pPr algn="r">
+              <a:lnSpc>
+                <a:spcPct val="100000"/>
+              </a:lnSpc>
+            </a:pPr>
+            <a:r>
+              <a:rPr sz="1300" b="1">
+                <a:solidFill>
+                  <a:srgbClr val="F1F5F9"/>
+                </a:solidFill>
+                <a:latin typeface="Malgun Gothic"/>
+              </a:rPr>
+              <a:t>마무리</a:t>
+            </a:r>
+          </a:p>
+        </p:txBody>
+      </p:sp>
+      <p:sp>
+        <p:nvSpPr>
+          <p:cNvPr id="6" name="Rounded Rectangle 5"/>
+          <p:cNvSpPr/>
+          <p:nvPr/>
+        </p:nvSpPr>
+        <p:spPr>
+          <a:xfrm>
+            <a:off x="365760" y="841248"/>
+            <a:ext cx="658368" cy="512064"/>
+          </a:xfrm>
+          <a:prstGeom prst="roundRect">
+            <a:avLst/>
+          </a:prstGeom>
+          <a:solidFill>
+            <a:srgbClr val="E11D48"/>
+          </a:solidFill>
+          <a:ln>
+            <a:noFill/>
+          </a:ln>
+          <a:effectLst/>
+        </p:spPr>
+        <p:style>
+          <a:lnRef idx="1">
+            <a:schemeClr val="accent1"/>
+          </a:lnRef>
+          <a:fillRef idx="3">
+            <a:schemeClr val="accent1"/>
+          </a:fillRef>
+          <a:effectRef idx="2">
+            <a:schemeClr val="accent1"/>
+          </a:effectRef>
+          <a:fontRef idx="minor">
+            <a:schemeClr val="lt1"/>
+          </a:fontRef>
+        </p:style>
+        <p:txBody>
+          <a:bodyPr rtlCol="0" anchor="ctr"/>
+          <a:lstStyle/>
+          <a:p>
+            <a:pPr algn="ctr"/>
+          </a:p>
+        </p:txBody>
+      </p:sp>
+      <p:sp>
+        <p:nvSpPr>
+          <p:cNvPr id="7" name="TextBox 6"/>
+          <p:cNvSpPr txBox="1"/>
+          <p:nvPr/>
+        </p:nvSpPr>
+        <p:spPr>
+          <a:xfrm>
+            <a:off x="365760" y="841248"/>
+            <a:ext cx="658368" cy="512064"/>
+          </a:xfrm>
+          <a:prstGeom prst="rect">
+            <a:avLst/>
+          </a:prstGeom>
+          <a:noFill/>
+        </p:spPr>
+        <p:txBody>
+          <a:bodyPr wrap="square" anchor="ctr">
+            <a:spAutoFit/>
+          </a:bodyPr>
+          <a:lstStyle/>
+          <a:p>
+            <a:pPr algn="ctr">
+              <a:lnSpc>
+                <a:spcPct val="100000"/>
+              </a:lnSpc>
+            </a:pPr>
+            <a:r>
+              <a:rPr sz="1700" b="1">
+                <a:solidFill>
+                  <a:srgbClr val="FFFFFF"/>
+                </a:solidFill>
+                <a:latin typeface="Malgun Gothic"/>
+              </a:rPr>
+              <a:t>29</a:t>
             </a:r>
           </a:p>
         </p:txBody>
@@ -30301,7 +32765,7 @@
 </p:sld>
 </file>
 
-<file path=ppt/slides/slide31.xml><?xml version="1.0" encoding="utf-8"?>
+<file path=ppt/slides/slide33.xml><?xml version="1.0" encoding="utf-8"?>
 <p:sld xmlns:a="http://schemas.openxmlformats.org/drawingml/2006/main" xmlns:p="http://schemas.openxmlformats.org/presentationml/2006/main" xmlns:r="http://schemas.openxmlformats.org/officeDocument/2006/relationships">
   <p:cSld>
     <p:bg>
